--- a/screenshots/StockFix_Navigation_Guide.pptx
+++ b/screenshots/StockFix_Navigation_Guide.pptx
@@ -16,9 +16,14 @@
     <p:sldId id="264" r:id="rId10"/>
     <p:sldId id="265" r:id="rId11"/>
     <p:sldId id="266" r:id="rId12"/>
+    <p:sldId id="267" r:id="rId13"/>
+    <p:sldId id="268" r:id="rId14"/>
+    <p:sldId id="269" r:id="rId15"/>
+    <p:sldId id="270" r:id="rId16"/>
+    <p:sldId id="271" r:id="rId17"/>
   </p:sldIdLst>
   <p:notesMasterIdLst>
-    <p:notesMasterId r:id="rId13"/>
+    <p:notesMasterId r:id="rId18"/>
   </p:notesMasterIdLst>
   <p:sldSz cx="12191695" cy="6858000"/>
   <p:notesSz cx="6858000" cy="12191695"/>
@@ -712,6 +717,446 @@
             <a:fld id="{F7021451-1387-4CA6-816F-3879F97B5CBC}" type="slidenum">
               <a:rPr lang="en-US"/>
               <a:t>11</a:t>
+            </a:fld>
+            <a:endParaRPr lang="en-US"/>
+          </a:p>
+        </p:txBody>
+      </p:sp>
+    </p:spTree>
+    <p:extLst>
+      <p:ext uri="{BB962C8B-B14F-4D97-AF65-F5344CB8AC3E}">
+        <p14:creationId xmlns:p14="http://schemas.microsoft.com/office/powerpoint/2010/main" val="1024086991"/>
+      </p:ext>
+    </p:extLst>
+  </p:cSld>
+  <p:clrMapOvr>
+    <a:masterClrMapping/>
+  </p:clrMapOvr>
+</p:notes>
+</file>
+
+<file path=ppt/notesSlides/notesSlide12.xml><?xml version="1.0" encoding="utf-8"?>
+<p:notes xmlns:a="http://schemas.openxmlformats.org/drawingml/2006/main" xmlns:r="http://schemas.openxmlformats.org/officeDocument/2006/relationships" xmlns:p="http://schemas.openxmlformats.org/presentationml/2006/main">
+  <p:cSld>
+    <p:spTree>
+      <p:nvGrpSpPr>
+        <p:cNvPr id="1" name=""/>
+        <p:cNvGrpSpPr/>
+        <p:nvPr/>
+      </p:nvGrpSpPr>
+      <p:grpSpPr>
+        <a:xfrm>
+          <a:off x="0" y="0"/>
+          <a:ext cx="0" cy="0"/>
+          <a:chOff x="0" y="0"/>
+          <a:chExt cx="0" cy="0"/>
+        </a:xfrm>
+      </p:grpSpPr>
+      <p:sp>
+        <p:nvSpPr>
+          <p:cNvPr id="2" name="Slide Image Placeholder 1"/>
+          <p:cNvSpPr>
+            <a:spLocks noGrp="1" noRot="1" noChangeAspect="1"/>
+          </p:cNvSpPr>
+          <p:nvPr>
+            <p:ph type="sldImg"/>
+          </p:nvPr>
+        </p:nvSpPr>
+        <p:spPr/>
+      </p:sp>
+      <p:sp>
+        <p:nvSpPr>
+          <p:cNvPr id="3" name="Notes Placeholder 2"/>
+          <p:cNvSpPr>
+            <a:spLocks noGrp="1"/>
+          </p:cNvSpPr>
+          <p:nvPr>
+            <p:ph type="body" idx="1"/>
+          </p:nvPr>
+        </p:nvSpPr>
+        <p:spPr/>
+        <p:txBody>
+          <a:bodyPr/>
+          <a:lstStyle/>
+          <a:p>
+            <a:r>
+              <a:rPr lang="en-US" dirty="0"/>
+              <a:t/>
+            </a:r>
+            <a:endParaRPr lang="en-US" dirty="0"/>
+          </a:p>
+        </p:txBody>
+      </p:sp>
+      <p:sp>
+        <p:nvSpPr>
+          <p:cNvPr id="4" name="Slide Number Placeholder 3"/>
+          <p:cNvSpPr>
+            <a:spLocks noGrp="1"/>
+          </p:cNvSpPr>
+          <p:nvPr>
+            <p:ph type="sldNum" sz="quarter" idx="10"/>
+          </p:nvPr>
+        </p:nvSpPr>
+        <p:spPr/>
+        <p:txBody>
+          <a:bodyPr/>
+          <a:lstStyle/>
+          <a:p>
+            <a:fld id="{F7021451-1387-4CA6-816F-3879F97B5CBC}" type="slidenum">
+              <a:rPr lang="en-US"/>
+              <a:t>12</a:t>
+            </a:fld>
+            <a:endParaRPr lang="en-US"/>
+          </a:p>
+        </p:txBody>
+      </p:sp>
+    </p:spTree>
+    <p:extLst>
+      <p:ext uri="{BB962C8B-B14F-4D97-AF65-F5344CB8AC3E}">
+        <p14:creationId xmlns:p14="http://schemas.microsoft.com/office/powerpoint/2010/main" val="1024086991"/>
+      </p:ext>
+    </p:extLst>
+  </p:cSld>
+  <p:clrMapOvr>
+    <a:masterClrMapping/>
+  </p:clrMapOvr>
+</p:notes>
+</file>
+
+<file path=ppt/notesSlides/notesSlide13.xml><?xml version="1.0" encoding="utf-8"?>
+<p:notes xmlns:a="http://schemas.openxmlformats.org/drawingml/2006/main" xmlns:r="http://schemas.openxmlformats.org/officeDocument/2006/relationships" xmlns:p="http://schemas.openxmlformats.org/presentationml/2006/main">
+  <p:cSld>
+    <p:spTree>
+      <p:nvGrpSpPr>
+        <p:cNvPr id="1" name=""/>
+        <p:cNvGrpSpPr/>
+        <p:nvPr/>
+      </p:nvGrpSpPr>
+      <p:grpSpPr>
+        <a:xfrm>
+          <a:off x="0" y="0"/>
+          <a:ext cx="0" cy="0"/>
+          <a:chOff x="0" y="0"/>
+          <a:chExt cx="0" cy="0"/>
+        </a:xfrm>
+      </p:grpSpPr>
+      <p:sp>
+        <p:nvSpPr>
+          <p:cNvPr id="2" name="Slide Image Placeholder 1"/>
+          <p:cNvSpPr>
+            <a:spLocks noGrp="1" noRot="1" noChangeAspect="1"/>
+          </p:cNvSpPr>
+          <p:nvPr>
+            <p:ph type="sldImg"/>
+          </p:nvPr>
+        </p:nvSpPr>
+        <p:spPr/>
+      </p:sp>
+      <p:sp>
+        <p:nvSpPr>
+          <p:cNvPr id="3" name="Notes Placeholder 2"/>
+          <p:cNvSpPr>
+            <a:spLocks noGrp="1"/>
+          </p:cNvSpPr>
+          <p:nvPr>
+            <p:ph type="body" idx="1"/>
+          </p:nvPr>
+        </p:nvSpPr>
+        <p:spPr/>
+        <p:txBody>
+          <a:bodyPr/>
+          <a:lstStyle/>
+          <a:p>
+            <a:r>
+              <a:rPr lang="en-US" dirty="0"/>
+              <a:t/>
+            </a:r>
+            <a:endParaRPr lang="en-US" dirty="0"/>
+          </a:p>
+        </p:txBody>
+      </p:sp>
+      <p:sp>
+        <p:nvSpPr>
+          <p:cNvPr id="4" name="Slide Number Placeholder 3"/>
+          <p:cNvSpPr>
+            <a:spLocks noGrp="1"/>
+          </p:cNvSpPr>
+          <p:nvPr>
+            <p:ph type="sldNum" sz="quarter" idx="10"/>
+          </p:nvPr>
+        </p:nvSpPr>
+        <p:spPr/>
+        <p:txBody>
+          <a:bodyPr/>
+          <a:lstStyle/>
+          <a:p>
+            <a:fld id="{F7021451-1387-4CA6-816F-3879F97B5CBC}" type="slidenum">
+              <a:rPr lang="en-US"/>
+              <a:t>13</a:t>
+            </a:fld>
+            <a:endParaRPr lang="en-US"/>
+          </a:p>
+        </p:txBody>
+      </p:sp>
+    </p:spTree>
+    <p:extLst>
+      <p:ext uri="{BB962C8B-B14F-4D97-AF65-F5344CB8AC3E}">
+        <p14:creationId xmlns:p14="http://schemas.microsoft.com/office/powerpoint/2010/main" val="1024086991"/>
+      </p:ext>
+    </p:extLst>
+  </p:cSld>
+  <p:clrMapOvr>
+    <a:masterClrMapping/>
+  </p:clrMapOvr>
+</p:notes>
+</file>
+
+<file path=ppt/notesSlides/notesSlide14.xml><?xml version="1.0" encoding="utf-8"?>
+<p:notes xmlns:a="http://schemas.openxmlformats.org/drawingml/2006/main" xmlns:r="http://schemas.openxmlformats.org/officeDocument/2006/relationships" xmlns:p="http://schemas.openxmlformats.org/presentationml/2006/main">
+  <p:cSld>
+    <p:spTree>
+      <p:nvGrpSpPr>
+        <p:cNvPr id="1" name=""/>
+        <p:cNvGrpSpPr/>
+        <p:nvPr/>
+      </p:nvGrpSpPr>
+      <p:grpSpPr>
+        <a:xfrm>
+          <a:off x="0" y="0"/>
+          <a:ext cx="0" cy="0"/>
+          <a:chOff x="0" y="0"/>
+          <a:chExt cx="0" cy="0"/>
+        </a:xfrm>
+      </p:grpSpPr>
+      <p:sp>
+        <p:nvSpPr>
+          <p:cNvPr id="2" name="Slide Image Placeholder 1"/>
+          <p:cNvSpPr>
+            <a:spLocks noGrp="1" noRot="1" noChangeAspect="1"/>
+          </p:cNvSpPr>
+          <p:nvPr>
+            <p:ph type="sldImg"/>
+          </p:nvPr>
+        </p:nvSpPr>
+        <p:spPr/>
+      </p:sp>
+      <p:sp>
+        <p:nvSpPr>
+          <p:cNvPr id="3" name="Notes Placeholder 2"/>
+          <p:cNvSpPr>
+            <a:spLocks noGrp="1"/>
+          </p:cNvSpPr>
+          <p:nvPr>
+            <p:ph type="body" idx="1"/>
+          </p:nvPr>
+        </p:nvSpPr>
+        <p:spPr/>
+        <p:txBody>
+          <a:bodyPr/>
+          <a:lstStyle/>
+          <a:p>
+            <a:r>
+              <a:rPr lang="en-US" dirty="0"/>
+              <a:t/>
+            </a:r>
+            <a:endParaRPr lang="en-US" dirty="0"/>
+          </a:p>
+        </p:txBody>
+      </p:sp>
+      <p:sp>
+        <p:nvSpPr>
+          <p:cNvPr id="4" name="Slide Number Placeholder 3"/>
+          <p:cNvSpPr>
+            <a:spLocks noGrp="1"/>
+          </p:cNvSpPr>
+          <p:nvPr>
+            <p:ph type="sldNum" sz="quarter" idx="10"/>
+          </p:nvPr>
+        </p:nvSpPr>
+        <p:spPr/>
+        <p:txBody>
+          <a:bodyPr/>
+          <a:lstStyle/>
+          <a:p>
+            <a:fld id="{F7021451-1387-4CA6-816F-3879F97B5CBC}" type="slidenum">
+              <a:rPr lang="en-US"/>
+              <a:t>14</a:t>
+            </a:fld>
+            <a:endParaRPr lang="en-US"/>
+          </a:p>
+        </p:txBody>
+      </p:sp>
+    </p:spTree>
+    <p:extLst>
+      <p:ext uri="{BB962C8B-B14F-4D97-AF65-F5344CB8AC3E}">
+        <p14:creationId xmlns:p14="http://schemas.microsoft.com/office/powerpoint/2010/main" val="1024086991"/>
+      </p:ext>
+    </p:extLst>
+  </p:cSld>
+  <p:clrMapOvr>
+    <a:masterClrMapping/>
+  </p:clrMapOvr>
+</p:notes>
+</file>
+
+<file path=ppt/notesSlides/notesSlide15.xml><?xml version="1.0" encoding="utf-8"?>
+<p:notes xmlns:a="http://schemas.openxmlformats.org/drawingml/2006/main" xmlns:r="http://schemas.openxmlformats.org/officeDocument/2006/relationships" xmlns:p="http://schemas.openxmlformats.org/presentationml/2006/main">
+  <p:cSld>
+    <p:spTree>
+      <p:nvGrpSpPr>
+        <p:cNvPr id="1" name=""/>
+        <p:cNvGrpSpPr/>
+        <p:nvPr/>
+      </p:nvGrpSpPr>
+      <p:grpSpPr>
+        <a:xfrm>
+          <a:off x="0" y="0"/>
+          <a:ext cx="0" cy="0"/>
+          <a:chOff x="0" y="0"/>
+          <a:chExt cx="0" cy="0"/>
+        </a:xfrm>
+      </p:grpSpPr>
+      <p:sp>
+        <p:nvSpPr>
+          <p:cNvPr id="2" name="Slide Image Placeholder 1"/>
+          <p:cNvSpPr>
+            <a:spLocks noGrp="1" noRot="1" noChangeAspect="1"/>
+          </p:cNvSpPr>
+          <p:nvPr>
+            <p:ph type="sldImg"/>
+          </p:nvPr>
+        </p:nvSpPr>
+        <p:spPr/>
+      </p:sp>
+      <p:sp>
+        <p:nvSpPr>
+          <p:cNvPr id="3" name="Notes Placeholder 2"/>
+          <p:cNvSpPr>
+            <a:spLocks noGrp="1"/>
+          </p:cNvSpPr>
+          <p:nvPr>
+            <p:ph type="body" idx="1"/>
+          </p:nvPr>
+        </p:nvSpPr>
+        <p:spPr/>
+        <p:txBody>
+          <a:bodyPr/>
+          <a:lstStyle/>
+          <a:p>
+            <a:r>
+              <a:rPr lang="en-US" dirty="0"/>
+              <a:t/>
+            </a:r>
+            <a:endParaRPr lang="en-US" dirty="0"/>
+          </a:p>
+        </p:txBody>
+      </p:sp>
+      <p:sp>
+        <p:nvSpPr>
+          <p:cNvPr id="4" name="Slide Number Placeholder 3"/>
+          <p:cNvSpPr>
+            <a:spLocks noGrp="1"/>
+          </p:cNvSpPr>
+          <p:nvPr>
+            <p:ph type="sldNum" sz="quarter" idx="10"/>
+          </p:nvPr>
+        </p:nvSpPr>
+        <p:spPr/>
+        <p:txBody>
+          <a:bodyPr/>
+          <a:lstStyle/>
+          <a:p>
+            <a:fld id="{F7021451-1387-4CA6-816F-3879F97B5CBC}" type="slidenum">
+              <a:rPr lang="en-US"/>
+              <a:t>15</a:t>
+            </a:fld>
+            <a:endParaRPr lang="en-US"/>
+          </a:p>
+        </p:txBody>
+      </p:sp>
+    </p:spTree>
+    <p:extLst>
+      <p:ext uri="{BB962C8B-B14F-4D97-AF65-F5344CB8AC3E}">
+        <p14:creationId xmlns:p14="http://schemas.microsoft.com/office/powerpoint/2010/main" val="1024086991"/>
+      </p:ext>
+    </p:extLst>
+  </p:cSld>
+  <p:clrMapOvr>
+    <a:masterClrMapping/>
+  </p:clrMapOvr>
+</p:notes>
+</file>
+
+<file path=ppt/notesSlides/notesSlide16.xml><?xml version="1.0" encoding="utf-8"?>
+<p:notes xmlns:a="http://schemas.openxmlformats.org/drawingml/2006/main" xmlns:r="http://schemas.openxmlformats.org/officeDocument/2006/relationships" xmlns:p="http://schemas.openxmlformats.org/presentationml/2006/main">
+  <p:cSld>
+    <p:spTree>
+      <p:nvGrpSpPr>
+        <p:cNvPr id="1" name=""/>
+        <p:cNvGrpSpPr/>
+        <p:nvPr/>
+      </p:nvGrpSpPr>
+      <p:grpSpPr>
+        <a:xfrm>
+          <a:off x="0" y="0"/>
+          <a:ext cx="0" cy="0"/>
+          <a:chOff x="0" y="0"/>
+          <a:chExt cx="0" cy="0"/>
+        </a:xfrm>
+      </p:grpSpPr>
+      <p:sp>
+        <p:nvSpPr>
+          <p:cNvPr id="2" name="Slide Image Placeholder 1"/>
+          <p:cNvSpPr>
+            <a:spLocks noGrp="1" noRot="1" noChangeAspect="1"/>
+          </p:cNvSpPr>
+          <p:nvPr>
+            <p:ph type="sldImg"/>
+          </p:nvPr>
+        </p:nvSpPr>
+        <p:spPr/>
+      </p:sp>
+      <p:sp>
+        <p:nvSpPr>
+          <p:cNvPr id="3" name="Notes Placeholder 2"/>
+          <p:cNvSpPr>
+            <a:spLocks noGrp="1"/>
+          </p:cNvSpPr>
+          <p:nvPr>
+            <p:ph type="body" idx="1"/>
+          </p:nvPr>
+        </p:nvSpPr>
+        <p:spPr/>
+        <p:txBody>
+          <a:bodyPr/>
+          <a:lstStyle/>
+          <a:p>
+            <a:r>
+              <a:rPr lang="en-US" dirty="0"/>
+              <a:t/>
+            </a:r>
+            <a:endParaRPr lang="en-US" dirty="0"/>
+          </a:p>
+        </p:txBody>
+      </p:sp>
+      <p:sp>
+        <p:nvSpPr>
+          <p:cNvPr id="4" name="Slide Number Placeholder 3"/>
+          <p:cNvSpPr>
+            <a:spLocks noGrp="1"/>
+          </p:cNvSpPr>
+          <p:nvPr>
+            <p:ph type="sldNum" sz="quarter" idx="10"/>
+          </p:nvPr>
+        </p:nvSpPr>
+        <p:spPr/>
+        <p:txBody>
+          <a:bodyPr/>
+          <a:lstStyle/>
+          <a:p>
+            <a:fld id="{F7021451-1387-4CA6-816F-3879F97B5CBC}" type="slidenum">
+              <a:rPr lang="en-US"/>
+              <a:t>16</a:t>
             </a:fld>
             <a:endParaRPr lang="en-US"/>
           </a:p>
@@ -1896,7 +2341,7 @@
                 <a:ea typeface="Arial" pitchFamily="34" charset="-122"/>
                 <a:cs typeface="Arial" pitchFamily="34" charset="-120"/>
               </a:rPr>
-              <a:t>A screen-by-screen walkthrough of the StockFix inventory app</a:t>
+              <a:t>A screen-by-screen walkthrough — including exactly where to click and every dropdown available</a:t>
             </a:r>
             <a:endParaRPr lang="en-US" sz="1400" dirty="0"/>
           </a:p>
@@ -2026,7 +2471,7 @@
                 <a:ea typeface="Arial" pitchFamily="34" charset="-122"/>
                 <a:cs typeface="Arial" pitchFamily="34" charset="-120"/>
               </a:rPr>
-              <a:t>STEP 9 · MANAGER REPORTING</a:t>
+              <a:t>STEP 6C · TASK FEEDBACK</a:t>
             </a:r>
             <a:endParaRPr lang="en-US" sz="1200" dirty="0"/>
           </a:p>
@@ -2065,7 +2510,7 @@
                 <a:ea typeface="Arial" pitchFamily="34" charset="-122"/>
                 <a:cs typeface="Arial" pitchFamily="34" charset="-120"/>
               </a:rPr>
-              <a:t>Admin Leaderboard</a:t>
+              <a:t>Action Taken Dropdown Open</a:t>
             </a:r>
             <a:endParaRPr lang="en-US" sz="2600" dirty="0"/>
           </a:p>
@@ -2073,7 +2518,7 @@
       </p:sp>
       <p:pic>
         <p:nvPicPr>
-          <p:cNvPr id="5" name="Image 0" descr="/home/runner/workspace/screenshots/stockfix_guide/09_admin_leaderboard.jpg">    </p:cNvPr>
+          <p:cNvPr id="5" name="Image 0" descr="/home/runner/workspace/screenshots/stockfix_guide/15_task_action_taken_dropdown.jpg">    </p:cNvPr>
           <p:cNvPicPr>
             <a:picLocks noChangeAspect="1"/>
           </p:cNvPicPr>
@@ -2125,7 +2570,7 @@
         <p:spPr>
           <a:xfrm>
             <a:off x="7315200" y="1371600"/>
-            <a:ext cx="4480560" cy="1005840"/>
+            <a:ext cx="4480560" cy="822960"/>
           </a:xfrm>
           <a:prstGeom prst="rect">
             <a:avLst/>
@@ -2141,7 +2586,7 @@
               <a:buNone/>
             </a:pPr>
             <a:r>
-              <a:rPr lang="en-US" sz="1400" dirty="0">
+              <a:rPr lang="en-US" sz="1350" dirty="0">
                 <a:solidFill>
                   <a:srgbClr val="1E293B"/>
                 </a:solidFill>
@@ -2149,9 +2594,9 @@
                 <a:ea typeface="Arial" pitchFamily="34" charset="-122"/>
                 <a:cs typeface="Arial" pitchFamily="34" charset="-120"/>
               </a:rPr>
-              <a:t>A live performance leaderboard for managers: top regions, top managers, top reps, completion by action type, badges, and streaks — filterable by client and time period.</a:t>
-            </a:r>
-            <a:endParaRPr lang="en-US" sz="1400" dirty="0"/>
+              <a:t>After the Reason Code, the rep must also select the Action Taken — what they actually did to resolve or escalate the issue.</a:t>
+            </a:r>
+            <a:endParaRPr lang="en-US" sz="1350" dirty="0"/>
           </a:p>
         </p:txBody>
       </p:sp>
@@ -2163,8 +2608,8 @@
         </p:nvSpPr>
         <p:spPr>
           <a:xfrm>
-            <a:off x="7315200" y="2514600"/>
-            <a:ext cx="4480560" cy="274320"/>
+            <a:off x="7315200" y="2331720"/>
+            <a:ext cx="4480560" cy="256032"/>
           </a:xfrm>
           <a:prstGeom prst="rect">
             <a:avLst/>
@@ -2202,8 +2647,8 @@
         </p:nvSpPr>
         <p:spPr>
           <a:xfrm>
-            <a:off x="7315200" y="2898648"/>
-            <a:ext cx="256032" cy="256032"/>
+            <a:off x="7315200" y="2670048"/>
+            <a:ext cx="237744" cy="237744"/>
           </a:xfrm>
           <a:prstGeom prst="ellipse">
             <a:avLst/>
@@ -2222,8 +2667,8 @@
         </p:nvSpPr>
         <p:spPr>
           <a:xfrm>
-            <a:off x="7315200" y="2898648"/>
-            <a:ext cx="256032" cy="256032"/>
+            <a:off x="7315200" y="2670048"/>
+            <a:ext cx="237744" cy="237744"/>
           </a:xfrm>
           <a:prstGeom prst="rect">
             <a:avLst/>
@@ -2239,7 +2684,7 @@
               <a:buNone/>
             </a:pPr>
             <a:r>
-              <a:rPr lang="en-US" sz="1100" b="1" dirty="0">
+              <a:rPr lang="en-US" sz="1050" b="1" dirty="0">
                 <a:solidFill>
                   <a:srgbClr val="FFFFFF"/>
                 </a:solidFill>
@@ -2249,7 +2694,7 @@
               </a:rPr>
               <a:t>1</a:t>
             </a:r>
-            <a:endParaRPr lang="en-US" sz="1100" dirty="0"/>
+            <a:endParaRPr lang="en-US" sz="1050" dirty="0"/>
           </a:p>
         </p:txBody>
       </p:sp>
@@ -2261,8 +2706,8 @@
         </p:nvSpPr>
         <p:spPr>
           <a:xfrm>
-            <a:off x="7699248" y="2880360"/>
-            <a:ext cx="4114800" cy="457200"/>
+            <a:off x="7680960" y="2633472"/>
+            <a:ext cx="4114800" cy="384048"/>
           </a:xfrm>
           <a:prstGeom prst="rect">
             <a:avLst/>
@@ -2278,7 +2723,7 @@
               <a:buNone/>
             </a:pPr>
             <a:r>
-              <a:rPr lang="en-US" sz="1250" dirty="0">
+              <a:rPr lang="en-US" sz="1200" dirty="0">
                 <a:solidFill>
                   <a:srgbClr val="1E293B"/>
                 </a:solidFill>
@@ -2286,9 +2731,9 @@
                 <a:ea typeface="Arial" pitchFamily="34" charset="-122"/>
                 <a:cs typeface="Arial" pitchFamily="34" charset="-120"/>
               </a:rPr>
-              <a:t>Log in as a Manager, then open "Leaderboard"</a:t>
-            </a:r>
-            <a:endParaRPr lang="en-US" sz="1250" dirty="0"/>
+              <a:t>On the Task Feedback screen, tap "Action Taken"</a:t>
+            </a:r>
+            <a:endParaRPr lang="en-US" sz="1200" dirty="0"/>
           </a:p>
         </p:txBody>
       </p:sp>
@@ -2300,8 +2745,8 @@
         </p:nvSpPr>
         <p:spPr>
           <a:xfrm>
-            <a:off x="7315200" y="3465576"/>
-            <a:ext cx="256032" cy="256032"/>
+            <a:off x="7315200" y="3127248"/>
+            <a:ext cx="237744" cy="237744"/>
           </a:xfrm>
           <a:prstGeom prst="ellipse">
             <a:avLst/>
@@ -2320,8 +2765,8 @@
         </p:nvSpPr>
         <p:spPr>
           <a:xfrm>
-            <a:off x="7315200" y="3465576"/>
-            <a:ext cx="256032" cy="256032"/>
+            <a:off x="7315200" y="3127248"/>
+            <a:ext cx="237744" cy="237744"/>
           </a:xfrm>
           <a:prstGeom prst="rect">
             <a:avLst/>
@@ -2337,7 +2782,7 @@
               <a:buNone/>
             </a:pPr>
             <a:r>
-              <a:rPr lang="en-US" sz="1100" b="1" dirty="0">
+              <a:rPr lang="en-US" sz="1050" b="1" dirty="0">
                 <a:solidFill>
                   <a:srgbClr val="FFFFFF"/>
                 </a:solidFill>
@@ -2347,7 +2792,7 @@
               </a:rPr>
               <a:t>2</a:t>
             </a:r>
-            <a:endParaRPr lang="en-US" sz="1100" dirty="0"/>
+            <a:endParaRPr lang="en-US" sz="1050" dirty="0"/>
           </a:p>
         </p:txBody>
       </p:sp>
@@ -2359,8 +2804,8 @@
         </p:nvSpPr>
         <p:spPr>
           <a:xfrm>
-            <a:off x="7699248" y="3447288"/>
-            <a:ext cx="4114800" cy="457200"/>
+            <a:off x="7680960" y="3090672"/>
+            <a:ext cx="4114800" cy="384048"/>
           </a:xfrm>
           <a:prstGeom prst="rect">
             <a:avLst/>
@@ -2376,7 +2821,7 @@
               <a:buNone/>
             </a:pPr>
             <a:r>
-              <a:rPr lang="en-US" sz="1250" dirty="0">
+              <a:rPr lang="en-US" sz="1200" dirty="0">
                 <a:solidFill>
                   <a:srgbClr val="1E293B"/>
                 </a:solidFill>
@@ -2384,9 +2829,9 @@
                 <a:ea typeface="Arial" pitchFamily="34" charset="-122"/>
                 <a:cs typeface="Arial" pitchFamily="34" charset="-120"/>
               </a:rPr>
-              <a:t>Filter by Client and time period (e.g. Past Week)</a:t>
-            </a:r>
-            <a:endParaRPr lang="en-US" sz="1250" dirty="0"/>
+              <a:t>Pick the action that matches what was done in-store</a:t>
+            </a:r>
+            <a:endParaRPr lang="en-US" sz="1200" dirty="0"/>
           </a:p>
         </p:txBody>
       </p:sp>
@@ -2398,8 +2843,8 @@
         </p:nvSpPr>
         <p:spPr>
           <a:xfrm>
-            <a:off x="7315200" y="4032504"/>
-            <a:ext cx="256032" cy="256032"/>
+            <a:off x="7315200" y="3584448"/>
+            <a:ext cx="237744" cy="237744"/>
           </a:xfrm>
           <a:prstGeom prst="ellipse">
             <a:avLst/>
@@ -2418,8 +2863,8 @@
         </p:nvSpPr>
         <p:spPr>
           <a:xfrm>
-            <a:off x="7315200" y="4032504"/>
-            <a:ext cx="256032" cy="256032"/>
+            <a:off x="7315200" y="3584448"/>
+            <a:ext cx="237744" cy="237744"/>
           </a:xfrm>
           <a:prstGeom prst="rect">
             <a:avLst/>
@@ -2435,7 +2880,7 @@
               <a:buNone/>
             </a:pPr>
             <a:r>
-              <a:rPr lang="en-US" sz="1100" b="1" dirty="0">
+              <a:rPr lang="en-US" sz="1050" b="1" dirty="0">
                 <a:solidFill>
                   <a:srgbClr val="FFFFFF"/>
                 </a:solidFill>
@@ -2445,7 +2890,7 @@
               </a:rPr>
               <a:t>3</a:t>
             </a:r>
-            <a:endParaRPr lang="en-US" sz="1100" dirty="0"/>
+            <a:endParaRPr lang="en-US" sz="1050" dirty="0"/>
           </a:p>
         </p:txBody>
       </p:sp>
@@ -2457,8 +2902,8 @@
         </p:nvSpPr>
         <p:spPr>
           <a:xfrm>
-            <a:off x="7699248" y="4014216"/>
-            <a:ext cx="4114800" cy="457200"/>
+            <a:off x="7680960" y="3547872"/>
+            <a:ext cx="4114800" cy="384048"/>
           </a:xfrm>
           <a:prstGeom prst="rect">
             <a:avLst/>
@@ -2474,7 +2919,7 @@
               <a:buNone/>
             </a:pPr>
             <a:r>
-              <a:rPr lang="en-US" sz="1250" dirty="0">
+              <a:rPr lang="en-US" sz="1200" dirty="0">
                 <a:solidFill>
                   <a:srgbClr val="1E293B"/>
                 </a:solidFill>
@@ -2482,9 +2927,9 @@
                 <a:ea typeface="Arial" pitchFamily="34" charset="-122"/>
                 <a:cs typeface="Arial" pitchFamily="34" charset="-120"/>
               </a:rPr>
-              <a:t>Review Top Reps, Top Managers, and Top Regions</a:t>
-            </a:r>
-            <a:endParaRPr lang="en-US" sz="1250" dirty="0"/>
+              <a:t>Add any free-text Feedback notes below</a:t>
+            </a:r>
+            <a:endParaRPr lang="en-US" sz="1200" dirty="0"/>
           </a:p>
         </p:txBody>
       </p:sp>
@@ -2496,8 +2941,8 @@
         </p:nvSpPr>
         <p:spPr>
           <a:xfrm>
-            <a:off x="7315200" y="4599432"/>
-            <a:ext cx="256032" cy="256032"/>
+            <a:off x="7315200" y="4041648"/>
+            <a:ext cx="237744" cy="237744"/>
           </a:xfrm>
           <a:prstGeom prst="ellipse">
             <a:avLst/>
@@ -2516,8 +2961,86 @@
         </p:nvSpPr>
         <p:spPr>
           <a:xfrm>
+            <a:off x="7315200" y="4041648"/>
+            <a:ext cx="237744" cy="237744"/>
+          </a:xfrm>
+          <a:prstGeom prst="rect">
+            <a:avLst/>
+          </a:prstGeom>
+          <a:noFill/>
+          <a:ln/>
+        </p:spPr>
+        <p:txBody>
+          <a:bodyPr wrap="square" rtlCol="0" anchor="ctr"/>
+          <a:lstStyle/>
+          <a:p>
+            <a:pPr algn="ctr" indent="0" marL="0">
+              <a:buNone/>
+            </a:pPr>
+            <a:r>
+              <a:rPr lang="en-US" sz="1050" b="1" dirty="0">
+                <a:solidFill>
+                  <a:srgbClr val="FFFFFF"/>
+                </a:solidFill>
+                <a:latin typeface="Arial" pitchFamily="34" charset="0"/>
+                <a:ea typeface="Arial" pitchFamily="34" charset="-122"/>
+                <a:cs typeface="Arial" pitchFamily="34" charset="-120"/>
+              </a:rPr>
+              <a:t>4</a:t>
+            </a:r>
+            <a:endParaRPr lang="en-US" sz="1050" dirty="0"/>
+          </a:p>
+        </p:txBody>
+      </p:sp>
+      <p:sp>
+        <p:nvSpPr>
+          <p:cNvPr id="20" name="Text 17"/>
+          <p:cNvSpPr/>
+          <p:nvPr/>
+        </p:nvSpPr>
+        <p:spPr>
+          <a:xfrm>
+            <a:off x="7680960" y="4005072"/>
+            <a:ext cx="4114800" cy="384048"/>
+          </a:xfrm>
+          <a:prstGeom prst="rect">
+            <a:avLst/>
+          </a:prstGeom>
+          <a:noFill/>
+          <a:ln/>
+        </p:spPr>
+        <p:txBody>
+          <a:bodyPr wrap="square" rtlCol="0" anchor="t"/>
+          <a:lstStyle/>
+          <a:p>
+            <a:pPr indent="0" marL="0">
+              <a:buNone/>
+            </a:pPr>
+            <a:r>
+              <a:rPr lang="en-US" sz="1200" dirty="0">
+                <a:solidFill>
+                  <a:srgbClr val="1E293B"/>
+                </a:solidFill>
+                <a:latin typeface="Arial" pitchFamily="34" charset="0"/>
+                <a:ea typeface="Arial" pitchFamily="34" charset="-122"/>
+                <a:cs typeface="Arial" pitchFamily="34" charset="-120"/>
+              </a:rPr>
+              <a:t>Scroll down and tap Submit to save the task</a:t>
+            </a:r>
+            <a:endParaRPr lang="en-US" sz="1200" dirty="0"/>
+          </a:p>
+        </p:txBody>
+      </p:sp>
+      <p:sp>
+        <p:nvSpPr>
+          <p:cNvPr id="21" name="Text 18"/>
+          <p:cNvSpPr/>
+          <p:nvPr/>
+        </p:nvSpPr>
+        <p:spPr>
+          <a:xfrm>
             <a:off x="7315200" y="4599432"/>
-            <a:ext cx="256032" cy="256032"/>
+            <a:ext cx="4480560" cy="256032"/>
           </a:xfrm>
           <a:prstGeom prst="rect">
             <a:avLst/>
@@ -2529,19 +3052,19 @@
           <a:bodyPr wrap="square" rtlCol="0" anchor="ctr"/>
           <a:lstStyle/>
           <a:p>
-            <a:pPr algn="ctr" indent="0" marL="0">
-              <a:buNone/>
-            </a:pPr>
-            <a:r>
-              <a:rPr lang="en-US" sz="1100" b="1" dirty="0">
-                <a:solidFill>
-                  <a:srgbClr val="FFFFFF"/>
-                </a:solidFill>
-                <a:latin typeface="Arial" pitchFamily="34" charset="0"/>
-                <a:ea typeface="Arial" pitchFamily="34" charset="-122"/>
-                <a:cs typeface="Arial" pitchFamily="34" charset="-120"/>
-              </a:rPr>
-              <a:t>4</a:t>
+            <a:pPr indent="0" marL="0">
+              <a:buNone/>
+            </a:pPr>
+            <a:r>
+              <a:rPr lang="en-US" sz="1100" b="1" spc="100" kern="0" dirty="0">
+                <a:solidFill>
+                  <a:srgbClr val="64748B"/>
+                </a:solidFill>
+                <a:latin typeface="Arial" pitchFamily="34" charset="0"/>
+                <a:ea typeface="Arial" pitchFamily="34" charset="-122"/>
+                <a:cs typeface="Arial" pitchFamily="34" charset="-120"/>
+              </a:rPr>
+              <a:t>DROPDOWNS / FILTERS ON THIS SCREEN</a:t>
             </a:r>
             <a:endParaRPr lang="en-US" sz="1100" dirty="0"/>
           </a:p>
@@ -2549,14 +3072,34 @@
       </p:sp>
       <p:sp>
         <p:nvSpPr>
-          <p:cNvPr id="20" name="Text 17"/>
-          <p:cNvSpPr/>
-          <p:nvPr/>
-        </p:nvSpPr>
-        <p:spPr>
-          <a:xfrm>
-            <a:off x="7699248" y="4581144"/>
-            <a:ext cx="4114800" cy="457200"/>
+          <p:cNvPr id="22" name="Shape 19"/>
+          <p:cNvSpPr/>
+          <p:nvPr/>
+        </p:nvSpPr>
+        <p:spPr>
+          <a:xfrm>
+            <a:off x="7315200" y="4937760"/>
+            <a:ext cx="82296" cy="82296"/>
+          </a:xfrm>
+          <a:prstGeom prst="rect">
+            <a:avLst/>
+          </a:prstGeom>
+          <a:solidFill>
+            <a:srgbClr val="003B71"/>
+          </a:solidFill>
+          <a:ln/>
+        </p:spPr>
+      </p:sp>
+      <p:sp>
+        <p:nvSpPr>
+          <p:cNvPr id="23" name="Text 20"/>
+          <p:cNvSpPr/>
+          <p:nvPr/>
+        </p:nvSpPr>
+        <p:spPr>
+          <a:xfrm>
+            <a:off x="7516368" y="4855464"/>
+            <a:ext cx="4297680" cy="365760"/>
           </a:xfrm>
           <a:prstGeom prst="rect">
             <a:avLst/>
@@ -2572,7 +3115,21 @@
               <a:buNone/>
             </a:pPr>
             <a:r>
-              <a:rPr lang="en-US" sz="1250" dirty="0">
+              <a:rPr lang="en-US" sz="1150" b="1" dirty="0">
+                <a:solidFill>
+                  <a:srgbClr val="003B71"/>
+                </a:solidFill>
+                <a:latin typeface="Arial" pitchFamily="34" charset="0"/>
+                <a:ea typeface="Arial" pitchFamily="34" charset="-122"/>
+                <a:cs typeface="Arial" pitchFamily="34" charset="-120"/>
+              </a:rPr>
+              <a:t>Action Taken: </a:t>
+            </a:r>
+            <a:pPr indent="0" marL="0">
+              <a:buNone/>
+            </a:pPr>
+            <a:r>
+              <a:rPr lang="en-US" sz="1150" dirty="0">
                 <a:solidFill>
                   <a:srgbClr val="1E293B"/>
                 </a:solidFill>
@@ -2580,9 +3137,9 @@
                 <a:ea typeface="Arial" pitchFamily="34" charset="-122"/>
                 <a:cs typeface="Arial" pitchFamily="34" charset="-120"/>
               </a:rPr>
-              <a:t>Check Rep Badges and Top Streaks for recognition</a:t>
-            </a:r>
-            <a:endParaRPr lang="en-US" sz="1250" dirty="0"/>
+              <a:t>Order placed, Escalated to supervisor, Logged query with DC, Stock moved to shelf, Shelf/planogram discussed, System stock corrected, Promo/display completed, Follow-up required, Unable to action, No action required, Other</a:t>
+            </a:r>
+            <a:endParaRPr lang="en-US" sz="1150" dirty="0"/>
           </a:p>
         </p:txBody>
       </p:sp>
@@ -2671,6 +3228,3713 @@
                 <a:ea typeface="Arial" pitchFamily="34" charset="-122"/>
                 <a:cs typeface="Arial" pitchFamily="34" charset="-120"/>
               </a:rPr>
+              <a:t>STEP 7 · STORE VIEW</a:t>
+            </a:r>
+            <a:endParaRPr lang="en-US" sz="1200" dirty="0"/>
+          </a:p>
+        </p:txBody>
+      </p:sp>
+      <p:sp>
+        <p:nvSpPr>
+          <p:cNvPr id="4" name="Text 2"/>
+          <p:cNvSpPr/>
+          <p:nvPr/>
+        </p:nvSpPr>
+        <p:spPr>
+          <a:xfrm>
+            <a:off x="457200" y="384048"/>
+            <a:ext cx="7315200" cy="548640"/>
+          </a:xfrm>
+          <a:prstGeom prst="rect">
+            <a:avLst/>
+          </a:prstGeom>
+          <a:noFill/>
+          <a:ln/>
+        </p:spPr>
+        <p:txBody>
+          <a:bodyPr wrap="square" rtlCol="0" anchor="ctr"/>
+          <a:lstStyle/>
+          <a:p>
+            <a:pPr indent="0" marL="0">
+              <a:buNone/>
+            </a:pPr>
+            <a:r>
+              <a:rPr lang="en-US" sz="2600" b="1" dirty="0">
+                <a:solidFill>
+                  <a:srgbClr val="FFFFFF"/>
+                </a:solidFill>
+                <a:latin typeface="Arial" pitchFamily="34" charset="0"/>
+                <a:ea typeface="Arial" pitchFamily="34" charset="-122"/>
+                <a:cs typeface="Arial" pitchFamily="34" charset="-120"/>
+              </a:rPr>
+              <a:t>Store Summary</a:t>
+            </a:r>
+            <a:endParaRPr lang="en-US" sz="2600" dirty="0"/>
+          </a:p>
+        </p:txBody>
+      </p:sp>
+      <p:pic>
+        <p:nvPicPr>
+          <p:cNvPr id="5" name="Image 0" descr="/home/runner/workspace/screenshots/stockfix_guide/05_store_summary.jpg">    </p:cNvPr>
+          <p:cNvPicPr>
+            <a:picLocks noChangeAspect="1"/>
+          </p:cNvPicPr>
+          <p:nvPr/>
+        </p:nvPicPr>
+        <p:blipFill>
+          <a:blip r:embed="rId1"/>
+          <a:srcRect l="0" r="0" t="0" b="0"/>
+          <a:stretch/>
+        </p:blipFill>
+        <p:spPr>
+          <a:xfrm>
+            <a:off x="457200" y="1280160"/>
+            <a:ext cx="6583680" cy="5120640"/>
+          </a:xfrm>
+          <a:prstGeom prst="rect">
+            <a:avLst/>
+          </a:prstGeom>
+        </p:spPr>
+      </p:pic>
+      <p:sp>
+        <p:nvSpPr>
+          <p:cNvPr id="6" name="Shape 3"/>
+          <p:cNvSpPr/>
+          <p:nvPr/>
+        </p:nvSpPr>
+        <p:spPr>
+          <a:xfrm>
+            <a:off x="457200" y="1280160"/>
+            <a:ext cx="6583680" cy="5120640"/>
+          </a:xfrm>
+          <a:prstGeom prst="rect">
+            <a:avLst/>
+          </a:prstGeom>
+          <a:ln w="12700">
+            <a:solidFill>
+              <a:srgbClr val="CBD5E1"/>
+            </a:solidFill>
+            <a:prstDash val="solid"/>
+          </a:ln>
+        </p:spPr>
+      </p:sp>
+      <p:sp>
+        <p:nvSpPr>
+          <p:cNvPr id="7" name="Text 4"/>
+          <p:cNvSpPr/>
+          <p:nvPr/>
+        </p:nvSpPr>
+        <p:spPr>
+          <a:xfrm>
+            <a:off x="7315200" y="1371600"/>
+            <a:ext cx="4480560" cy="822960"/>
+          </a:xfrm>
+          <a:prstGeom prst="rect">
+            <a:avLst/>
+          </a:prstGeom>
+          <a:noFill/>
+          <a:ln/>
+        </p:spPr>
+        <p:txBody>
+          <a:bodyPr wrap="square" rtlCol="0" anchor="t"/>
+          <a:lstStyle/>
+          <a:p>
+            <a:pPr indent="0" marL="0">
+              <a:buNone/>
+            </a:pPr>
+            <a:r>
+              <a:rPr lang="en-US" sz="1350" dirty="0">
+                <a:solidFill>
+                  <a:srgbClr val="1E293B"/>
+                </a:solidFill>
+                <a:latin typeface="Arial" pitchFamily="34" charset="0"/>
+                <a:ea typeface="Arial" pitchFamily="34" charset="-122"/>
+                <a:cs typeface="Arial" pitchFamily="34" charset="-120"/>
+              </a:rPr>
+              <a:t>A store-level rollup showing total/pending/done task counts, SOH and sales stats, SKUs out of stock, and quick filter chips for urgent/OOS tasks.</a:t>
+            </a:r>
+            <a:endParaRPr lang="en-US" sz="1350" dirty="0"/>
+          </a:p>
+        </p:txBody>
+      </p:sp>
+      <p:sp>
+        <p:nvSpPr>
+          <p:cNvPr id="8" name="Text 5"/>
+          <p:cNvSpPr/>
+          <p:nvPr/>
+        </p:nvSpPr>
+        <p:spPr>
+          <a:xfrm>
+            <a:off x="7315200" y="2331720"/>
+            <a:ext cx="4480560" cy="256032"/>
+          </a:xfrm>
+          <a:prstGeom prst="rect">
+            <a:avLst/>
+          </a:prstGeom>
+          <a:noFill/>
+          <a:ln/>
+        </p:spPr>
+        <p:txBody>
+          <a:bodyPr wrap="square" rtlCol="0" anchor="ctr"/>
+          <a:lstStyle/>
+          <a:p>
+            <a:pPr indent="0" marL="0">
+              <a:buNone/>
+            </a:pPr>
+            <a:r>
+              <a:rPr lang="en-US" sz="1100" b="1" spc="100" kern="0" dirty="0">
+                <a:solidFill>
+                  <a:srgbClr val="64748B"/>
+                </a:solidFill>
+                <a:latin typeface="Arial" pitchFamily="34" charset="0"/>
+                <a:ea typeface="Arial" pitchFamily="34" charset="-122"/>
+                <a:cs typeface="Arial" pitchFamily="34" charset="-120"/>
+              </a:rPr>
+              <a:t>HOW TO GET HERE</a:t>
+            </a:r>
+            <a:endParaRPr lang="en-US" sz="1100" dirty="0"/>
+          </a:p>
+        </p:txBody>
+      </p:sp>
+      <p:sp>
+        <p:nvSpPr>
+          <p:cNvPr id="9" name="Shape 6"/>
+          <p:cNvSpPr/>
+          <p:nvPr/>
+        </p:nvSpPr>
+        <p:spPr>
+          <a:xfrm>
+            <a:off x="7315200" y="2670048"/>
+            <a:ext cx="237744" cy="237744"/>
+          </a:xfrm>
+          <a:prstGeom prst="ellipse">
+            <a:avLst/>
+          </a:prstGeom>
+          <a:solidFill>
+            <a:srgbClr val="F97316"/>
+          </a:solidFill>
+          <a:ln/>
+        </p:spPr>
+      </p:sp>
+      <p:sp>
+        <p:nvSpPr>
+          <p:cNvPr id="10" name="Text 7"/>
+          <p:cNvSpPr/>
+          <p:nvPr/>
+        </p:nvSpPr>
+        <p:spPr>
+          <a:xfrm>
+            <a:off x="7315200" y="2670048"/>
+            <a:ext cx="237744" cy="237744"/>
+          </a:xfrm>
+          <a:prstGeom prst="rect">
+            <a:avLst/>
+          </a:prstGeom>
+          <a:noFill/>
+          <a:ln/>
+        </p:spPr>
+        <p:txBody>
+          <a:bodyPr wrap="square" rtlCol="0" anchor="ctr"/>
+          <a:lstStyle/>
+          <a:p>
+            <a:pPr algn="ctr" indent="0" marL="0">
+              <a:buNone/>
+            </a:pPr>
+            <a:r>
+              <a:rPr lang="en-US" sz="1050" b="1" dirty="0">
+                <a:solidFill>
+                  <a:srgbClr val="FFFFFF"/>
+                </a:solidFill>
+                <a:latin typeface="Arial" pitchFamily="34" charset="0"/>
+                <a:ea typeface="Arial" pitchFamily="34" charset="-122"/>
+                <a:cs typeface="Arial" pitchFamily="34" charset="-120"/>
+              </a:rPr>
+              <a:t>1</a:t>
+            </a:r>
+            <a:endParaRPr lang="en-US" sz="1050" dirty="0"/>
+          </a:p>
+        </p:txBody>
+      </p:sp>
+      <p:sp>
+        <p:nvSpPr>
+          <p:cNvPr id="11" name="Text 8"/>
+          <p:cNvSpPr/>
+          <p:nvPr/>
+        </p:nvSpPr>
+        <p:spPr>
+          <a:xfrm>
+            <a:off x="7680960" y="2633472"/>
+            <a:ext cx="4114800" cy="384048"/>
+          </a:xfrm>
+          <a:prstGeom prst="rect">
+            <a:avLst/>
+          </a:prstGeom>
+          <a:noFill/>
+          <a:ln/>
+        </p:spPr>
+        <p:txBody>
+          <a:bodyPr wrap="square" rtlCol="0" anchor="t"/>
+          <a:lstStyle/>
+          <a:p>
+            <a:pPr indent="0" marL="0">
+              <a:buNone/>
+            </a:pPr>
+            <a:r>
+              <a:rPr lang="en-US" sz="1200" dirty="0">
+                <a:solidFill>
+                  <a:srgbClr val="1E293B"/>
+                </a:solidFill>
+                <a:latin typeface="Arial" pitchFamily="34" charset="0"/>
+                <a:ea typeface="Arial" pitchFamily="34" charset="-122"/>
+                <a:cs typeface="Arial" pitchFamily="34" charset="-120"/>
+              </a:rPr>
+              <a:t>Tap a store name/tile from the Dashboard, or the Store dropdown</a:t>
+            </a:r>
+            <a:endParaRPr lang="en-US" sz="1200" dirty="0"/>
+          </a:p>
+        </p:txBody>
+      </p:sp>
+      <p:sp>
+        <p:nvSpPr>
+          <p:cNvPr id="12" name="Shape 9"/>
+          <p:cNvSpPr/>
+          <p:nvPr/>
+        </p:nvSpPr>
+        <p:spPr>
+          <a:xfrm>
+            <a:off x="7315200" y="3127248"/>
+            <a:ext cx="237744" cy="237744"/>
+          </a:xfrm>
+          <a:prstGeom prst="ellipse">
+            <a:avLst/>
+          </a:prstGeom>
+          <a:solidFill>
+            <a:srgbClr val="F97316"/>
+          </a:solidFill>
+          <a:ln/>
+        </p:spPr>
+      </p:sp>
+      <p:sp>
+        <p:nvSpPr>
+          <p:cNvPr id="13" name="Text 10"/>
+          <p:cNvSpPr/>
+          <p:nvPr/>
+        </p:nvSpPr>
+        <p:spPr>
+          <a:xfrm>
+            <a:off x="7315200" y="3127248"/>
+            <a:ext cx="237744" cy="237744"/>
+          </a:xfrm>
+          <a:prstGeom prst="rect">
+            <a:avLst/>
+          </a:prstGeom>
+          <a:noFill/>
+          <a:ln/>
+        </p:spPr>
+        <p:txBody>
+          <a:bodyPr wrap="square" rtlCol="0" anchor="ctr"/>
+          <a:lstStyle/>
+          <a:p>
+            <a:pPr algn="ctr" indent="0" marL="0">
+              <a:buNone/>
+            </a:pPr>
+            <a:r>
+              <a:rPr lang="en-US" sz="1050" b="1" dirty="0">
+                <a:solidFill>
+                  <a:srgbClr val="FFFFFF"/>
+                </a:solidFill>
+                <a:latin typeface="Arial" pitchFamily="34" charset="0"/>
+                <a:ea typeface="Arial" pitchFamily="34" charset="-122"/>
+                <a:cs typeface="Arial" pitchFamily="34" charset="-120"/>
+              </a:rPr>
+              <a:t>2</a:t>
+            </a:r>
+            <a:endParaRPr lang="en-US" sz="1050" dirty="0"/>
+          </a:p>
+        </p:txBody>
+      </p:sp>
+      <p:sp>
+        <p:nvSpPr>
+          <p:cNvPr id="14" name="Text 11"/>
+          <p:cNvSpPr/>
+          <p:nvPr/>
+        </p:nvSpPr>
+        <p:spPr>
+          <a:xfrm>
+            <a:off x="7680960" y="3090672"/>
+            <a:ext cx="4114800" cy="384048"/>
+          </a:xfrm>
+          <a:prstGeom prst="rect">
+            <a:avLst/>
+          </a:prstGeom>
+          <a:noFill/>
+          <a:ln/>
+        </p:spPr>
+        <p:txBody>
+          <a:bodyPr wrap="square" rtlCol="0" anchor="t"/>
+          <a:lstStyle/>
+          <a:p>
+            <a:pPr indent="0" marL="0">
+              <a:buNone/>
+            </a:pPr>
+            <a:r>
+              <a:rPr lang="en-US" sz="1200" dirty="0">
+                <a:solidFill>
+                  <a:srgbClr val="1E293B"/>
+                </a:solidFill>
+                <a:latin typeface="Arial" pitchFamily="34" charset="0"/>
+                <a:ea typeface="Arial" pitchFamily="34" charset="-122"/>
+                <a:cs typeface="Arial" pitchFamily="34" charset="-120"/>
+              </a:rPr>
+              <a:t>Review store-level totals and stock health</a:t>
+            </a:r>
+            <a:endParaRPr lang="en-US" sz="1200" dirty="0"/>
+          </a:p>
+        </p:txBody>
+      </p:sp>
+      <p:sp>
+        <p:nvSpPr>
+          <p:cNvPr id="15" name="Shape 12"/>
+          <p:cNvSpPr/>
+          <p:nvPr/>
+        </p:nvSpPr>
+        <p:spPr>
+          <a:xfrm>
+            <a:off x="7315200" y="3584448"/>
+            <a:ext cx="237744" cy="237744"/>
+          </a:xfrm>
+          <a:prstGeom prst="ellipse">
+            <a:avLst/>
+          </a:prstGeom>
+          <a:solidFill>
+            <a:srgbClr val="F97316"/>
+          </a:solidFill>
+          <a:ln/>
+        </p:spPr>
+      </p:sp>
+      <p:sp>
+        <p:nvSpPr>
+          <p:cNvPr id="16" name="Text 13"/>
+          <p:cNvSpPr/>
+          <p:nvPr/>
+        </p:nvSpPr>
+        <p:spPr>
+          <a:xfrm>
+            <a:off x="7315200" y="3584448"/>
+            <a:ext cx="237744" cy="237744"/>
+          </a:xfrm>
+          <a:prstGeom prst="rect">
+            <a:avLst/>
+          </a:prstGeom>
+          <a:noFill/>
+          <a:ln/>
+        </p:spPr>
+        <p:txBody>
+          <a:bodyPr wrap="square" rtlCol="0" anchor="ctr"/>
+          <a:lstStyle/>
+          <a:p>
+            <a:pPr algn="ctr" indent="0" marL="0">
+              <a:buNone/>
+            </a:pPr>
+            <a:r>
+              <a:rPr lang="en-US" sz="1050" b="1" dirty="0">
+                <a:solidFill>
+                  <a:srgbClr val="FFFFFF"/>
+                </a:solidFill>
+                <a:latin typeface="Arial" pitchFamily="34" charset="0"/>
+                <a:ea typeface="Arial" pitchFamily="34" charset="-122"/>
+                <a:cs typeface="Arial" pitchFamily="34" charset="-120"/>
+              </a:rPr>
+              <a:t>3</a:t>
+            </a:r>
+            <a:endParaRPr lang="en-US" sz="1050" dirty="0"/>
+          </a:p>
+        </p:txBody>
+      </p:sp>
+      <p:sp>
+        <p:nvSpPr>
+          <p:cNvPr id="17" name="Text 14"/>
+          <p:cNvSpPr/>
+          <p:nvPr/>
+        </p:nvSpPr>
+        <p:spPr>
+          <a:xfrm>
+            <a:off x="7680960" y="3547872"/>
+            <a:ext cx="4114800" cy="384048"/>
+          </a:xfrm>
+          <a:prstGeom prst="rect">
+            <a:avLst/>
+          </a:prstGeom>
+          <a:noFill/>
+          <a:ln/>
+        </p:spPr>
+        <p:txBody>
+          <a:bodyPr wrap="square" rtlCol="0" anchor="t"/>
+          <a:lstStyle/>
+          <a:p>
+            <a:pPr indent="0" marL="0">
+              <a:buNone/>
+            </a:pPr>
+            <a:r>
+              <a:rPr lang="en-US" sz="1200" dirty="0">
+                <a:solidFill>
+                  <a:srgbClr val="1E293B"/>
+                </a:solidFill>
+                <a:latin typeface="Arial" pitchFamily="34" charset="0"/>
+                <a:ea typeface="Arial" pitchFamily="34" charset="-122"/>
+                <a:cs typeface="Arial" pitchFamily="34" charset="-120"/>
+              </a:rPr>
+              <a:t>Tap "Urgent Only" or "OOS Only" to filter that store's tasks</a:t>
+            </a:r>
+            <a:endParaRPr lang="en-US" sz="1200" dirty="0"/>
+          </a:p>
+        </p:txBody>
+      </p:sp>
+      <p:sp>
+        <p:nvSpPr>
+          <p:cNvPr id="18" name="Shape 15"/>
+          <p:cNvSpPr/>
+          <p:nvPr/>
+        </p:nvSpPr>
+        <p:spPr>
+          <a:xfrm>
+            <a:off x="7315200" y="4041648"/>
+            <a:ext cx="237744" cy="237744"/>
+          </a:xfrm>
+          <a:prstGeom prst="ellipse">
+            <a:avLst/>
+          </a:prstGeom>
+          <a:solidFill>
+            <a:srgbClr val="F97316"/>
+          </a:solidFill>
+          <a:ln/>
+        </p:spPr>
+      </p:sp>
+      <p:sp>
+        <p:nvSpPr>
+          <p:cNvPr id="19" name="Text 16"/>
+          <p:cNvSpPr/>
+          <p:nvPr/>
+        </p:nvSpPr>
+        <p:spPr>
+          <a:xfrm>
+            <a:off x="7315200" y="4041648"/>
+            <a:ext cx="237744" cy="237744"/>
+          </a:xfrm>
+          <a:prstGeom prst="rect">
+            <a:avLst/>
+          </a:prstGeom>
+          <a:noFill/>
+          <a:ln/>
+        </p:spPr>
+        <p:txBody>
+          <a:bodyPr wrap="square" rtlCol="0" anchor="ctr"/>
+          <a:lstStyle/>
+          <a:p>
+            <a:pPr algn="ctr" indent="0" marL="0">
+              <a:buNone/>
+            </a:pPr>
+            <a:r>
+              <a:rPr lang="en-US" sz="1050" b="1" dirty="0">
+                <a:solidFill>
+                  <a:srgbClr val="FFFFFF"/>
+                </a:solidFill>
+                <a:latin typeface="Arial" pitchFamily="34" charset="0"/>
+                <a:ea typeface="Arial" pitchFamily="34" charset="-122"/>
+                <a:cs typeface="Arial" pitchFamily="34" charset="-120"/>
+              </a:rPr>
+              <a:t>4</a:t>
+            </a:r>
+            <a:endParaRPr lang="en-US" sz="1050" dirty="0"/>
+          </a:p>
+        </p:txBody>
+      </p:sp>
+      <p:sp>
+        <p:nvSpPr>
+          <p:cNvPr id="20" name="Text 17"/>
+          <p:cNvSpPr/>
+          <p:nvPr/>
+        </p:nvSpPr>
+        <p:spPr>
+          <a:xfrm>
+            <a:off x="7680960" y="4005072"/>
+            <a:ext cx="4114800" cy="384048"/>
+          </a:xfrm>
+          <a:prstGeom prst="rect">
+            <a:avLst/>
+          </a:prstGeom>
+          <a:noFill/>
+          <a:ln/>
+        </p:spPr>
+        <p:txBody>
+          <a:bodyPr wrap="square" rtlCol="0" anchor="t"/>
+          <a:lstStyle/>
+          <a:p>
+            <a:pPr indent="0" marL="0">
+              <a:buNone/>
+            </a:pPr>
+            <a:r>
+              <a:rPr lang="en-US" sz="1200" dirty="0">
+                <a:solidFill>
+                  <a:srgbClr val="1E293B"/>
+                </a:solidFill>
+                <a:latin typeface="Arial" pitchFamily="34" charset="0"/>
+                <a:ea typeface="Arial" pitchFamily="34" charset="-122"/>
+                <a:cs typeface="Arial" pitchFamily="34" charset="-120"/>
+              </a:rPr>
+              <a:t>Scroll down and tap any task to open it</a:t>
+            </a:r>
+            <a:endParaRPr lang="en-US" sz="1200" dirty="0"/>
+          </a:p>
+        </p:txBody>
+      </p:sp>
+      <p:sp>
+        <p:nvSpPr>
+          <p:cNvPr id="21" name="Text 18"/>
+          <p:cNvSpPr/>
+          <p:nvPr/>
+        </p:nvSpPr>
+        <p:spPr>
+          <a:xfrm>
+            <a:off x="7315200" y="4599432"/>
+            <a:ext cx="4480560" cy="256032"/>
+          </a:xfrm>
+          <a:prstGeom prst="rect">
+            <a:avLst/>
+          </a:prstGeom>
+          <a:noFill/>
+          <a:ln/>
+        </p:spPr>
+        <p:txBody>
+          <a:bodyPr wrap="square" rtlCol="0" anchor="ctr"/>
+          <a:lstStyle/>
+          <a:p>
+            <a:pPr indent="0" marL="0">
+              <a:buNone/>
+            </a:pPr>
+            <a:r>
+              <a:rPr lang="en-US" sz="1100" b="1" spc="100" kern="0" dirty="0">
+                <a:solidFill>
+                  <a:srgbClr val="64748B"/>
+                </a:solidFill>
+                <a:latin typeface="Arial" pitchFamily="34" charset="0"/>
+                <a:ea typeface="Arial" pitchFamily="34" charset="-122"/>
+                <a:cs typeface="Arial" pitchFamily="34" charset="-120"/>
+              </a:rPr>
+              <a:t>DROPDOWNS / FILTERS ON THIS SCREEN</a:t>
+            </a:r>
+            <a:endParaRPr lang="en-US" sz="1100" dirty="0"/>
+          </a:p>
+        </p:txBody>
+      </p:sp>
+      <p:sp>
+        <p:nvSpPr>
+          <p:cNvPr id="22" name="Shape 19"/>
+          <p:cNvSpPr/>
+          <p:nvPr/>
+        </p:nvSpPr>
+        <p:spPr>
+          <a:xfrm>
+            <a:off x="7315200" y="4937760"/>
+            <a:ext cx="82296" cy="82296"/>
+          </a:xfrm>
+          <a:prstGeom prst="rect">
+            <a:avLst/>
+          </a:prstGeom>
+          <a:solidFill>
+            <a:srgbClr val="003B71"/>
+          </a:solidFill>
+          <a:ln/>
+        </p:spPr>
+      </p:sp>
+      <p:sp>
+        <p:nvSpPr>
+          <p:cNvPr id="23" name="Text 20"/>
+          <p:cNvSpPr/>
+          <p:nvPr/>
+        </p:nvSpPr>
+        <p:spPr>
+          <a:xfrm>
+            <a:off x="7516368" y="4855464"/>
+            <a:ext cx="4297680" cy="365760"/>
+          </a:xfrm>
+          <a:prstGeom prst="rect">
+            <a:avLst/>
+          </a:prstGeom>
+          <a:noFill/>
+          <a:ln/>
+        </p:spPr>
+        <p:txBody>
+          <a:bodyPr wrap="square" rtlCol="0" anchor="t"/>
+          <a:lstStyle/>
+          <a:p>
+            <a:pPr indent="0" marL="0">
+              <a:buNone/>
+            </a:pPr>
+            <a:r>
+              <a:rPr lang="en-US" sz="1150" b="1" dirty="0">
+                <a:solidFill>
+                  <a:srgbClr val="003B71"/>
+                </a:solidFill>
+                <a:latin typeface="Arial" pitchFamily="34" charset="0"/>
+                <a:ea typeface="Arial" pitchFamily="34" charset="-122"/>
+                <a:cs typeface="Arial" pitchFamily="34" charset="-120"/>
+              </a:rPr>
+              <a:t>Urgent Only / OOS Only: </a:t>
+            </a:r>
+            <a:pPr indent="0" marL="0">
+              <a:buNone/>
+            </a:pPr>
+            <a:r>
+              <a:rPr lang="en-US" sz="1150" dirty="0">
+                <a:solidFill>
+                  <a:srgbClr val="1E293B"/>
+                </a:solidFill>
+                <a:latin typeface="Arial" pitchFamily="34" charset="0"/>
+                <a:ea typeface="Arial" pitchFamily="34" charset="-122"/>
+                <a:cs typeface="Arial" pitchFamily="34" charset="-120"/>
+              </a:rPr>
+              <a:t>Quick filter chips — narrow the store's task list by severity</a:t>
+            </a:r>
+            <a:endParaRPr lang="en-US" sz="1150" dirty="0"/>
+          </a:p>
+        </p:txBody>
+      </p:sp>
+    </p:spTree>
+  </p:cSld>
+  <p:clrMapOvr>
+    <a:masterClrMapping/>
+  </p:clrMapOvr>
+</p:sld>
+</file>
+
+<file path=ppt/slides/slide12.xml><?xml version="1.0" encoding="utf-8"?>
+<p:sld xmlns:a="http://schemas.openxmlformats.org/drawingml/2006/main" xmlns:r="http://schemas.openxmlformats.org/officeDocument/2006/relationships" xmlns:p="http://schemas.openxmlformats.org/presentationml/2006/main">
+  <p:cSld name="Slide 12">
+    <p:bg>
+      <p:bgPr>
+        <a:solidFill>
+          <a:srgbClr val="F8FAFC"/>
+        </a:solidFill>
+      </p:bgPr>
+    </p:bg>
+    <p:spTree>
+      <p:nvGrpSpPr>
+        <p:cNvPr id="1" name=""/>
+        <p:cNvGrpSpPr/>
+        <p:nvPr/>
+      </p:nvGrpSpPr>
+      <p:grpSpPr>
+        <a:xfrm>
+          <a:off x="0" y="0"/>
+          <a:ext cx="0" cy="0"/>
+          <a:chOff x="0" y="0"/>
+          <a:chExt cx="0" cy="0"/>
+        </a:xfrm>
+      </p:grpSpPr>
+      <p:sp>
+        <p:nvSpPr>
+          <p:cNvPr id="2" name="Shape 0"/>
+          <p:cNvSpPr/>
+          <p:nvPr/>
+        </p:nvSpPr>
+        <p:spPr>
+          <a:xfrm>
+            <a:off x="0" y="0"/>
+            <a:ext cx="12191695" cy="1005840"/>
+          </a:xfrm>
+          <a:prstGeom prst="rect">
+            <a:avLst/>
+          </a:prstGeom>
+          <a:solidFill>
+            <a:srgbClr val="003B71"/>
+          </a:solidFill>
+          <a:ln/>
+        </p:spPr>
+      </p:sp>
+      <p:sp>
+        <p:nvSpPr>
+          <p:cNvPr id="3" name="Text 1"/>
+          <p:cNvSpPr/>
+          <p:nvPr/>
+        </p:nvSpPr>
+        <p:spPr>
+          <a:xfrm>
+            <a:off x="457200" y="137160"/>
+            <a:ext cx="7315200" cy="274320"/>
+          </a:xfrm>
+          <a:prstGeom prst="rect">
+            <a:avLst/>
+          </a:prstGeom>
+          <a:noFill/>
+          <a:ln/>
+        </p:spPr>
+        <p:txBody>
+          <a:bodyPr wrap="square" rtlCol="0" anchor="ctr"/>
+          <a:lstStyle/>
+          <a:p>
+            <a:pPr indent="0" marL="0">
+              <a:buNone/>
+            </a:pPr>
+            <a:r>
+              <a:rPr lang="en-US" sz="1200" b="1" spc="100" kern="0" dirty="0">
+                <a:solidFill>
+                  <a:srgbClr val="F97316"/>
+                </a:solidFill>
+                <a:latin typeface="Arial" pitchFamily="34" charset="0"/>
+                <a:ea typeface="Arial" pitchFamily="34" charset="-122"/>
+                <a:cs typeface="Arial" pitchFamily="34" charset="-120"/>
+              </a:rPr>
+              <a:t>STEP 8 · MANAGER TOOLS</a:t>
+            </a:r>
+            <a:endParaRPr lang="en-US" sz="1200" dirty="0"/>
+          </a:p>
+        </p:txBody>
+      </p:sp>
+      <p:sp>
+        <p:nvSpPr>
+          <p:cNvPr id="4" name="Text 2"/>
+          <p:cNvSpPr/>
+          <p:nvPr/>
+        </p:nvSpPr>
+        <p:spPr>
+          <a:xfrm>
+            <a:off x="457200" y="384048"/>
+            <a:ext cx="7315200" cy="548640"/>
+          </a:xfrm>
+          <a:prstGeom prst="rect">
+            <a:avLst/>
+          </a:prstGeom>
+          <a:noFill/>
+          <a:ln/>
+        </p:spPr>
+        <p:txBody>
+          <a:bodyPr wrap="square" rtlCol="0" anchor="ctr"/>
+          <a:lstStyle/>
+          <a:p>
+            <a:pPr indent="0" marL="0">
+              <a:buNone/>
+            </a:pPr>
+            <a:r>
+              <a:rPr lang="en-US" sz="2600" b="1" dirty="0">
+                <a:solidFill>
+                  <a:srgbClr val="FFFFFF"/>
+                </a:solidFill>
+                <a:latin typeface="Arial" pitchFamily="34" charset="0"/>
+                <a:ea typeface="Arial" pitchFamily="34" charset="-122"/>
+                <a:cs typeface="Arial" pitchFamily="34" charset="-120"/>
+              </a:rPr>
+              <a:t>Import Data</a:t>
+            </a:r>
+            <a:endParaRPr lang="en-US" sz="2600" dirty="0"/>
+          </a:p>
+        </p:txBody>
+      </p:sp>
+      <p:pic>
+        <p:nvPicPr>
+          <p:cNvPr id="5" name="Image 0" descr="/home/runner/workspace/screenshots/stockfix_guide/06_import_data.jpg">    </p:cNvPr>
+          <p:cNvPicPr>
+            <a:picLocks noChangeAspect="1"/>
+          </p:cNvPicPr>
+          <p:nvPr/>
+        </p:nvPicPr>
+        <p:blipFill>
+          <a:blip r:embed="rId1"/>
+          <a:srcRect l="0" r="0" t="0" b="0"/>
+          <a:stretch/>
+        </p:blipFill>
+        <p:spPr>
+          <a:xfrm>
+            <a:off x="457200" y="1280160"/>
+            <a:ext cx="6583680" cy="5120640"/>
+          </a:xfrm>
+          <a:prstGeom prst="rect">
+            <a:avLst/>
+          </a:prstGeom>
+        </p:spPr>
+      </p:pic>
+      <p:sp>
+        <p:nvSpPr>
+          <p:cNvPr id="6" name="Shape 3"/>
+          <p:cNvSpPr/>
+          <p:nvPr/>
+        </p:nvSpPr>
+        <p:spPr>
+          <a:xfrm>
+            <a:off x="457200" y="1280160"/>
+            <a:ext cx="6583680" cy="5120640"/>
+          </a:xfrm>
+          <a:prstGeom prst="rect">
+            <a:avLst/>
+          </a:prstGeom>
+          <a:ln w="12700">
+            <a:solidFill>
+              <a:srgbClr val="CBD5E1"/>
+            </a:solidFill>
+            <a:prstDash val="solid"/>
+          </a:ln>
+        </p:spPr>
+      </p:sp>
+      <p:sp>
+        <p:nvSpPr>
+          <p:cNvPr id="7" name="Text 4"/>
+          <p:cNvSpPr/>
+          <p:nvPr/>
+        </p:nvSpPr>
+        <p:spPr>
+          <a:xfrm>
+            <a:off x="7315200" y="1371600"/>
+            <a:ext cx="4480560" cy="822960"/>
+          </a:xfrm>
+          <a:prstGeom prst="rect">
+            <a:avLst/>
+          </a:prstGeom>
+          <a:noFill/>
+          <a:ln/>
+        </p:spPr>
+        <p:txBody>
+          <a:bodyPr wrap="square" rtlCol="0" anchor="t"/>
+          <a:lstStyle/>
+          <a:p>
+            <a:pPr indent="0" marL="0">
+              <a:buNone/>
+            </a:pPr>
+            <a:r>
+              <a:rPr lang="en-US" sz="1350" dirty="0">
+                <a:solidFill>
+                  <a:srgbClr val="1E293B"/>
+                </a:solidFill>
+                <a:latin typeface="Arial" pitchFamily="34" charset="0"/>
+                <a:ea typeface="Arial" pitchFamily="34" charset="-122"/>
+                <a:cs typeface="Arial" pitchFamily="34" charset="-120"/>
+              </a:rPr>
+              <a:t>Managers bulk-load the day's or week's task list by uploading an Excel or CSV file with the expected column headers.</a:t>
+            </a:r>
+            <a:endParaRPr lang="en-US" sz="1350" dirty="0"/>
+          </a:p>
+        </p:txBody>
+      </p:sp>
+      <p:sp>
+        <p:nvSpPr>
+          <p:cNvPr id="8" name="Text 5"/>
+          <p:cNvSpPr/>
+          <p:nvPr/>
+        </p:nvSpPr>
+        <p:spPr>
+          <a:xfrm>
+            <a:off x="7315200" y="2331720"/>
+            <a:ext cx="4480560" cy="256032"/>
+          </a:xfrm>
+          <a:prstGeom prst="rect">
+            <a:avLst/>
+          </a:prstGeom>
+          <a:noFill/>
+          <a:ln/>
+        </p:spPr>
+        <p:txBody>
+          <a:bodyPr wrap="square" rtlCol="0" anchor="ctr"/>
+          <a:lstStyle/>
+          <a:p>
+            <a:pPr indent="0" marL="0">
+              <a:buNone/>
+            </a:pPr>
+            <a:r>
+              <a:rPr lang="en-US" sz="1100" b="1" spc="100" kern="0" dirty="0">
+                <a:solidFill>
+                  <a:srgbClr val="64748B"/>
+                </a:solidFill>
+                <a:latin typeface="Arial" pitchFamily="34" charset="0"/>
+                <a:ea typeface="Arial" pitchFamily="34" charset="-122"/>
+                <a:cs typeface="Arial" pitchFamily="34" charset="-120"/>
+              </a:rPr>
+              <a:t>HOW TO GET HERE</a:t>
+            </a:r>
+            <a:endParaRPr lang="en-US" sz="1100" dirty="0"/>
+          </a:p>
+        </p:txBody>
+      </p:sp>
+      <p:sp>
+        <p:nvSpPr>
+          <p:cNvPr id="9" name="Shape 6"/>
+          <p:cNvSpPr/>
+          <p:nvPr/>
+        </p:nvSpPr>
+        <p:spPr>
+          <a:xfrm>
+            <a:off x="7315200" y="2670048"/>
+            <a:ext cx="237744" cy="237744"/>
+          </a:xfrm>
+          <a:prstGeom prst="ellipse">
+            <a:avLst/>
+          </a:prstGeom>
+          <a:solidFill>
+            <a:srgbClr val="F97316"/>
+          </a:solidFill>
+          <a:ln/>
+        </p:spPr>
+      </p:sp>
+      <p:sp>
+        <p:nvSpPr>
+          <p:cNvPr id="10" name="Text 7"/>
+          <p:cNvSpPr/>
+          <p:nvPr/>
+        </p:nvSpPr>
+        <p:spPr>
+          <a:xfrm>
+            <a:off x="7315200" y="2670048"/>
+            <a:ext cx="237744" cy="237744"/>
+          </a:xfrm>
+          <a:prstGeom prst="rect">
+            <a:avLst/>
+          </a:prstGeom>
+          <a:noFill/>
+          <a:ln/>
+        </p:spPr>
+        <p:txBody>
+          <a:bodyPr wrap="square" rtlCol="0" anchor="ctr"/>
+          <a:lstStyle/>
+          <a:p>
+            <a:pPr algn="ctr" indent="0" marL="0">
+              <a:buNone/>
+            </a:pPr>
+            <a:r>
+              <a:rPr lang="en-US" sz="1050" b="1" dirty="0">
+                <a:solidFill>
+                  <a:srgbClr val="FFFFFF"/>
+                </a:solidFill>
+                <a:latin typeface="Arial" pitchFamily="34" charset="0"/>
+                <a:ea typeface="Arial" pitchFamily="34" charset="-122"/>
+                <a:cs typeface="Arial" pitchFamily="34" charset="-120"/>
+              </a:rPr>
+              <a:t>1</a:t>
+            </a:r>
+            <a:endParaRPr lang="en-US" sz="1050" dirty="0"/>
+          </a:p>
+        </p:txBody>
+      </p:sp>
+      <p:sp>
+        <p:nvSpPr>
+          <p:cNvPr id="11" name="Text 8"/>
+          <p:cNvSpPr/>
+          <p:nvPr/>
+        </p:nvSpPr>
+        <p:spPr>
+          <a:xfrm>
+            <a:off x="7680960" y="2633472"/>
+            <a:ext cx="4114800" cy="384048"/>
+          </a:xfrm>
+          <a:prstGeom prst="rect">
+            <a:avLst/>
+          </a:prstGeom>
+          <a:noFill/>
+          <a:ln/>
+        </p:spPr>
+        <p:txBody>
+          <a:bodyPr wrap="square" rtlCol="0" anchor="t"/>
+          <a:lstStyle/>
+          <a:p>
+            <a:pPr indent="0" marL="0">
+              <a:buNone/>
+            </a:pPr>
+            <a:r>
+              <a:rPr lang="en-US" sz="1200" dirty="0">
+                <a:solidFill>
+                  <a:srgbClr val="1E293B"/>
+                </a:solidFill>
+                <a:latin typeface="Arial" pitchFamily="34" charset="0"/>
+                <a:ea typeface="Arial" pitchFamily="34" charset="-122"/>
+                <a:cs typeface="Arial" pitchFamily="34" charset="-120"/>
+              </a:rPr>
+              <a:t>From the Dashboard, tap "Import" (managers only)</a:t>
+            </a:r>
+            <a:endParaRPr lang="en-US" sz="1200" dirty="0"/>
+          </a:p>
+        </p:txBody>
+      </p:sp>
+      <p:sp>
+        <p:nvSpPr>
+          <p:cNvPr id="12" name="Shape 9"/>
+          <p:cNvSpPr/>
+          <p:nvPr/>
+        </p:nvSpPr>
+        <p:spPr>
+          <a:xfrm>
+            <a:off x="7315200" y="3127248"/>
+            <a:ext cx="237744" cy="237744"/>
+          </a:xfrm>
+          <a:prstGeom prst="ellipse">
+            <a:avLst/>
+          </a:prstGeom>
+          <a:solidFill>
+            <a:srgbClr val="F97316"/>
+          </a:solidFill>
+          <a:ln/>
+        </p:spPr>
+      </p:sp>
+      <p:sp>
+        <p:nvSpPr>
+          <p:cNvPr id="13" name="Text 10"/>
+          <p:cNvSpPr/>
+          <p:nvPr/>
+        </p:nvSpPr>
+        <p:spPr>
+          <a:xfrm>
+            <a:off x="7315200" y="3127248"/>
+            <a:ext cx="237744" cy="237744"/>
+          </a:xfrm>
+          <a:prstGeom prst="rect">
+            <a:avLst/>
+          </a:prstGeom>
+          <a:noFill/>
+          <a:ln/>
+        </p:spPr>
+        <p:txBody>
+          <a:bodyPr wrap="square" rtlCol="0" anchor="ctr"/>
+          <a:lstStyle/>
+          <a:p>
+            <a:pPr algn="ctr" indent="0" marL="0">
+              <a:buNone/>
+            </a:pPr>
+            <a:r>
+              <a:rPr lang="en-US" sz="1050" b="1" dirty="0">
+                <a:solidFill>
+                  <a:srgbClr val="FFFFFF"/>
+                </a:solidFill>
+                <a:latin typeface="Arial" pitchFamily="34" charset="0"/>
+                <a:ea typeface="Arial" pitchFamily="34" charset="-122"/>
+                <a:cs typeface="Arial" pitchFamily="34" charset="-120"/>
+              </a:rPr>
+              <a:t>2</a:t>
+            </a:r>
+            <a:endParaRPr lang="en-US" sz="1050" dirty="0"/>
+          </a:p>
+        </p:txBody>
+      </p:sp>
+      <p:sp>
+        <p:nvSpPr>
+          <p:cNvPr id="14" name="Text 11"/>
+          <p:cNvSpPr/>
+          <p:nvPr/>
+        </p:nvSpPr>
+        <p:spPr>
+          <a:xfrm>
+            <a:off x="7680960" y="3090672"/>
+            <a:ext cx="4114800" cy="384048"/>
+          </a:xfrm>
+          <a:prstGeom prst="rect">
+            <a:avLst/>
+          </a:prstGeom>
+          <a:noFill/>
+          <a:ln/>
+        </p:spPr>
+        <p:txBody>
+          <a:bodyPr wrap="square" rtlCol="0" anchor="t"/>
+          <a:lstStyle/>
+          <a:p>
+            <a:pPr indent="0" marL="0">
+              <a:buNone/>
+            </a:pPr>
+            <a:r>
+              <a:rPr lang="en-US" sz="1200" dirty="0">
+                <a:solidFill>
+                  <a:srgbClr val="1E293B"/>
+                </a:solidFill>
+                <a:latin typeface="Arial" pitchFamily="34" charset="0"/>
+                <a:ea typeface="Arial" pitchFamily="34" charset="-122"/>
+                <a:cs typeface="Arial" pitchFamily="34" charset="-120"/>
+              </a:rPr>
+              <a:t>Choose your spreadsheet file (.xlsx or .csv)</a:t>
+            </a:r>
+            <a:endParaRPr lang="en-US" sz="1200" dirty="0"/>
+          </a:p>
+        </p:txBody>
+      </p:sp>
+      <p:sp>
+        <p:nvSpPr>
+          <p:cNvPr id="15" name="Shape 12"/>
+          <p:cNvSpPr/>
+          <p:nvPr/>
+        </p:nvSpPr>
+        <p:spPr>
+          <a:xfrm>
+            <a:off x="7315200" y="3584448"/>
+            <a:ext cx="237744" cy="237744"/>
+          </a:xfrm>
+          <a:prstGeom prst="ellipse">
+            <a:avLst/>
+          </a:prstGeom>
+          <a:solidFill>
+            <a:srgbClr val="F97316"/>
+          </a:solidFill>
+          <a:ln/>
+        </p:spPr>
+      </p:sp>
+      <p:sp>
+        <p:nvSpPr>
+          <p:cNvPr id="16" name="Text 13"/>
+          <p:cNvSpPr/>
+          <p:nvPr/>
+        </p:nvSpPr>
+        <p:spPr>
+          <a:xfrm>
+            <a:off x="7315200" y="3584448"/>
+            <a:ext cx="237744" cy="237744"/>
+          </a:xfrm>
+          <a:prstGeom prst="rect">
+            <a:avLst/>
+          </a:prstGeom>
+          <a:noFill/>
+          <a:ln/>
+        </p:spPr>
+        <p:txBody>
+          <a:bodyPr wrap="square" rtlCol="0" anchor="ctr"/>
+          <a:lstStyle/>
+          <a:p>
+            <a:pPr algn="ctr" indent="0" marL="0">
+              <a:buNone/>
+            </a:pPr>
+            <a:r>
+              <a:rPr lang="en-US" sz="1050" b="1" dirty="0">
+                <a:solidFill>
+                  <a:srgbClr val="FFFFFF"/>
+                </a:solidFill>
+                <a:latin typeface="Arial" pitchFamily="34" charset="0"/>
+                <a:ea typeface="Arial" pitchFamily="34" charset="-122"/>
+                <a:cs typeface="Arial" pitchFamily="34" charset="-120"/>
+              </a:rPr>
+              <a:t>3</a:t>
+            </a:r>
+            <a:endParaRPr lang="en-US" sz="1050" dirty="0"/>
+          </a:p>
+        </p:txBody>
+      </p:sp>
+      <p:sp>
+        <p:nvSpPr>
+          <p:cNvPr id="17" name="Text 14"/>
+          <p:cNvSpPr/>
+          <p:nvPr/>
+        </p:nvSpPr>
+        <p:spPr>
+          <a:xfrm>
+            <a:off x="7680960" y="3547872"/>
+            <a:ext cx="4114800" cy="384048"/>
+          </a:xfrm>
+          <a:prstGeom prst="rect">
+            <a:avLst/>
+          </a:prstGeom>
+          <a:noFill/>
+          <a:ln/>
+        </p:spPr>
+        <p:txBody>
+          <a:bodyPr wrap="square" rtlCol="0" anchor="t"/>
+          <a:lstStyle/>
+          <a:p>
+            <a:pPr indent="0" marL="0">
+              <a:buNone/>
+            </a:pPr>
+            <a:r>
+              <a:rPr lang="en-US" sz="1200" dirty="0">
+                <a:solidFill>
+                  <a:srgbClr val="1E293B"/>
+                </a:solidFill>
+                <a:latin typeface="Arial" pitchFamily="34" charset="0"/>
+                <a:ea typeface="Arial" pitchFamily="34" charset="-122"/>
+                <a:cs typeface="Arial" pitchFamily="34" charset="-120"/>
+              </a:rPr>
+              <a:t>Optionally tick "Full Refresh" to clear old tasks first</a:t>
+            </a:r>
+            <a:endParaRPr lang="en-US" sz="1200" dirty="0"/>
+          </a:p>
+        </p:txBody>
+      </p:sp>
+      <p:sp>
+        <p:nvSpPr>
+          <p:cNvPr id="18" name="Shape 15"/>
+          <p:cNvSpPr/>
+          <p:nvPr/>
+        </p:nvSpPr>
+        <p:spPr>
+          <a:xfrm>
+            <a:off x="7315200" y="4041648"/>
+            <a:ext cx="237744" cy="237744"/>
+          </a:xfrm>
+          <a:prstGeom prst="ellipse">
+            <a:avLst/>
+          </a:prstGeom>
+          <a:solidFill>
+            <a:srgbClr val="F97316"/>
+          </a:solidFill>
+          <a:ln/>
+        </p:spPr>
+      </p:sp>
+      <p:sp>
+        <p:nvSpPr>
+          <p:cNvPr id="19" name="Text 16"/>
+          <p:cNvSpPr/>
+          <p:nvPr/>
+        </p:nvSpPr>
+        <p:spPr>
+          <a:xfrm>
+            <a:off x="7315200" y="4041648"/>
+            <a:ext cx="237744" cy="237744"/>
+          </a:xfrm>
+          <a:prstGeom prst="rect">
+            <a:avLst/>
+          </a:prstGeom>
+          <a:noFill/>
+          <a:ln/>
+        </p:spPr>
+        <p:txBody>
+          <a:bodyPr wrap="square" rtlCol="0" anchor="ctr"/>
+          <a:lstStyle/>
+          <a:p>
+            <a:pPr algn="ctr" indent="0" marL="0">
+              <a:buNone/>
+            </a:pPr>
+            <a:r>
+              <a:rPr lang="en-US" sz="1050" b="1" dirty="0">
+                <a:solidFill>
+                  <a:srgbClr val="FFFFFF"/>
+                </a:solidFill>
+                <a:latin typeface="Arial" pitchFamily="34" charset="0"/>
+                <a:ea typeface="Arial" pitchFamily="34" charset="-122"/>
+                <a:cs typeface="Arial" pitchFamily="34" charset="-120"/>
+              </a:rPr>
+              <a:t>4</a:t>
+            </a:r>
+            <a:endParaRPr lang="en-US" sz="1050" dirty="0"/>
+          </a:p>
+        </p:txBody>
+      </p:sp>
+      <p:sp>
+        <p:nvSpPr>
+          <p:cNvPr id="20" name="Text 17"/>
+          <p:cNvSpPr/>
+          <p:nvPr/>
+        </p:nvSpPr>
+        <p:spPr>
+          <a:xfrm>
+            <a:off x="7680960" y="4005072"/>
+            <a:ext cx="4114800" cy="384048"/>
+          </a:xfrm>
+          <a:prstGeom prst="rect">
+            <a:avLst/>
+          </a:prstGeom>
+          <a:noFill/>
+          <a:ln/>
+        </p:spPr>
+        <p:txBody>
+          <a:bodyPr wrap="square" rtlCol="0" anchor="t"/>
+          <a:lstStyle/>
+          <a:p>
+            <a:pPr indent="0" marL="0">
+              <a:buNone/>
+            </a:pPr>
+            <a:r>
+              <a:rPr lang="en-US" sz="1200" dirty="0">
+                <a:solidFill>
+                  <a:srgbClr val="1E293B"/>
+                </a:solidFill>
+                <a:latin typeface="Arial" pitchFamily="34" charset="0"/>
+                <a:ea typeface="Arial" pitchFamily="34" charset="-122"/>
+                <a:cs typeface="Arial" pitchFamily="34" charset="-120"/>
+              </a:rPr>
+              <a:t>Confirm the column headers match, then upload</a:t>
+            </a:r>
+            <a:endParaRPr lang="en-US" sz="1200" dirty="0"/>
+          </a:p>
+        </p:txBody>
+      </p:sp>
+    </p:spTree>
+  </p:cSld>
+  <p:clrMapOvr>
+    <a:masterClrMapping/>
+  </p:clrMapOvr>
+</p:sld>
+</file>
+
+<file path=ppt/slides/slide13.xml><?xml version="1.0" encoding="utf-8"?>
+<p:sld xmlns:a="http://schemas.openxmlformats.org/drawingml/2006/main" xmlns:r="http://schemas.openxmlformats.org/officeDocument/2006/relationships" xmlns:p="http://schemas.openxmlformats.org/presentationml/2006/main">
+  <p:cSld name="Slide 13">
+    <p:bg>
+      <p:bgPr>
+        <a:solidFill>
+          <a:srgbClr val="F8FAFC"/>
+        </a:solidFill>
+      </p:bgPr>
+    </p:bg>
+    <p:spTree>
+      <p:nvGrpSpPr>
+        <p:cNvPr id="1" name=""/>
+        <p:cNvGrpSpPr/>
+        <p:nvPr/>
+      </p:nvGrpSpPr>
+      <p:grpSpPr>
+        <a:xfrm>
+          <a:off x="0" y="0"/>
+          <a:ext cx="0" cy="0"/>
+          <a:chOff x="0" y="0"/>
+          <a:chExt cx="0" cy="0"/>
+        </a:xfrm>
+      </p:grpSpPr>
+      <p:sp>
+        <p:nvSpPr>
+          <p:cNvPr id="2" name="Shape 0"/>
+          <p:cNvSpPr/>
+          <p:nvPr/>
+        </p:nvSpPr>
+        <p:spPr>
+          <a:xfrm>
+            <a:off x="0" y="0"/>
+            <a:ext cx="12191695" cy="1005840"/>
+          </a:xfrm>
+          <a:prstGeom prst="rect">
+            <a:avLst/>
+          </a:prstGeom>
+          <a:solidFill>
+            <a:srgbClr val="003B71"/>
+          </a:solidFill>
+          <a:ln/>
+        </p:spPr>
+      </p:sp>
+      <p:sp>
+        <p:nvSpPr>
+          <p:cNvPr id="3" name="Text 1"/>
+          <p:cNvSpPr/>
+          <p:nvPr/>
+        </p:nvSpPr>
+        <p:spPr>
+          <a:xfrm>
+            <a:off x="457200" y="137160"/>
+            <a:ext cx="7315200" cy="274320"/>
+          </a:xfrm>
+          <a:prstGeom prst="rect">
+            <a:avLst/>
+          </a:prstGeom>
+          <a:noFill/>
+          <a:ln/>
+        </p:spPr>
+        <p:txBody>
+          <a:bodyPr wrap="square" rtlCol="0" anchor="ctr"/>
+          <a:lstStyle/>
+          <a:p>
+            <a:pPr indent="0" marL="0">
+              <a:buNone/>
+            </a:pPr>
+            <a:r>
+              <a:rPr lang="en-US" sz="1200" b="1" spc="100" kern="0" dirty="0">
+                <a:solidFill>
+                  <a:srgbClr val="F97316"/>
+                </a:solidFill>
+                <a:latin typeface="Arial" pitchFamily="34" charset="0"/>
+                <a:ea typeface="Arial" pitchFamily="34" charset="-122"/>
+                <a:cs typeface="Arial" pitchFamily="34" charset="-120"/>
+              </a:rPr>
+              <a:t>STEP 9 · CLIENT ACCESS</a:t>
+            </a:r>
+            <a:endParaRPr lang="en-US" sz="1200" dirty="0"/>
+          </a:p>
+        </p:txBody>
+      </p:sp>
+      <p:sp>
+        <p:nvSpPr>
+          <p:cNvPr id="4" name="Text 2"/>
+          <p:cNvSpPr/>
+          <p:nvPr/>
+        </p:nvSpPr>
+        <p:spPr>
+          <a:xfrm>
+            <a:off x="457200" y="384048"/>
+            <a:ext cx="7315200" cy="548640"/>
+          </a:xfrm>
+          <a:prstGeom prst="rect">
+            <a:avLst/>
+          </a:prstGeom>
+          <a:noFill/>
+          <a:ln/>
+        </p:spPr>
+        <p:txBody>
+          <a:bodyPr wrap="square" rtlCol="0" anchor="ctr"/>
+          <a:lstStyle/>
+          <a:p>
+            <a:pPr indent="0" marL="0">
+              <a:buNone/>
+            </a:pPr>
+            <a:r>
+              <a:rPr lang="en-US" sz="2600" b="1" dirty="0">
+                <a:solidFill>
+                  <a:srgbClr val="FFFFFF"/>
+                </a:solidFill>
+                <a:latin typeface="Arial" pitchFamily="34" charset="0"/>
+                <a:ea typeface="Arial" pitchFamily="34" charset="-122"/>
+                <a:cs typeface="Arial" pitchFamily="34" charset="-120"/>
+              </a:rPr>
+              <a:t>Client Visit Setup</a:t>
+            </a:r>
+            <a:endParaRPr lang="en-US" sz="2600" dirty="0"/>
+          </a:p>
+        </p:txBody>
+      </p:sp>
+      <p:pic>
+        <p:nvPicPr>
+          <p:cNvPr id="5" name="Image 0" descr="/home/runner/workspace/screenshots/stockfix_guide/07_select_client.jpg">    </p:cNvPr>
+          <p:cNvPicPr>
+            <a:picLocks noChangeAspect="1"/>
+          </p:cNvPicPr>
+          <p:nvPr/>
+        </p:nvPicPr>
+        <p:blipFill>
+          <a:blip r:embed="rId1"/>
+          <a:srcRect l="0" r="0" t="0" b="0"/>
+          <a:stretch/>
+        </p:blipFill>
+        <p:spPr>
+          <a:xfrm>
+            <a:off x="457200" y="1280160"/>
+            <a:ext cx="6583680" cy="5120640"/>
+          </a:xfrm>
+          <a:prstGeom prst="rect">
+            <a:avLst/>
+          </a:prstGeom>
+        </p:spPr>
+      </p:pic>
+      <p:sp>
+        <p:nvSpPr>
+          <p:cNvPr id="6" name="Shape 3"/>
+          <p:cNvSpPr/>
+          <p:nvPr/>
+        </p:nvSpPr>
+        <p:spPr>
+          <a:xfrm>
+            <a:off x="457200" y="1280160"/>
+            <a:ext cx="6583680" cy="5120640"/>
+          </a:xfrm>
+          <a:prstGeom prst="rect">
+            <a:avLst/>
+          </a:prstGeom>
+          <a:ln w="12700">
+            <a:solidFill>
+              <a:srgbClr val="CBD5E1"/>
+            </a:solidFill>
+            <a:prstDash val="solid"/>
+          </a:ln>
+        </p:spPr>
+      </p:sp>
+      <p:sp>
+        <p:nvSpPr>
+          <p:cNvPr id="7" name="Text 4"/>
+          <p:cNvSpPr/>
+          <p:nvPr/>
+        </p:nvSpPr>
+        <p:spPr>
+          <a:xfrm>
+            <a:off x="7315200" y="1371600"/>
+            <a:ext cx="4480560" cy="822960"/>
+          </a:xfrm>
+          <a:prstGeom prst="rect">
+            <a:avLst/>
+          </a:prstGeom>
+          <a:noFill/>
+          <a:ln/>
+        </p:spPr>
+        <p:txBody>
+          <a:bodyPr wrap="square" rtlCol="0" anchor="t"/>
+          <a:lstStyle/>
+          <a:p>
+            <a:pPr indent="0" marL="0">
+              <a:buNone/>
+            </a:pPr>
+            <a:r>
+              <a:rPr lang="en-US" sz="1350" dirty="0">
+                <a:solidFill>
+                  <a:srgbClr val="1E293B"/>
+                </a:solidFill>
+                <a:latin typeface="Arial" pitchFamily="34" charset="0"/>
+                <a:ea typeface="Arial" pitchFamily="34" charset="-122"/>
+                <a:cs typeface="Arial" pitchFamily="34" charset="-120"/>
+              </a:rPr>
+              <a:t>External clients select their company and store to start a locked-down visit view scoped to just their own data.</a:t>
+            </a:r>
+            <a:endParaRPr lang="en-US" sz="1350" dirty="0"/>
+          </a:p>
+        </p:txBody>
+      </p:sp>
+      <p:sp>
+        <p:nvSpPr>
+          <p:cNvPr id="8" name="Text 5"/>
+          <p:cNvSpPr/>
+          <p:nvPr/>
+        </p:nvSpPr>
+        <p:spPr>
+          <a:xfrm>
+            <a:off x="7315200" y="2331720"/>
+            <a:ext cx="4480560" cy="256032"/>
+          </a:xfrm>
+          <a:prstGeom prst="rect">
+            <a:avLst/>
+          </a:prstGeom>
+          <a:noFill/>
+          <a:ln/>
+        </p:spPr>
+        <p:txBody>
+          <a:bodyPr wrap="square" rtlCol="0" anchor="ctr"/>
+          <a:lstStyle/>
+          <a:p>
+            <a:pPr indent="0" marL="0">
+              <a:buNone/>
+            </a:pPr>
+            <a:r>
+              <a:rPr lang="en-US" sz="1100" b="1" spc="100" kern="0" dirty="0">
+                <a:solidFill>
+                  <a:srgbClr val="64748B"/>
+                </a:solidFill>
+                <a:latin typeface="Arial" pitchFamily="34" charset="0"/>
+                <a:ea typeface="Arial" pitchFamily="34" charset="-122"/>
+                <a:cs typeface="Arial" pitchFamily="34" charset="-120"/>
+              </a:rPr>
+              <a:t>HOW TO GET HERE</a:t>
+            </a:r>
+            <a:endParaRPr lang="en-US" sz="1100" dirty="0"/>
+          </a:p>
+        </p:txBody>
+      </p:sp>
+      <p:sp>
+        <p:nvSpPr>
+          <p:cNvPr id="9" name="Shape 6"/>
+          <p:cNvSpPr/>
+          <p:nvPr/>
+        </p:nvSpPr>
+        <p:spPr>
+          <a:xfrm>
+            <a:off x="7315200" y="2670048"/>
+            <a:ext cx="237744" cy="237744"/>
+          </a:xfrm>
+          <a:prstGeom prst="ellipse">
+            <a:avLst/>
+          </a:prstGeom>
+          <a:solidFill>
+            <a:srgbClr val="F97316"/>
+          </a:solidFill>
+          <a:ln/>
+        </p:spPr>
+      </p:sp>
+      <p:sp>
+        <p:nvSpPr>
+          <p:cNvPr id="10" name="Text 7"/>
+          <p:cNvSpPr/>
+          <p:nvPr/>
+        </p:nvSpPr>
+        <p:spPr>
+          <a:xfrm>
+            <a:off x="7315200" y="2670048"/>
+            <a:ext cx="237744" cy="237744"/>
+          </a:xfrm>
+          <a:prstGeom prst="rect">
+            <a:avLst/>
+          </a:prstGeom>
+          <a:noFill/>
+          <a:ln/>
+        </p:spPr>
+        <p:txBody>
+          <a:bodyPr wrap="square" rtlCol="0" anchor="ctr"/>
+          <a:lstStyle/>
+          <a:p>
+            <a:pPr algn="ctr" indent="0" marL="0">
+              <a:buNone/>
+            </a:pPr>
+            <a:r>
+              <a:rPr lang="en-US" sz="1050" b="1" dirty="0">
+                <a:solidFill>
+                  <a:srgbClr val="FFFFFF"/>
+                </a:solidFill>
+                <a:latin typeface="Arial" pitchFamily="34" charset="0"/>
+                <a:ea typeface="Arial" pitchFamily="34" charset="-122"/>
+                <a:cs typeface="Arial" pitchFamily="34" charset="-120"/>
+              </a:rPr>
+              <a:t>1</a:t>
+            </a:r>
+            <a:endParaRPr lang="en-US" sz="1050" dirty="0"/>
+          </a:p>
+        </p:txBody>
+      </p:sp>
+      <p:sp>
+        <p:nvSpPr>
+          <p:cNvPr id="11" name="Text 8"/>
+          <p:cNvSpPr/>
+          <p:nvPr/>
+        </p:nvSpPr>
+        <p:spPr>
+          <a:xfrm>
+            <a:off x="7680960" y="2633472"/>
+            <a:ext cx="4114800" cy="384048"/>
+          </a:xfrm>
+          <a:prstGeom prst="rect">
+            <a:avLst/>
+          </a:prstGeom>
+          <a:noFill/>
+          <a:ln/>
+        </p:spPr>
+        <p:txBody>
+          <a:bodyPr wrap="square" rtlCol="0" anchor="t"/>
+          <a:lstStyle/>
+          <a:p>
+            <a:pPr indent="0" marL="0">
+              <a:buNone/>
+            </a:pPr>
+            <a:r>
+              <a:rPr lang="en-US" sz="1200" dirty="0">
+                <a:solidFill>
+                  <a:srgbClr val="1E293B"/>
+                </a:solidFill>
+                <a:latin typeface="Arial" pitchFamily="34" charset="0"/>
+                <a:ea typeface="Arial" pitchFamily="34" charset="-122"/>
+                <a:cs typeface="Arial" pitchFamily="34" charset="-120"/>
+              </a:rPr>
+              <a:t>From Choose Access, tap "I'm a Client"</a:t>
+            </a:r>
+            <a:endParaRPr lang="en-US" sz="1200" dirty="0"/>
+          </a:p>
+        </p:txBody>
+      </p:sp>
+      <p:sp>
+        <p:nvSpPr>
+          <p:cNvPr id="12" name="Shape 9"/>
+          <p:cNvSpPr/>
+          <p:nvPr/>
+        </p:nvSpPr>
+        <p:spPr>
+          <a:xfrm>
+            <a:off x="7315200" y="3127248"/>
+            <a:ext cx="237744" cy="237744"/>
+          </a:xfrm>
+          <a:prstGeom prst="ellipse">
+            <a:avLst/>
+          </a:prstGeom>
+          <a:solidFill>
+            <a:srgbClr val="F97316"/>
+          </a:solidFill>
+          <a:ln/>
+        </p:spPr>
+      </p:sp>
+      <p:sp>
+        <p:nvSpPr>
+          <p:cNvPr id="13" name="Text 10"/>
+          <p:cNvSpPr/>
+          <p:nvPr/>
+        </p:nvSpPr>
+        <p:spPr>
+          <a:xfrm>
+            <a:off x="7315200" y="3127248"/>
+            <a:ext cx="237744" cy="237744"/>
+          </a:xfrm>
+          <a:prstGeom prst="rect">
+            <a:avLst/>
+          </a:prstGeom>
+          <a:noFill/>
+          <a:ln/>
+        </p:spPr>
+        <p:txBody>
+          <a:bodyPr wrap="square" rtlCol="0" anchor="ctr"/>
+          <a:lstStyle/>
+          <a:p>
+            <a:pPr algn="ctr" indent="0" marL="0">
+              <a:buNone/>
+            </a:pPr>
+            <a:r>
+              <a:rPr lang="en-US" sz="1050" b="1" dirty="0">
+                <a:solidFill>
+                  <a:srgbClr val="FFFFFF"/>
+                </a:solidFill>
+                <a:latin typeface="Arial" pitchFamily="34" charset="0"/>
+                <a:ea typeface="Arial" pitchFamily="34" charset="-122"/>
+                <a:cs typeface="Arial" pitchFamily="34" charset="-120"/>
+              </a:rPr>
+              <a:t>2</a:t>
+            </a:r>
+            <a:endParaRPr lang="en-US" sz="1050" dirty="0"/>
+          </a:p>
+        </p:txBody>
+      </p:sp>
+      <p:sp>
+        <p:nvSpPr>
+          <p:cNvPr id="14" name="Text 11"/>
+          <p:cNvSpPr/>
+          <p:nvPr/>
+        </p:nvSpPr>
+        <p:spPr>
+          <a:xfrm>
+            <a:off x="7680960" y="3090672"/>
+            <a:ext cx="4114800" cy="384048"/>
+          </a:xfrm>
+          <a:prstGeom prst="rect">
+            <a:avLst/>
+          </a:prstGeom>
+          <a:noFill/>
+          <a:ln/>
+        </p:spPr>
+        <p:txBody>
+          <a:bodyPr wrap="square" rtlCol="0" anchor="t"/>
+          <a:lstStyle/>
+          <a:p>
+            <a:pPr indent="0" marL="0">
+              <a:buNone/>
+            </a:pPr>
+            <a:r>
+              <a:rPr lang="en-US" sz="1200" dirty="0">
+                <a:solidFill>
+                  <a:srgbClr val="1E293B"/>
+                </a:solidFill>
+                <a:latin typeface="Arial" pitchFamily="34" charset="0"/>
+                <a:ea typeface="Arial" pitchFamily="34" charset="-122"/>
+                <a:cs typeface="Arial" pitchFamily="34" charset="-120"/>
+              </a:rPr>
+              <a:t>Select your company from the Client dropdown</a:t>
+            </a:r>
+            <a:endParaRPr lang="en-US" sz="1200" dirty="0"/>
+          </a:p>
+        </p:txBody>
+      </p:sp>
+      <p:sp>
+        <p:nvSpPr>
+          <p:cNvPr id="15" name="Shape 12"/>
+          <p:cNvSpPr/>
+          <p:nvPr/>
+        </p:nvSpPr>
+        <p:spPr>
+          <a:xfrm>
+            <a:off x="7315200" y="3584448"/>
+            <a:ext cx="237744" cy="237744"/>
+          </a:xfrm>
+          <a:prstGeom prst="ellipse">
+            <a:avLst/>
+          </a:prstGeom>
+          <a:solidFill>
+            <a:srgbClr val="F97316"/>
+          </a:solidFill>
+          <a:ln/>
+        </p:spPr>
+      </p:sp>
+      <p:sp>
+        <p:nvSpPr>
+          <p:cNvPr id="16" name="Text 13"/>
+          <p:cNvSpPr/>
+          <p:nvPr/>
+        </p:nvSpPr>
+        <p:spPr>
+          <a:xfrm>
+            <a:off x="7315200" y="3584448"/>
+            <a:ext cx="237744" cy="237744"/>
+          </a:xfrm>
+          <a:prstGeom prst="rect">
+            <a:avLst/>
+          </a:prstGeom>
+          <a:noFill/>
+          <a:ln/>
+        </p:spPr>
+        <p:txBody>
+          <a:bodyPr wrap="square" rtlCol="0" anchor="ctr"/>
+          <a:lstStyle/>
+          <a:p>
+            <a:pPr algn="ctr" indent="0" marL="0">
+              <a:buNone/>
+            </a:pPr>
+            <a:r>
+              <a:rPr lang="en-US" sz="1050" b="1" dirty="0">
+                <a:solidFill>
+                  <a:srgbClr val="FFFFFF"/>
+                </a:solidFill>
+                <a:latin typeface="Arial" pitchFamily="34" charset="0"/>
+                <a:ea typeface="Arial" pitchFamily="34" charset="-122"/>
+                <a:cs typeface="Arial" pitchFamily="34" charset="-120"/>
+              </a:rPr>
+              <a:t>3</a:t>
+            </a:r>
+            <a:endParaRPr lang="en-US" sz="1050" dirty="0"/>
+          </a:p>
+        </p:txBody>
+      </p:sp>
+      <p:sp>
+        <p:nvSpPr>
+          <p:cNvPr id="17" name="Text 14"/>
+          <p:cNvSpPr/>
+          <p:nvPr/>
+        </p:nvSpPr>
+        <p:spPr>
+          <a:xfrm>
+            <a:off x="7680960" y="3547872"/>
+            <a:ext cx="4114800" cy="384048"/>
+          </a:xfrm>
+          <a:prstGeom prst="rect">
+            <a:avLst/>
+          </a:prstGeom>
+          <a:noFill/>
+          <a:ln/>
+        </p:spPr>
+        <p:txBody>
+          <a:bodyPr wrap="square" rtlCol="0" anchor="t"/>
+          <a:lstStyle/>
+          <a:p>
+            <a:pPr indent="0" marL="0">
+              <a:buNone/>
+            </a:pPr>
+            <a:r>
+              <a:rPr lang="en-US" sz="1200" dirty="0">
+                <a:solidFill>
+                  <a:srgbClr val="1E293B"/>
+                </a:solidFill>
+                <a:latin typeface="Arial" pitchFamily="34" charset="0"/>
+                <a:ea typeface="Arial" pitchFamily="34" charset="-122"/>
+                <a:cs typeface="Arial" pitchFamily="34" charset="-120"/>
+              </a:rPr>
+              <a:t>Select your store from the Store dropdown</a:t>
+            </a:r>
+            <a:endParaRPr lang="en-US" sz="1200" dirty="0"/>
+          </a:p>
+        </p:txBody>
+      </p:sp>
+      <p:sp>
+        <p:nvSpPr>
+          <p:cNvPr id="18" name="Shape 15"/>
+          <p:cNvSpPr/>
+          <p:nvPr/>
+        </p:nvSpPr>
+        <p:spPr>
+          <a:xfrm>
+            <a:off x="7315200" y="4041648"/>
+            <a:ext cx="237744" cy="237744"/>
+          </a:xfrm>
+          <a:prstGeom prst="ellipse">
+            <a:avLst/>
+          </a:prstGeom>
+          <a:solidFill>
+            <a:srgbClr val="F97316"/>
+          </a:solidFill>
+          <a:ln/>
+        </p:spPr>
+      </p:sp>
+      <p:sp>
+        <p:nvSpPr>
+          <p:cNvPr id="19" name="Text 16"/>
+          <p:cNvSpPr/>
+          <p:nvPr/>
+        </p:nvSpPr>
+        <p:spPr>
+          <a:xfrm>
+            <a:off x="7315200" y="4041648"/>
+            <a:ext cx="237744" cy="237744"/>
+          </a:xfrm>
+          <a:prstGeom prst="rect">
+            <a:avLst/>
+          </a:prstGeom>
+          <a:noFill/>
+          <a:ln/>
+        </p:spPr>
+        <p:txBody>
+          <a:bodyPr wrap="square" rtlCol="0" anchor="ctr"/>
+          <a:lstStyle/>
+          <a:p>
+            <a:pPr algn="ctr" indent="0" marL="0">
+              <a:buNone/>
+            </a:pPr>
+            <a:r>
+              <a:rPr lang="en-US" sz="1050" b="1" dirty="0">
+                <a:solidFill>
+                  <a:srgbClr val="FFFFFF"/>
+                </a:solidFill>
+                <a:latin typeface="Arial" pitchFamily="34" charset="0"/>
+                <a:ea typeface="Arial" pitchFamily="34" charset="-122"/>
+                <a:cs typeface="Arial" pitchFamily="34" charset="-120"/>
+              </a:rPr>
+              <a:t>4</a:t>
+            </a:r>
+            <a:endParaRPr lang="en-US" sz="1050" dirty="0"/>
+          </a:p>
+        </p:txBody>
+      </p:sp>
+      <p:sp>
+        <p:nvSpPr>
+          <p:cNvPr id="20" name="Text 17"/>
+          <p:cNvSpPr/>
+          <p:nvPr/>
+        </p:nvSpPr>
+        <p:spPr>
+          <a:xfrm>
+            <a:off x="7680960" y="4005072"/>
+            <a:ext cx="4114800" cy="384048"/>
+          </a:xfrm>
+          <a:prstGeom prst="rect">
+            <a:avLst/>
+          </a:prstGeom>
+          <a:noFill/>
+          <a:ln/>
+        </p:spPr>
+        <p:txBody>
+          <a:bodyPr wrap="square" rtlCol="0" anchor="t"/>
+          <a:lstStyle/>
+          <a:p>
+            <a:pPr indent="0" marL="0">
+              <a:buNone/>
+            </a:pPr>
+            <a:r>
+              <a:rPr lang="en-US" sz="1200" dirty="0">
+                <a:solidFill>
+                  <a:srgbClr val="1E293B"/>
+                </a:solidFill>
+                <a:latin typeface="Arial" pitchFamily="34" charset="0"/>
+                <a:ea typeface="Arial" pitchFamily="34" charset="-122"/>
+                <a:cs typeface="Arial" pitchFamily="34" charset="-120"/>
+              </a:rPr>
+              <a:t>Tap "Start Visit" to view your store's task data</a:t>
+            </a:r>
+            <a:endParaRPr lang="en-US" sz="1200" dirty="0"/>
+          </a:p>
+        </p:txBody>
+      </p:sp>
+      <p:sp>
+        <p:nvSpPr>
+          <p:cNvPr id="21" name="Text 18"/>
+          <p:cNvSpPr/>
+          <p:nvPr/>
+        </p:nvSpPr>
+        <p:spPr>
+          <a:xfrm>
+            <a:off x="7315200" y="4599432"/>
+            <a:ext cx="4480560" cy="256032"/>
+          </a:xfrm>
+          <a:prstGeom prst="rect">
+            <a:avLst/>
+          </a:prstGeom>
+          <a:noFill/>
+          <a:ln/>
+        </p:spPr>
+        <p:txBody>
+          <a:bodyPr wrap="square" rtlCol="0" anchor="ctr"/>
+          <a:lstStyle/>
+          <a:p>
+            <a:pPr indent="0" marL="0">
+              <a:buNone/>
+            </a:pPr>
+            <a:r>
+              <a:rPr lang="en-US" sz="1100" b="1" spc="100" kern="0" dirty="0">
+                <a:solidFill>
+                  <a:srgbClr val="64748B"/>
+                </a:solidFill>
+                <a:latin typeface="Arial" pitchFamily="34" charset="0"/>
+                <a:ea typeface="Arial" pitchFamily="34" charset="-122"/>
+                <a:cs typeface="Arial" pitchFamily="34" charset="-120"/>
+              </a:rPr>
+              <a:t>DROPDOWNS / FILTERS ON THIS SCREEN</a:t>
+            </a:r>
+            <a:endParaRPr lang="en-US" sz="1100" dirty="0"/>
+          </a:p>
+        </p:txBody>
+      </p:sp>
+      <p:sp>
+        <p:nvSpPr>
+          <p:cNvPr id="22" name="Shape 19"/>
+          <p:cNvSpPr/>
+          <p:nvPr/>
+        </p:nvSpPr>
+        <p:spPr>
+          <a:xfrm>
+            <a:off x="7315200" y="4937760"/>
+            <a:ext cx="82296" cy="82296"/>
+          </a:xfrm>
+          <a:prstGeom prst="rect">
+            <a:avLst/>
+          </a:prstGeom>
+          <a:solidFill>
+            <a:srgbClr val="003B71"/>
+          </a:solidFill>
+          <a:ln/>
+        </p:spPr>
+      </p:sp>
+      <p:sp>
+        <p:nvSpPr>
+          <p:cNvPr id="23" name="Text 20"/>
+          <p:cNvSpPr/>
+          <p:nvPr/>
+        </p:nvSpPr>
+        <p:spPr>
+          <a:xfrm>
+            <a:off x="7516368" y="4855464"/>
+            <a:ext cx="4297680" cy="365760"/>
+          </a:xfrm>
+          <a:prstGeom prst="rect">
+            <a:avLst/>
+          </a:prstGeom>
+          <a:noFill/>
+          <a:ln/>
+        </p:spPr>
+        <p:txBody>
+          <a:bodyPr wrap="square" rtlCol="0" anchor="t"/>
+          <a:lstStyle/>
+          <a:p>
+            <a:pPr indent="0" marL="0">
+              <a:buNone/>
+            </a:pPr>
+            <a:r>
+              <a:rPr lang="en-US" sz="1150" b="1" dirty="0">
+                <a:solidFill>
+                  <a:srgbClr val="003B71"/>
+                </a:solidFill>
+                <a:latin typeface="Arial" pitchFamily="34" charset="0"/>
+                <a:ea typeface="Arial" pitchFamily="34" charset="-122"/>
+                <a:cs typeface="Arial" pitchFamily="34" charset="-120"/>
+              </a:rPr>
+              <a:t>Select Client: </a:t>
+            </a:r>
+            <a:pPr indent="0" marL="0">
+              <a:buNone/>
+            </a:pPr>
+            <a:r>
+              <a:rPr lang="en-US" sz="1150" dirty="0">
+                <a:solidFill>
+                  <a:srgbClr val="1E293B"/>
+                </a:solidFill>
+                <a:latin typeface="Arial" pitchFamily="34" charset="0"/>
+                <a:ea typeface="Arial" pitchFamily="34" charset="-122"/>
+                <a:cs typeface="Arial" pitchFamily="34" charset="-120"/>
+              </a:rPr>
+              <a:t>List of client companies</a:t>
+            </a:r>
+            <a:endParaRPr lang="en-US" sz="1150" dirty="0"/>
+          </a:p>
+        </p:txBody>
+      </p:sp>
+      <p:sp>
+        <p:nvSpPr>
+          <p:cNvPr id="24" name="Shape 21"/>
+          <p:cNvSpPr/>
+          <p:nvPr/>
+        </p:nvSpPr>
+        <p:spPr>
+          <a:xfrm>
+            <a:off x="7315200" y="5321808"/>
+            <a:ext cx="82296" cy="82296"/>
+          </a:xfrm>
+          <a:prstGeom prst="rect">
+            <a:avLst/>
+          </a:prstGeom>
+          <a:solidFill>
+            <a:srgbClr val="003B71"/>
+          </a:solidFill>
+          <a:ln/>
+        </p:spPr>
+      </p:sp>
+      <p:sp>
+        <p:nvSpPr>
+          <p:cNvPr id="25" name="Text 22"/>
+          <p:cNvSpPr/>
+          <p:nvPr/>
+        </p:nvSpPr>
+        <p:spPr>
+          <a:xfrm>
+            <a:off x="7516368" y="5239512"/>
+            <a:ext cx="4297680" cy="365760"/>
+          </a:xfrm>
+          <a:prstGeom prst="rect">
+            <a:avLst/>
+          </a:prstGeom>
+          <a:noFill/>
+          <a:ln/>
+        </p:spPr>
+        <p:txBody>
+          <a:bodyPr wrap="square" rtlCol="0" anchor="t"/>
+          <a:lstStyle/>
+          <a:p>
+            <a:pPr indent="0" marL="0">
+              <a:buNone/>
+            </a:pPr>
+            <a:r>
+              <a:rPr lang="en-US" sz="1150" b="1" dirty="0">
+                <a:solidFill>
+                  <a:srgbClr val="003B71"/>
+                </a:solidFill>
+                <a:latin typeface="Arial" pitchFamily="34" charset="0"/>
+                <a:ea typeface="Arial" pitchFamily="34" charset="-122"/>
+                <a:cs typeface="Arial" pitchFamily="34" charset="-120"/>
+              </a:rPr>
+              <a:t>Select Store: </a:t>
+            </a:r>
+            <a:pPr indent="0" marL="0">
+              <a:buNone/>
+            </a:pPr>
+            <a:r>
+              <a:rPr lang="en-US" sz="1150" dirty="0">
+                <a:solidFill>
+                  <a:srgbClr val="1E293B"/>
+                </a:solidFill>
+                <a:latin typeface="Arial" pitchFamily="34" charset="0"/>
+                <a:ea typeface="Arial" pitchFamily="34" charset="-122"/>
+                <a:cs typeface="Arial" pitchFamily="34" charset="-120"/>
+              </a:rPr>
+              <a:t>Enabled only after a client is chosen</a:t>
+            </a:r>
+            <a:endParaRPr lang="en-US" sz="1150" dirty="0"/>
+          </a:p>
+        </p:txBody>
+      </p:sp>
+    </p:spTree>
+  </p:cSld>
+  <p:clrMapOvr>
+    <a:masterClrMapping/>
+  </p:clrMapOvr>
+</p:sld>
+</file>
+
+<file path=ppt/slides/slide14.xml><?xml version="1.0" encoding="utf-8"?>
+<p:sld xmlns:a="http://schemas.openxmlformats.org/drawingml/2006/main" xmlns:r="http://schemas.openxmlformats.org/officeDocument/2006/relationships" xmlns:p="http://schemas.openxmlformats.org/presentationml/2006/main">
+  <p:cSld name="Slide 14">
+    <p:bg>
+      <p:bgPr>
+        <a:solidFill>
+          <a:srgbClr val="F8FAFC"/>
+        </a:solidFill>
+      </p:bgPr>
+    </p:bg>
+    <p:spTree>
+      <p:nvGrpSpPr>
+        <p:cNvPr id="1" name=""/>
+        <p:cNvGrpSpPr/>
+        <p:nvPr/>
+      </p:nvGrpSpPr>
+      <p:grpSpPr>
+        <a:xfrm>
+          <a:off x="0" y="0"/>
+          <a:ext cx="0" cy="0"/>
+          <a:chOff x="0" y="0"/>
+          <a:chExt cx="0" cy="0"/>
+        </a:xfrm>
+      </p:grpSpPr>
+      <p:sp>
+        <p:nvSpPr>
+          <p:cNvPr id="2" name="Shape 0"/>
+          <p:cNvSpPr/>
+          <p:nvPr/>
+        </p:nvSpPr>
+        <p:spPr>
+          <a:xfrm>
+            <a:off x="0" y="0"/>
+            <a:ext cx="12191695" cy="1005840"/>
+          </a:xfrm>
+          <a:prstGeom prst="rect">
+            <a:avLst/>
+          </a:prstGeom>
+          <a:solidFill>
+            <a:srgbClr val="003B71"/>
+          </a:solidFill>
+          <a:ln/>
+        </p:spPr>
+      </p:sp>
+      <p:sp>
+        <p:nvSpPr>
+          <p:cNvPr id="3" name="Text 1"/>
+          <p:cNvSpPr/>
+          <p:nvPr/>
+        </p:nvSpPr>
+        <p:spPr>
+          <a:xfrm>
+            <a:off x="457200" y="137160"/>
+            <a:ext cx="7315200" cy="274320"/>
+          </a:xfrm>
+          <a:prstGeom prst="rect">
+            <a:avLst/>
+          </a:prstGeom>
+          <a:noFill/>
+          <a:ln/>
+        </p:spPr>
+        <p:txBody>
+          <a:bodyPr wrap="square" rtlCol="0" anchor="ctr"/>
+          <a:lstStyle/>
+          <a:p>
+            <a:pPr indent="0" marL="0">
+              <a:buNone/>
+            </a:pPr>
+            <a:r>
+              <a:rPr lang="en-US" sz="1200" b="1" spc="100" kern="0" dirty="0">
+                <a:solidFill>
+                  <a:srgbClr val="F97316"/>
+                </a:solidFill>
+                <a:latin typeface="Arial" pitchFamily="34" charset="0"/>
+                <a:ea typeface="Arial" pitchFamily="34" charset="-122"/>
+                <a:cs typeface="Arial" pitchFamily="34" charset="-120"/>
+              </a:rPr>
+              <a:t>STEP 10 · REP SELF-TRACKING</a:t>
+            </a:r>
+            <a:endParaRPr lang="en-US" sz="1200" dirty="0"/>
+          </a:p>
+        </p:txBody>
+      </p:sp>
+      <p:sp>
+        <p:nvSpPr>
+          <p:cNvPr id="4" name="Text 2"/>
+          <p:cNvSpPr/>
+          <p:nvPr/>
+        </p:nvSpPr>
+        <p:spPr>
+          <a:xfrm>
+            <a:off x="457200" y="384048"/>
+            <a:ext cx="7315200" cy="548640"/>
+          </a:xfrm>
+          <a:prstGeom prst="rect">
+            <a:avLst/>
+          </a:prstGeom>
+          <a:noFill/>
+          <a:ln/>
+        </p:spPr>
+        <p:txBody>
+          <a:bodyPr wrap="square" rtlCol="0" anchor="ctr"/>
+          <a:lstStyle/>
+          <a:p>
+            <a:pPr indent="0" marL="0">
+              <a:buNone/>
+            </a:pPr>
+            <a:r>
+              <a:rPr lang="en-US" sz="2600" b="1" dirty="0">
+                <a:solidFill>
+                  <a:srgbClr val="FFFFFF"/>
+                </a:solidFill>
+                <a:latin typeface="Arial" pitchFamily="34" charset="0"/>
+                <a:ea typeface="Arial" pitchFamily="34" charset="-122"/>
+                <a:cs typeface="Arial" pitchFamily="34" charset="-120"/>
+              </a:rPr>
+              <a:t>My Task Progress</a:t>
+            </a:r>
+            <a:endParaRPr lang="en-US" sz="2600" dirty="0"/>
+          </a:p>
+        </p:txBody>
+      </p:sp>
+      <p:pic>
+        <p:nvPicPr>
+          <p:cNvPr id="5" name="Image 0" descr="/home/runner/workspace/screenshots/stockfix_guide/08_rep_progress.jpg">    </p:cNvPr>
+          <p:cNvPicPr>
+            <a:picLocks noChangeAspect="1"/>
+          </p:cNvPicPr>
+          <p:nvPr/>
+        </p:nvPicPr>
+        <p:blipFill>
+          <a:blip r:embed="rId1"/>
+          <a:srcRect l="0" r="0" t="0" b="0"/>
+          <a:stretch/>
+        </p:blipFill>
+        <p:spPr>
+          <a:xfrm>
+            <a:off x="457200" y="1280160"/>
+            <a:ext cx="6583680" cy="5120640"/>
+          </a:xfrm>
+          <a:prstGeom prst="rect">
+            <a:avLst/>
+          </a:prstGeom>
+        </p:spPr>
+      </p:pic>
+      <p:sp>
+        <p:nvSpPr>
+          <p:cNvPr id="6" name="Shape 3"/>
+          <p:cNvSpPr/>
+          <p:nvPr/>
+        </p:nvSpPr>
+        <p:spPr>
+          <a:xfrm>
+            <a:off x="457200" y="1280160"/>
+            <a:ext cx="6583680" cy="5120640"/>
+          </a:xfrm>
+          <a:prstGeom prst="rect">
+            <a:avLst/>
+          </a:prstGeom>
+          <a:ln w="12700">
+            <a:solidFill>
+              <a:srgbClr val="CBD5E1"/>
+            </a:solidFill>
+            <a:prstDash val="solid"/>
+          </a:ln>
+        </p:spPr>
+      </p:sp>
+      <p:sp>
+        <p:nvSpPr>
+          <p:cNvPr id="7" name="Text 4"/>
+          <p:cNvSpPr/>
+          <p:nvPr/>
+        </p:nvSpPr>
+        <p:spPr>
+          <a:xfrm>
+            <a:off x="7315200" y="1371600"/>
+            <a:ext cx="4480560" cy="822960"/>
+          </a:xfrm>
+          <a:prstGeom prst="rect">
+            <a:avLst/>
+          </a:prstGeom>
+          <a:noFill/>
+          <a:ln/>
+        </p:spPr>
+        <p:txBody>
+          <a:bodyPr wrap="square" rtlCol="0" anchor="t"/>
+          <a:lstStyle/>
+          <a:p>
+            <a:pPr indent="0" marL="0">
+              <a:buNone/>
+            </a:pPr>
+            <a:r>
+              <a:rPr lang="en-US" sz="1350" dirty="0">
+                <a:solidFill>
+                  <a:srgbClr val="1E293B"/>
+                </a:solidFill>
+                <a:latin typeface="Arial" pitchFamily="34" charset="0"/>
+                <a:ea typeface="Arial" pitchFamily="34" charset="-122"/>
+                <a:cs typeface="Arial" pitchFamily="34" charset="-120"/>
+              </a:rPr>
+              <a:t>Reps can check their own completion stats — priority tasks open vs done, and a searchable list of open/completed tasks.</a:t>
+            </a:r>
+            <a:endParaRPr lang="en-US" sz="1350" dirty="0"/>
+          </a:p>
+        </p:txBody>
+      </p:sp>
+      <p:sp>
+        <p:nvSpPr>
+          <p:cNvPr id="8" name="Text 5"/>
+          <p:cNvSpPr/>
+          <p:nvPr/>
+        </p:nvSpPr>
+        <p:spPr>
+          <a:xfrm>
+            <a:off x="7315200" y="2331720"/>
+            <a:ext cx="4480560" cy="256032"/>
+          </a:xfrm>
+          <a:prstGeom prst="rect">
+            <a:avLst/>
+          </a:prstGeom>
+          <a:noFill/>
+          <a:ln/>
+        </p:spPr>
+        <p:txBody>
+          <a:bodyPr wrap="square" rtlCol="0" anchor="ctr"/>
+          <a:lstStyle/>
+          <a:p>
+            <a:pPr indent="0" marL="0">
+              <a:buNone/>
+            </a:pPr>
+            <a:r>
+              <a:rPr lang="en-US" sz="1100" b="1" spc="100" kern="0" dirty="0">
+                <a:solidFill>
+                  <a:srgbClr val="64748B"/>
+                </a:solidFill>
+                <a:latin typeface="Arial" pitchFamily="34" charset="0"/>
+                <a:ea typeface="Arial" pitchFamily="34" charset="-122"/>
+                <a:cs typeface="Arial" pitchFamily="34" charset="-120"/>
+              </a:rPr>
+              <a:t>HOW TO GET HERE</a:t>
+            </a:r>
+            <a:endParaRPr lang="en-US" sz="1100" dirty="0"/>
+          </a:p>
+        </p:txBody>
+      </p:sp>
+      <p:sp>
+        <p:nvSpPr>
+          <p:cNvPr id="9" name="Shape 6"/>
+          <p:cNvSpPr/>
+          <p:nvPr/>
+        </p:nvSpPr>
+        <p:spPr>
+          <a:xfrm>
+            <a:off x="7315200" y="2670048"/>
+            <a:ext cx="237744" cy="237744"/>
+          </a:xfrm>
+          <a:prstGeom prst="ellipse">
+            <a:avLst/>
+          </a:prstGeom>
+          <a:solidFill>
+            <a:srgbClr val="F97316"/>
+          </a:solidFill>
+          <a:ln/>
+        </p:spPr>
+      </p:sp>
+      <p:sp>
+        <p:nvSpPr>
+          <p:cNvPr id="10" name="Text 7"/>
+          <p:cNvSpPr/>
+          <p:nvPr/>
+        </p:nvSpPr>
+        <p:spPr>
+          <a:xfrm>
+            <a:off x="7315200" y="2670048"/>
+            <a:ext cx="237744" cy="237744"/>
+          </a:xfrm>
+          <a:prstGeom prst="rect">
+            <a:avLst/>
+          </a:prstGeom>
+          <a:noFill/>
+          <a:ln/>
+        </p:spPr>
+        <p:txBody>
+          <a:bodyPr wrap="square" rtlCol="0" anchor="ctr"/>
+          <a:lstStyle/>
+          <a:p>
+            <a:pPr algn="ctr" indent="0" marL="0">
+              <a:buNone/>
+            </a:pPr>
+            <a:r>
+              <a:rPr lang="en-US" sz="1050" b="1" dirty="0">
+                <a:solidFill>
+                  <a:srgbClr val="FFFFFF"/>
+                </a:solidFill>
+                <a:latin typeface="Arial" pitchFamily="34" charset="0"/>
+                <a:ea typeface="Arial" pitchFamily="34" charset="-122"/>
+                <a:cs typeface="Arial" pitchFamily="34" charset="-120"/>
+              </a:rPr>
+              <a:t>1</a:t>
+            </a:r>
+            <a:endParaRPr lang="en-US" sz="1050" dirty="0"/>
+          </a:p>
+        </p:txBody>
+      </p:sp>
+      <p:sp>
+        <p:nvSpPr>
+          <p:cNvPr id="11" name="Text 8"/>
+          <p:cNvSpPr/>
+          <p:nvPr/>
+        </p:nvSpPr>
+        <p:spPr>
+          <a:xfrm>
+            <a:off x="7680960" y="2633472"/>
+            <a:ext cx="4114800" cy="384048"/>
+          </a:xfrm>
+          <a:prstGeom prst="rect">
+            <a:avLst/>
+          </a:prstGeom>
+          <a:noFill/>
+          <a:ln/>
+        </p:spPr>
+        <p:txBody>
+          <a:bodyPr wrap="square" rtlCol="0" anchor="t"/>
+          <a:lstStyle/>
+          <a:p>
+            <a:pPr indent="0" marL="0">
+              <a:buNone/>
+            </a:pPr>
+            <a:r>
+              <a:rPr lang="en-US" sz="1200" dirty="0">
+                <a:solidFill>
+                  <a:srgbClr val="1E293B"/>
+                </a:solidFill>
+                <a:latin typeface="Arial" pitchFamily="34" charset="0"/>
+                <a:ea typeface="Arial" pitchFamily="34" charset="-122"/>
+                <a:cs typeface="Arial" pitchFamily="34" charset="-120"/>
+              </a:rPr>
+              <a:t>From Select Rep/Store, tap "My Dashboard"</a:t>
+            </a:r>
+            <a:endParaRPr lang="en-US" sz="1200" dirty="0"/>
+          </a:p>
+        </p:txBody>
+      </p:sp>
+      <p:sp>
+        <p:nvSpPr>
+          <p:cNvPr id="12" name="Shape 9"/>
+          <p:cNvSpPr/>
+          <p:nvPr/>
+        </p:nvSpPr>
+        <p:spPr>
+          <a:xfrm>
+            <a:off x="7315200" y="3127248"/>
+            <a:ext cx="237744" cy="237744"/>
+          </a:xfrm>
+          <a:prstGeom prst="ellipse">
+            <a:avLst/>
+          </a:prstGeom>
+          <a:solidFill>
+            <a:srgbClr val="F97316"/>
+          </a:solidFill>
+          <a:ln/>
+        </p:spPr>
+      </p:sp>
+      <p:sp>
+        <p:nvSpPr>
+          <p:cNvPr id="13" name="Text 10"/>
+          <p:cNvSpPr/>
+          <p:nvPr/>
+        </p:nvSpPr>
+        <p:spPr>
+          <a:xfrm>
+            <a:off x="7315200" y="3127248"/>
+            <a:ext cx="237744" cy="237744"/>
+          </a:xfrm>
+          <a:prstGeom prst="rect">
+            <a:avLst/>
+          </a:prstGeom>
+          <a:noFill/>
+          <a:ln/>
+        </p:spPr>
+        <p:txBody>
+          <a:bodyPr wrap="square" rtlCol="0" anchor="ctr"/>
+          <a:lstStyle/>
+          <a:p>
+            <a:pPr algn="ctr" indent="0" marL="0">
+              <a:buNone/>
+            </a:pPr>
+            <a:r>
+              <a:rPr lang="en-US" sz="1050" b="1" dirty="0">
+                <a:solidFill>
+                  <a:srgbClr val="FFFFFF"/>
+                </a:solidFill>
+                <a:latin typeface="Arial" pitchFamily="34" charset="0"/>
+                <a:ea typeface="Arial" pitchFamily="34" charset="-122"/>
+                <a:cs typeface="Arial" pitchFamily="34" charset="-120"/>
+              </a:rPr>
+              <a:t>2</a:t>
+            </a:r>
+            <a:endParaRPr lang="en-US" sz="1050" dirty="0"/>
+          </a:p>
+        </p:txBody>
+      </p:sp>
+      <p:sp>
+        <p:nvSpPr>
+          <p:cNvPr id="14" name="Text 11"/>
+          <p:cNvSpPr/>
+          <p:nvPr/>
+        </p:nvSpPr>
+        <p:spPr>
+          <a:xfrm>
+            <a:off x="7680960" y="3090672"/>
+            <a:ext cx="4114800" cy="384048"/>
+          </a:xfrm>
+          <a:prstGeom prst="rect">
+            <a:avLst/>
+          </a:prstGeom>
+          <a:noFill/>
+          <a:ln/>
+        </p:spPr>
+        <p:txBody>
+          <a:bodyPr wrap="square" rtlCol="0" anchor="t"/>
+          <a:lstStyle/>
+          <a:p>
+            <a:pPr indent="0" marL="0">
+              <a:buNone/>
+            </a:pPr>
+            <a:r>
+              <a:rPr lang="en-US" sz="1200" dirty="0">
+                <a:solidFill>
+                  <a:srgbClr val="1E293B"/>
+                </a:solidFill>
+                <a:latin typeface="Arial" pitchFamily="34" charset="0"/>
+                <a:ea typeface="Arial" pitchFamily="34" charset="-122"/>
+                <a:cs typeface="Arial" pitchFamily="34" charset="-120"/>
+              </a:rPr>
+              <a:t>Review Priority Open / Done / Rate cards</a:t>
+            </a:r>
+            <a:endParaRPr lang="en-US" sz="1200" dirty="0"/>
+          </a:p>
+        </p:txBody>
+      </p:sp>
+      <p:sp>
+        <p:nvSpPr>
+          <p:cNvPr id="15" name="Shape 12"/>
+          <p:cNvSpPr/>
+          <p:nvPr/>
+        </p:nvSpPr>
+        <p:spPr>
+          <a:xfrm>
+            <a:off x="7315200" y="3584448"/>
+            <a:ext cx="237744" cy="237744"/>
+          </a:xfrm>
+          <a:prstGeom prst="ellipse">
+            <a:avLst/>
+          </a:prstGeom>
+          <a:solidFill>
+            <a:srgbClr val="F97316"/>
+          </a:solidFill>
+          <a:ln/>
+        </p:spPr>
+      </p:sp>
+      <p:sp>
+        <p:nvSpPr>
+          <p:cNvPr id="16" name="Text 13"/>
+          <p:cNvSpPr/>
+          <p:nvPr/>
+        </p:nvSpPr>
+        <p:spPr>
+          <a:xfrm>
+            <a:off x="7315200" y="3584448"/>
+            <a:ext cx="237744" cy="237744"/>
+          </a:xfrm>
+          <a:prstGeom prst="rect">
+            <a:avLst/>
+          </a:prstGeom>
+          <a:noFill/>
+          <a:ln/>
+        </p:spPr>
+        <p:txBody>
+          <a:bodyPr wrap="square" rtlCol="0" anchor="ctr"/>
+          <a:lstStyle/>
+          <a:p>
+            <a:pPr algn="ctr" indent="0" marL="0">
+              <a:buNone/>
+            </a:pPr>
+            <a:r>
+              <a:rPr lang="en-US" sz="1050" b="1" dirty="0">
+                <a:solidFill>
+                  <a:srgbClr val="FFFFFF"/>
+                </a:solidFill>
+                <a:latin typeface="Arial" pitchFamily="34" charset="0"/>
+                <a:ea typeface="Arial" pitchFamily="34" charset="-122"/>
+                <a:cs typeface="Arial" pitchFamily="34" charset="-120"/>
+              </a:rPr>
+              <a:t>3</a:t>
+            </a:r>
+            <a:endParaRPr lang="en-US" sz="1050" dirty="0"/>
+          </a:p>
+        </p:txBody>
+      </p:sp>
+      <p:sp>
+        <p:nvSpPr>
+          <p:cNvPr id="17" name="Text 14"/>
+          <p:cNvSpPr/>
+          <p:nvPr/>
+        </p:nvSpPr>
+        <p:spPr>
+          <a:xfrm>
+            <a:off x="7680960" y="3547872"/>
+            <a:ext cx="4114800" cy="384048"/>
+          </a:xfrm>
+          <a:prstGeom prst="rect">
+            <a:avLst/>
+          </a:prstGeom>
+          <a:noFill/>
+          <a:ln/>
+        </p:spPr>
+        <p:txBody>
+          <a:bodyPr wrap="square" rtlCol="0" anchor="t"/>
+          <a:lstStyle/>
+          <a:p>
+            <a:pPr indent="0" marL="0">
+              <a:buNone/>
+            </a:pPr>
+            <a:r>
+              <a:rPr lang="en-US" sz="1200" dirty="0">
+                <a:solidFill>
+                  <a:srgbClr val="1E293B"/>
+                </a:solidFill>
+                <a:latin typeface="Arial" pitchFamily="34" charset="0"/>
+                <a:ea typeface="Arial" pitchFamily="34" charset="-122"/>
+                <a:cs typeface="Arial" pitchFamily="34" charset="-120"/>
+              </a:rPr>
+              <a:t>Switch between "Open" and "Completed" tabs</a:t>
+            </a:r>
+            <a:endParaRPr lang="en-US" sz="1200" dirty="0"/>
+          </a:p>
+        </p:txBody>
+      </p:sp>
+      <p:sp>
+        <p:nvSpPr>
+          <p:cNvPr id="18" name="Shape 15"/>
+          <p:cNvSpPr/>
+          <p:nvPr/>
+        </p:nvSpPr>
+        <p:spPr>
+          <a:xfrm>
+            <a:off x="7315200" y="4041648"/>
+            <a:ext cx="237744" cy="237744"/>
+          </a:xfrm>
+          <a:prstGeom prst="ellipse">
+            <a:avLst/>
+          </a:prstGeom>
+          <a:solidFill>
+            <a:srgbClr val="F97316"/>
+          </a:solidFill>
+          <a:ln/>
+        </p:spPr>
+      </p:sp>
+      <p:sp>
+        <p:nvSpPr>
+          <p:cNvPr id="19" name="Text 16"/>
+          <p:cNvSpPr/>
+          <p:nvPr/>
+        </p:nvSpPr>
+        <p:spPr>
+          <a:xfrm>
+            <a:off x="7315200" y="4041648"/>
+            <a:ext cx="237744" cy="237744"/>
+          </a:xfrm>
+          <a:prstGeom prst="rect">
+            <a:avLst/>
+          </a:prstGeom>
+          <a:noFill/>
+          <a:ln/>
+        </p:spPr>
+        <p:txBody>
+          <a:bodyPr wrap="square" rtlCol="0" anchor="ctr"/>
+          <a:lstStyle/>
+          <a:p>
+            <a:pPr algn="ctr" indent="0" marL="0">
+              <a:buNone/>
+            </a:pPr>
+            <a:r>
+              <a:rPr lang="en-US" sz="1050" b="1" dirty="0">
+                <a:solidFill>
+                  <a:srgbClr val="FFFFFF"/>
+                </a:solidFill>
+                <a:latin typeface="Arial" pitchFamily="34" charset="0"/>
+                <a:ea typeface="Arial" pitchFamily="34" charset="-122"/>
+                <a:cs typeface="Arial" pitchFamily="34" charset="-120"/>
+              </a:rPr>
+              <a:t>4</a:t>
+            </a:r>
+            <a:endParaRPr lang="en-US" sz="1050" dirty="0"/>
+          </a:p>
+        </p:txBody>
+      </p:sp>
+      <p:sp>
+        <p:nvSpPr>
+          <p:cNvPr id="20" name="Text 17"/>
+          <p:cNvSpPr/>
+          <p:nvPr/>
+        </p:nvSpPr>
+        <p:spPr>
+          <a:xfrm>
+            <a:off x="7680960" y="4005072"/>
+            <a:ext cx="4114800" cy="384048"/>
+          </a:xfrm>
+          <a:prstGeom prst="rect">
+            <a:avLst/>
+          </a:prstGeom>
+          <a:noFill/>
+          <a:ln/>
+        </p:spPr>
+        <p:txBody>
+          <a:bodyPr wrap="square" rtlCol="0" anchor="t"/>
+          <a:lstStyle/>
+          <a:p>
+            <a:pPr indent="0" marL="0">
+              <a:buNone/>
+            </a:pPr>
+            <a:r>
+              <a:rPr lang="en-US" sz="1200" dirty="0">
+                <a:solidFill>
+                  <a:srgbClr val="1E293B"/>
+                </a:solidFill>
+                <a:latin typeface="Arial" pitchFamily="34" charset="0"/>
+                <a:ea typeface="Arial" pitchFamily="34" charset="-122"/>
+                <a:cs typeface="Arial" pitchFamily="34" charset="-120"/>
+              </a:rPr>
+              <a:t>Search tasks by name to find a specific one quickly</a:t>
+            </a:r>
+            <a:endParaRPr lang="en-US" sz="1200" dirty="0"/>
+          </a:p>
+        </p:txBody>
+      </p:sp>
+    </p:spTree>
+  </p:cSld>
+  <p:clrMapOvr>
+    <a:masterClrMapping/>
+  </p:clrMapOvr>
+</p:sld>
+</file>
+
+<file path=ppt/slides/slide15.xml><?xml version="1.0" encoding="utf-8"?>
+<p:sld xmlns:a="http://schemas.openxmlformats.org/drawingml/2006/main" xmlns:r="http://schemas.openxmlformats.org/officeDocument/2006/relationships" xmlns:p="http://schemas.openxmlformats.org/presentationml/2006/main">
+  <p:cSld name="Slide 15">
+    <p:bg>
+      <p:bgPr>
+        <a:solidFill>
+          <a:srgbClr val="F8FAFC"/>
+        </a:solidFill>
+      </p:bgPr>
+    </p:bg>
+    <p:spTree>
+      <p:nvGrpSpPr>
+        <p:cNvPr id="1" name=""/>
+        <p:cNvGrpSpPr/>
+        <p:nvPr/>
+      </p:nvGrpSpPr>
+      <p:grpSpPr>
+        <a:xfrm>
+          <a:off x="0" y="0"/>
+          <a:ext cx="0" cy="0"/>
+          <a:chOff x="0" y="0"/>
+          <a:chExt cx="0" cy="0"/>
+        </a:xfrm>
+      </p:grpSpPr>
+      <p:sp>
+        <p:nvSpPr>
+          <p:cNvPr id="2" name="Shape 0"/>
+          <p:cNvSpPr/>
+          <p:nvPr/>
+        </p:nvSpPr>
+        <p:spPr>
+          <a:xfrm>
+            <a:off x="0" y="0"/>
+            <a:ext cx="12191695" cy="1005840"/>
+          </a:xfrm>
+          <a:prstGeom prst="rect">
+            <a:avLst/>
+          </a:prstGeom>
+          <a:solidFill>
+            <a:srgbClr val="003B71"/>
+          </a:solidFill>
+          <a:ln/>
+        </p:spPr>
+      </p:sp>
+      <p:sp>
+        <p:nvSpPr>
+          <p:cNvPr id="3" name="Text 1"/>
+          <p:cNvSpPr/>
+          <p:nvPr/>
+        </p:nvSpPr>
+        <p:spPr>
+          <a:xfrm>
+            <a:off x="457200" y="137160"/>
+            <a:ext cx="7315200" cy="274320"/>
+          </a:xfrm>
+          <a:prstGeom prst="rect">
+            <a:avLst/>
+          </a:prstGeom>
+          <a:noFill/>
+          <a:ln/>
+        </p:spPr>
+        <p:txBody>
+          <a:bodyPr wrap="square" rtlCol="0" anchor="ctr"/>
+          <a:lstStyle/>
+          <a:p>
+            <a:pPr indent="0" marL="0">
+              <a:buNone/>
+            </a:pPr>
+            <a:r>
+              <a:rPr lang="en-US" sz="1200" b="1" spc="100" kern="0" dirty="0">
+                <a:solidFill>
+                  <a:srgbClr val="F97316"/>
+                </a:solidFill>
+                <a:latin typeface="Arial" pitchFamily="34" charset="0"/>
+                <a:ea typeface="Arial" pitchFamily="34" charset="-122"/>
+                <a:cs typeface="Arial" pitchFamily="34" charset="-120"/>
+              </a:rPr>
+              <a:t>STEP 11 · MANAGER REPORTING</a:t>
+            </a:r>
+            <a:endParaRPr lang="en-US" sz="1200" dirty="0"/>
+          </a:p>
+        </p:txBody>
+      </p:sp>
+      <p:sp>
+        <p:nvSpPr>
+          <p:cNvPr id="4" name="Text 2"/>
+          <p:cNvSpPr/>
+          <p:nvPr/>
+        </p:nvSpPr>
+        <p:spPr>
+          <a:xfrm>
+            <a:off x="457200" y="384048"/>
+            <a:ext cx="7315200" cy="548640"/>
+          </a:xfrm>
+          <a:prstGeom prst="rect">
+            <a:avLst/>
+          </a:prstGeom>
+          <a:noFill/>
+          <a:ln/>
+        </p:spPr>
+        <p:txBody>
+          <a:bodyPr wrap="square" rtlCol="0" anchor="ctr"/>
+          <a:lstStyle/>
+          <a:p>
+            <a:pPr indent="0" marL="0">
+              <a:buNone/>
+            </a:pPr>
+            <a:r>
+              <a:rPr lang="en-US" sz="2600" b="1" dirty="0">
+                <a:solidFill>
+                  <a:srgbClr val="FFFFFF"/>
+                </a:solidFill>
+                <a:latin typeface="Arial" pitchFamily="34" charset="0"/>
+                <a:ea typeface="Arial" pitchFamily="34" charset="-122"/>
+                <a:cs typeface="Arial" pitchFamily="34" charset="-120"/>
+              </a:rPr>
+              <a:t>Admin Leaderboard</a:t>
+            </a:r>
+            <a:endParaRPr lang="en-US" sz="2600" dirty="0"/>
+          </a:p>
+        </p:txBody>
+      </p:sp>
+      <p:pic>
+        <p:nvPicPr>
+          <p:cNvPr id="5" name="Image 0" descr="/home/runner/workspace/screenshots/stockfix_guide/09_admin_leaderboard.jpg">    </p:cNvPr>
+          <p:cNvPicPr>
+            <a:picLocks noChangeAspect="1"/>
+          </p:cNvPicPr>
+          <p:nvPr/>
+        </p:nvPicPr>
+        <p:blipFill>
+          <a:blip r:embed="rId1"/>
+          <a:srcRect l="0" r="0" t="0" b="0"/>
+          <a:stretch/>
+        </p:blipFill>
+        <p:spPr>
+          <a:xfrm>
+            <a:off x="457200" y="1280160"/>
+            <a:ext cx="6583680" cy="5120640"/>
+          </a:xfrm>
+          <a:prstGeom prst="rect">
+            <a:avLst/>
+          </a:prstGeom>
+        </p:spPr>
+      </p:pic>
+      <p:sp>
+        <p:nvSpPr>
+          <p:cNvPr id="6" name="Shape 3"/>
+          <p:cNvSpPr/>
+          <p:nvPr/>
+        </p:nvSpPr>
+        <p:spPr>
+          <a:xfrm>
+            <a:off x="457200" y="1280160"/>
+            <a:ext cx="6583680" cy="5120640"/>
+          </a:xfrm>
+          <a:prstGeom prst="rect">
+            <a:avLst/>
+          </a:prstGeom>
+          <a:ln w="12700">
+            <a:solidFill>
+              <a:srgbClr val="CBD5E1"/>
+            </a:solidFill>
+            <a:prstDash val="solid"/>
+          </a:ln>
+        </p:spPr>
+      </p:sp>
+      <p:sp>
+        <p:nvSpPr>
+          <p:cNvPr id="7" name="Text 4"/>
+          <p:cNvSpPr/>
+          <p:nvPr/>
+        </p:nvSpPr>
+        <p:spPr>
+          <a:xfrm>
+            <a:off x="7315200" y="1371600"/>
+            <a:ext cx="4480560" cy="822960"/>
+          </a:xfrm>
+          <a:prstGeom prst="rect">
+            <a:avLst/>
+          </a:prstGeom>
+          <a:noFill/>
+          <a:ln/>
+        </p:spPr>
+        <p:txBody>
+          <a:bodyPr wrap="square" rtlCol="0" anchor="t"/>
+          <a:lstStyle/>
+          <a:p>
+            <a:pPr indent="0" marL="0">
+              <a:buNone/>
+            </a:pPr>
+            <a:r>
+              <a:rPr lang="en-US" sz="1350" dirty="0">
+                <a:solidFill>
+                  <a:srgbClr val="1E293B"/>
+                </a:solidFill>
+                <a:latin typeface="Arial" pitchFamily="34" charset="0"/>
+                <a:ea typeface="Arial" pitchFamily="34" charset="-122"/>
+                <a:cs typeface="Arial" pitchFamily="34" charset="-120"/>
+              </a:rPr>
+              <a:t>A live performance leaderboard for managers: top regions, top managers, top reps, completion by action type, badges, and streaks — filterable by client and time period.</a:t>
+            </a:r>
+            <a:endParaRPr lang="en-US" sz="1350" dirty="0"/>
+          </a:p>
+        </p:txBody>
+      </p:sp>
+      <p:sp>
+        <p:nvSpPr>
+          <p:cNvPr id="8" name="Text 5"/>
+          <p:cNvSpPr/>
+          <p:nvPr/>
+        </p:nvSpPr>
+        <p:spPr>
+          <a:xfrm>
+            <a:off x="7315200" y="2331720"/>
+            <a:ext cx="4480560" cy="256032"/>
+          </a:xfrm>
+          <a:prstGeom prst="rect">
+            <a:avLst/>
+          </a:prstGeom>
+          <a:noFill/>
+          <a:ln/>
+        </p:spPr>
+        <p:txBody>
+          <a:bodyPr wrap="square" rtlCol="0" anchor="ctr"/>
+          <a:lstStyle/>
+          <a:p>
+            <a:pPr indent="0" marL="0">
+              <a:buNone/>
+            </a:pPr>
+            <a:r>
+              <a:rPr lang="en-US" sz="1100" b="1" spc="100" kern="0" dirty="0">
+                <a:solidFill>
+                  <a:srgbClr val="64748B"/>
+                </a:solidFill>
+                <a:latin typeface="Arial" pitchFamily="34" charset="0"/>
+                <a:ea typeface="Arial" pitchFamily="34" charset="-122"/>
+                <a:cs typeface="Arial" pitchFamily="34" charset="-120"/>
+              </a:rPr>
+              <a:t>HOW TO GET HERE</a:t>
+            </a:r>
+            <a:endParaRPr lang="en-US" sz="1100" dirty="0"/>
+          </a:p>
+        </p:txBody>
+      </p:sp>
+      <p:sp>
+        <p:nvSpPr>
+          <p:cNvPr id="9" name="Shape 6"/>
+          <p:cNvSpPr/>
+          <p:nvPr/>
+        </p:nvSpPr>
+        <p:spPr>
+          <a:xfrm>
+            <a:off x="7315200" y="2670048"/>
+            <a:ext cx="237744" cy="237744"/>
+          </a:xfrm>
+          <a:prstGeom prst="ellipse">
+            <a:avLst/>
+          </a:prstGeom>
+          <a:solidFill>
+            <a:srgbClr val="F97316"/>
+          </a:solidFill>
+          <a:ln/>
+        </p:spPr>
+      </p:sp>
+      <p:sp>
+        <p:nvSpPr>
+          <p:cNvPr id="10" name="Text 7"/>
+          <p:cNvSpPr/>
+          <p:nvPr/>
+        </p:nvSpPr>
+        <p:spPr>
+          <a:xfrm>
+            <a:off x="7315200" y="2670048"/>
+            <a:ext cx="237744" cy="237744"/>
+          </a:xfrm>
+          <a:prstGeom prst="rect">
+            <a:avLst/>
+          </a:prstGeom>
+          <a:noFill/>
+          <a:ln/>
+        </p:spPr>
+        <p:txBody>
+          <a:bodyPr wrap="square" rtlCol="0" anchor="ctr"/>
+          <a:lstStyle/>
+          <a:p>
+            <a:pPr algn="ctr" indent="0" marL="0">
+              <a:buNone/>
+            </a:pPr>
+            <a:r>
+              <a:rPr lang="en-US" sz="1050" b="1" dirty="0">
+                <a:solidFill>
+                  <a:srgbClr val="FFFFFF"/>
+                </a:solidFill>
+                <a:latin typeface="Arial" pitchFamily="34" charset="0"/>
+                <a:ea typeface="Arial" pitchFamily="34" charset="-122"/>
+                <a:cs typeface="Arial" pitchFamily="34" charset="-120"/>
+              </a:rPr>
+              <a:t>1</a:t>
+            </a:r>
+            <a:endParaRPr lang="en-US" sz="1050" dirty="0"/>
+          </a:p>
+        </p:txBody>
+      </p:sp>
+      <p:sp>
+        <p:nvSpPr>
+          <p:cNvPr id="11" name="Text 8"/>
+          <p:cNvSpPr/>
+          <p:nvPr/>
+        </p:nvSpPr>
+        <p:spPr>
+          <a:xfrm>
+            <a:off x="7680960" y="2633472"/>
+            <a:ext cx="4114800" cy="384048"/>
+          </a:xfrm>
+          <a:prstGeom prst="rect">
+            <a:avLst/>
+          </a:prstGeom>
+          <a:noFill/>
+          <a:ln/>
+        </p:spPr>
+        <p:txBody>
+          <a:bodyPr wrap="square" rtlCol="0" anchor="t"/>
+          <a:lstStyle/>
+          <a:p>
+            <a:pPr indent="0" marL="0">
+              <a:buNone/>
+            </a:pPr>
+            <a:r>
+              <a:rPr lang="en-US" sz="1200" dirty="0">
+                <a:solidFill>
+                  <a:srgbClr val="1E293B"/>
+                </a:solidFill>
+                <a:latin typeface="Arial" pitchFamily="34" charset="0"/>
+                <a:ea typeface="Arial" pitchFamily="34" charset="-122"/>
+                <a:cs typeface="Arial" pitchFamily="34" charset="-120"/>
+              </a:rPr>
+              <a:t>Log in as a Manager, then open "Leaderboard"</a:t>
+            </a:r>
+            <a:endParaRPr lang="en-US" sz="1200" dirty="0"/>
+          </a:p>
+        </p:txBody>
+      </p:sp>
+      <p:sp>
+        <p:nvSpPr>
+          <p:cNvPr id="12" name="Shape 9"/>
+          <p:cNvSpPr/>
+          <p:nvPr/>
+        </p:nvSpPr>
+        <p:spPr>
+          <a:xfrm>
+            <a:off x="7315200" y="3127248"/>
+            <a:ext cx="237744" cy="237744"/>
+          </a:xfrm>
+          <a:prstGeom prst="ellipse">
+            <a:avLst/>
+          </a:prstGeom>
+          <a:solidFill>
+            <a:srgbClr val="F97316"/>
+          </a:solidFill>
+          <a:ln/>
+        </p:spPr>
+      </p:sp>
+      <p:sp>
+        <p:nvSpPr>
+          <p:cNvPr id="13" name="Text 10"/>
+          <p:cNvSpPr/>
+          <p:nvPr/>
+        </p:nvSpPr>
+        <p:spPr>
+          <a:xfrm>
+            <a:off x="7315200" y="3127248"/>
+            <a:ext cx="237744" cy="237744"/>
+          </a:xfrm>
+          <a:prstGeom prst="rect">
+            <a:avLst/>
+          </a:prstGeom>
+          <a:noFill/>
+          <a:ln/>
+        </p:spPr>
+        <p:txBody>
+          <a:bodyPr wrap="square" rtlCol="0" anchor="ctr"/>
+          <a:lstStyle/>
+          <a:p>
+            <a:pPr algn="ctr" indent="0" marL="0">
+              <a:buNone/>
+            </a:pPr>
+            <a:r>
+              <a:rPr lang="en-US" sz="1050" b="1" dirty="0">
+                <a:solidFill>
+                  <a:srgbClr val="FFFFFF"/>
+                </a:solidFill>
+                <a:latin typeface="Arial" pitchFamily="34" charset="0"/>
+                <a:ea typeface="Arial" pitchFamily="34" charset="-122"/>
+                <a:cs typeface="Arial" pitchFamily="34" charset="-120"/>
+              </a:rPr>
+              <a:t>2</a:t>
+            </a:r>
+            <a:endParaRPr lang="en-US" sz="1050" dirty="0"/>
+          </a:p>
+        </p:txBody>
+      </p:sp>
+      <p:sp>
+        <p:nvSpPr>
+          <p:cNvPr id="14" name="Text 11"/>
+          <p:cNvSpPr/>
+          <p:nvPr/>
+        </p:nvSpPr>
+        <p:spPr>
+          <a:xfrm>
+            <a:off x="7680960" y="3090672"/>
+            <a:ext cx="4114800" cy="384048"/>
+          </a:xfrm>
+          <a:prstGeom prst="rect">
+            <a:avLst/>
+          </a:prstGeom>
+          <a:noFill/>
+          <a:ln/>
+        </p:spPr>
+        <p:txBody>
+          <a:bodyPr wrap="square" rtlCol="0" anchor="t"/>
+          <a:lstStyle/>
+          <a:p>
+            <a:pPr indent="0" marL="0">
+              <a:buNone/>
+            </a:pPr>
+            <a:r>
+              <a:rPr lang="en-US" sz="1200" dirty="0">
+                <a:solidFill>
+                  <a:srgbClr val="1E293B"/>
+                </a:solidFill>
+                <a:latin typeface="Arial" pitchFamily="34" charset="0"/>
+                <a:ea typeface="Arial" pitchFamily="34" charset="-122"/>
+                <a:cs typeface="Arial" pitchFamily="34" charset="-120"/>
+              </a:rPr>
+              <a:t>Filter by Client and time period</a:t>
+            </a:r>
+            <a:endParaRPr lang="en-US" sz="1200" dirty="0"/>
+          </a:p>
+        </p:txBody>
+      </p:sp>
+      <p:sp>
+        <p:nvSpPr>
+          <p:cNvPr id="15" name="Shape 12"/>
+          <p:cNvSpPr/>
+          <p:nvPr/>
+        </p:nvSpPr>
+        <p:spPr>
+          <a:xfrm>
+            <a:off x="7315200" y="3584448"/>
+            <a:ext cx="237744" cy="237744"/>
+          </a:xfrm>
+          <a:prstGeom prst="ellipse">
+            <a:avLst/>
+          </a:prstGeom>
+          <a:solidFill>
+            <a:srgbClr val="F97316"/>
+          </a:solidFill>
+          <a:ln/>
+        </p:spPr>
+      </p:sp>
+      <p:sp>
+        <p:nvSpPr>
+          <p:cNvPr id="16" name="Text 13"/>
+          <p:cNvSpPr/>
+          <p:nvPr/>
+        </p:nvSpPr>
+        <p:spPr>
+          <a:xfrm>
+            <a:off x="7315200" y="3584448"/>
+            <a:ext cx="237744" cy="237744"/>
+          </a:xfrm>
+          <a:prstGeom prst="rect">
+            <a:avLst/>
+          </a:prstGeom>
+          <a:noFill/>
+          <a:ln/>
+        </p:spPr>
+        <p:txBody>
+          <a:bodyPr wrap="square" rtlCol="0" anchor="ctr"/>
+          <a:lstStyle/>
+          <a:p>
+            <a:pPr algn="ctr" indent="0" marL="0">
+              <a:buNone/>
+            </a:pPr>
+            <a:r>
+              <a:rPr lang="en-US" sz="1050" b="1" dirty="0">
+                <a:solidFill>
+                  <a:srgbClr val="FFFFFF"/>
+                </a:solidFill>
+                <a:latin typeface="Arial" pitchFamily="34" charset="0"/>
+                <a:ea typeface="Arial" pitchFamily="34" charset="-122"/>
+                <a:cs typeface="Arial" pitchFamily="34" charset="-120"/>
+              </a:rPr>
+              <a:t>3</a:t>
+            </a:r>
+            <a:endParaRPr lang="en-US" sz="1050" dirty="0"/>
+          </a:p>
+        </p:txBody>
+      </p:sp>
+      <p:sp>
+        <p:nvSpPr>
+          <p:cNvPr id="17" name="Text 14"/>
+          <p:cNvSpPr/>
+          <p:nvPr/>
+        </p:nvSpPr>
+        <p:spPr>
+          <a:xfrm>
+            <a:off x="7680960" y="3547872"/>
+            <a:ext cx="4114800" cy="384048"/>
+          </a:xfrm>
+          <a:prstGeom prst="rect">
+            <a:avLst/>
+          </a:prstGeom>
+          <a:noFill/>
+          <a:ln/>
+        </p:spPr>
+        <p:txBody>
+          <a:bodyPr wrap="square" rtlCol="0" anchor="t"/>
+          <a:lstStyle/>
+          <a:p>
+            <a:pPr indent="0" marL="0">
+              <a:buNone/>
+            </a:pPr>
+            <a:r>
+              <a:rPr lang="en-US" sz="1200" dirty="0">
+                <a:solidFill>
+                  <a:srgbClr val="1E293B"/>
+                </a:solidFill>
+                <a:latin typeface="Arial" pitchFamily="34" charset="0"/>
+                <a:ea typeface="Arial" pitchFamily="34" charset="-122"/>
+                <a:cs typeface="Arial" pitchFamily="34" charset="-120"/>
+              </a:rPr>
+              <a:t>Review Top Reps, Top Managers, and Top Regions</a:t>
+            </a:r>
+            <a:endParaRPr lang="en-US" sz="1200" dirty="0"/>
+          </a:p>
+        </p:txBody>
+      </p:sp>
+      <p:sp>
+        <p:nvSpPr>
+          <p:cNvPr id="18" name="Shape 15"/>
+          <p:cNvSpPr/>
+          <p:nvPr/>
+        </p:nvSpPr>
+        <p:spPr>
+          <a:xfrm>
+            <a:off x="7315200" y="4041648"/>
+            <a:ext cx="237744" cy="237744"/>
+          </a:xfrm>
+          <a:prstGeom prst="ellipse">
+            <a:avLst/>
+          </a:prstGeom>
+          <a:solidFill>
+            <a:srgbClr val="F97316"/>
+          </a:solidFill>
+          <a:ln/>
+        </p:spPr>
+      </p:sp>
+      <p:sp>
+        <p:nvSpPr>
+          <p:cNvPr id="19" name="Text 16"/>
+          <p:cNvSpPr/>
+          <p:nvPr/>
+        </p:nvSpPr>
+        <p:spPr>
+          <a:xfrm>
+            <a:off x="7315200" y="4041648"/>
+            <a:ext cx="237744" cy="237744"/>
+          </a:xfrm>
+          <a:prstGeom prst="rect">
+            <a:avLst/>
+          </a:prstGeom>
+          <a:noFill/>
+          <a:ln/>
+        </p:spPr>
+        <p:txBody>
+          <a:bodyPr wrap="square" rtlCol="0" anchor="ctr"/>
+          <a:lstStyle/>
+          <a:p>
+            <a:pPr algn="ctr" indent="0" marL="0">
+              <a:buNone/>
+            </a:pPr>
+            <a:r>
+              <a:rPr lang="en-US" sz="1050" b="1" dirty="0">
+                <a:solidFill>
+                  <a:srgbClr val="FFFFFF"/>
+                </a:solidFill>
+                <a:latin typeface="Arial" pitchFamily="34" charset="0"/>
+                <a:ea typeface="Arial" pitchFamily="34" charset="-122"/>
+                <a:cs typeface="Arial" pitchFamily="34" charset="-120"/>
+              </a:rPr>
+              <a:t>4</a:t>
+            </a:r>
+            <a:endParaRPr lang="en-US" sz="1050" dirty="0"/>
+          </a:p>
+        </p:txBody>
+      </p:sp>
+      <p:sp>
+        <p:nvSpPr>
+          <p:cNvPr id="20" name="Text 17"/>
+          <p:cNvSpPr/>
+          <p:nvPr/>
+        </p:nvSpPr>
+        <p:spPr>
+          <a:xfrm>
+            <a:off x="7680960" y="4005072"/>
+            <a:ext cx="4114800" cy="384048"/>
+          </a:xfrm>
+          <a:prstGeom prst="rect">
+            <a:avLst/>
+          </a:prstGeom>
+          <a:noFill/>
+          <a:ln/>
+        </p:spPr>
+        <p:txBody>
+          <a:bodyPr wrap="square" rtlCol="0" anchor="t"/>
+          <a:lstStyle/>
+          <a:p>
+            <a:pPr indent="0" marL="0">
+              <a:buNone/>
+            </a:pPr>
+            <a:r>
+              <a:rPr lang="en-US" sz="1200" dirty="0">
+                <a:solidFill>
+                  <a:srgbClr val="1E293B"/>
+                </a:solidFill>
+                <a:latin typeface="Arial" pitchFamily="34" charset="0"/>
+                <a:ea typeface="Arial" pitchFamily="34" charset="-122"/>
+                <a:cs typeface="Arial" pitchFamily="34" charset="-120"/>
+              </a:rPr>
+              <a:t>Check Rep Badges and Top Streaks for recognition</a:t>
+            </a:r>
+            <a:endParaRPr lang="en-US" sz="1200" dirty="0"/>
+          </a:p>
+        </p:txBody>
+      </p:sp>
+      <p:sp>
+        <p:nvSpPr>
+          <p:cNvPr id="21" name="Text 18"/>
+          <p:cNvSpPr/>
+          <p:nvPr/>
+        </p:nvSpPr>
+        <p:spPr>
+          <a:xfrm>
+            <a:off x="7315200" y="4599432"/>
+            <a:ext cx="4480560" cy="256032"/>
+          </a:xfrm>
+          <a:prstGeom prst="rect">
+            <a:avLst/>
+          </a:prstGeom>
+          <a:noFill/>
+          <a:ln/>
+        </p:spPr>
+        <p:txBody>
+          <a:bodyPr wrap="square" rtlCol="0" anchor="ctr"/>
+          <a:lstStyle/>
+          <a:p>
+            <a:pPr indent="0" marL="0">
+              <a:buNone/>
+            </a:pPr>
+            <a:r>
+              <a:rPr lang="en-US" sz="1100" b="1" spc="100" kern="0" dirty="0">
+                <a:solidFill>
+                  <a:srgbClr val="64748B"/>
+                </a:solidFill>
+                <a:latin typeface="Arial" pitchFamily="34" charset="0"/>
+                <a:ea typeface="Arial" pitchFamily="34" charset="-122"/>
+                <a:cs typeface="Arial" pitchFamily="34" charset="-120"/>
+              </a:rPr>
+              <a:t>DROPDOWNS / FILTERS ON THIS SCREEN</a:t>
+            </a:r>
+            <a:endParaRPr lang="en-US" sz="1100" dirty="0"/>
+          </a:p>
+        </p:txBody>
+      </p:sp>
+      <p:sp>
+        <p:nvSpPr>
+          <p:cNvPr id="22" name="Shape 19"/>
+          <p:cNvSpPr/>
+          <p:nvPr/>
+        </p:nvSpPr>
+        <p:spPr>
+          <a:xfrm>
+            <a:off x="7315200" y="4937760"/>
+            <a:ext cx="82296" cy="82296"/>
+          </a:xfrm>
+          <a:prstGeom prst="rect">
+            <a:avLst/>
+          </a:prstGeom>
+          <a:solidFill>
+            <a:srgbClr val="003B71"/>
+          </a:solidFill>
+          <a:ln/>
+        </p:spPr>
+      </p:sp>
+      <p:sp>
+        <p:nvSpPr>
+          <p:cNvPr id="23" name="Text 20"/>
+          <p:cNvSpPr/>
+          <p:nvPr/>
+        </p:nvSpPr>
+        <p:spPr>
+          <a:xfrm>
+            <a:off x="7516368" y="4855464"/>
+            <a:ext cx="4297680" cy="365760"/>
+          </a:xfrm>
+          <a:prstGeom prst="rect">
+            <a:avLst/>
+          </a:prstGeom>
+          <a:noFill/>
+          <a:ln/>
+        </p:spPr>
+        <p:txBody>
+          <a:bodyPr wrap="square" rtlCol="0" anchor="t"/>
+          <a:lstStyle/>
+          <a:p>
+            <a:pPr indent="0" marL="0">
+              <a:buNone/>
+            </a:pPr>
+            <a:r>
+              <a:rPr lang="en-US" sz="1150" b="1" dirty="0">
+                <a:solidFill>
+                  <a:srgbClr val="003B71"/>
+                </a:solidFill>
+                <a:latin typeface="Arial" pitchFamily="34" charset="0"/>
+                <a:ea typeface="Arial" pitchFamily="34" charset="-122"/>
+                <a:cs typeface="Arial" pitchFamily="34" charset="-120"/>
+              </a:rPr>
+              <a:t>All Clients: </a:t>
+            </a:r>
+            <a:pPr indent="0" marL="0">
+              <a:buNone/>
+            </a:pPr>
+            <a:r>
+              <a:rPr lang="en-US" sz="1150" dirty="0">
+                <a:solidFill>
+                  <a:srgbClr val="1E293B"/>
+                </a:solidFill>
+                <a:latin typeface="Arial" pitchFamily="34" charset="0"/>
+                <a:ea typeface="Arial" pitchFamily="34" charset="-122"/>
+                <a:cs typeface="Arial" pitchFamily="34" charset="-120"/>
+              </a:rPr>
+              <a:t>Filter the whole leaderboard by client</a:t>
+            </a:r>
+            <a:endParaRPr lang="en-US" sz="1150" dirty="0"/>
+          </a:p>
+        </p:txBody>
+      </p:sp>
+      <p:sp>
+        <p:nvSpPr>
+          <p:cNvPr id="24" name="Shape 21"/>
+          <p:cNvSpPr/>
+          <p:nvPr/>
+        </p:nvSpPr>
+        <p:spPr>
+          <a:xfrm>
+            <a:off x="7315200" y="5321808"/>
+            <a:ext cx="82296" cy="82296"/>
+          </a:xfrm>
+          <a:prstGeom prst="rect">
+            <a:avLst/>
+          </a:prstGeom>
+          <a:solidFill>
+            <a:srgbClr val="003B71"/>
+          </a:solidFill>
+          <a:ln/>
+        </p:spPr>
+      </p:sp>
+      <p:sp>
+        <p:nvSpPr>
+          <p:cNvPr id="25" name="Text 22"/>
+          <p:cNvSpPr/>
+          <p:nvPr/>
+        </p:nvSpPr>
+        <p:spPr>
+          <a:xfrm>
+            <a:off x="7516368" y="5239512"/>
+            <a:ext cx="4297680" cy="365760"/>
+          </a:xfrm>
+          <a:prstGeom prst="rect">
+            <a:avLst/>
+          </a:prstGeom>
+          <a:noFill/>
+          <a:ln/>
+        </p:spPr>
+        <p:txBody>
+          <a:bodyPr wrap="square" rtlCol="0" anchor="t"/>
+          <a:lstStyle/>
+          <a:p>
+            <a:pPr indent="0" marL="0">
+              <a:buNone/>
+            </a:pPr>
+            <a:r>
+              <a:rPr lang="en-US" sz="1150" b="1" dirty="0">
+                <a:solidFill>
+                  <a:srgbClr val="003B71"/>
+                </a:solidFill>
+                <a:latin typeface="Arial" pitchFamily="34" charset="0"/>
+                <a:ea typeface="Arial" pitchFamily="34" charset="-122"/>
+                <a:cs typeface="Arial" pitchFamily="34" charset="-120"/>
+              </a:rPr>
+              <a:t>Past Week / etc.: </a:t>
+            </a:r>
+            <a:pPr indent="0" marL="0">
+              <a:buNone/>
+            </a:pPr>
+            <a:r>
+              <a:rPr lang="en-US" sz="1150" dirty="0">
+                <a:solidFill>
+                  <a:srgbClr val="1E293B"/>
+                </a:solidFill>
+                <a:latin typeface="Arial" pitchFamily="34" charset="0"/>
+                <a:ea typeface="Arial" pitchFamily="34" charset="-122"/>
+                <a:cs typeface="Arial" pitchFamily="34" charset="-120"/>
+              </a:rPr>
+              <a:t>Choose the reporting time window</a:t>
+            </a:r>
+            <a:endParaRPr lang="en-US" sz="1150" dirty="0"/>
+          </a:p>
+        </p:txBody>
+      </p:sp>
+    </p:spTree>
+  </p:cSld>
+  <p:clrMapOvr>
+    <a:masterClrMapping/>
+  </p:clrMapOvr>
+</p:sld>
+</file>
+
+<file path=ppt/slides/slide16.xml><?xml version="1.0" encoding="utf-8"?>
+<p:sld xmlns:a="http://schemas.openxmlformats.org/drawingml/2006/main" xmlns:r="http://schemas.openxmlformats.org/officeDocument/2006/relationships" xmlns:p="http://schemas.openxmlformats.org/presentationml/2006/main">
+  <p:cSld name="Slide 16">
+    <p:bg>
+      <p:bgPr>
+        <a:solidFill>
+          <a:srgbClr val="F8FAFC"/>
+        </a:solidFill>
+      </p:bgPr>
+    </p:bg>
+    <p:spTree>
+      <p:nvGrpSpPr>
+        <p:cNvPr id="1" name=""/>
+        <p:cNvGrpSpPr/>
+        <p:nvPr/>
+      </p:nvGrpSpPr>
+      <p:grpSpPr>
+        <a:xfrm>
+          <a:off x="0" y="0"/>
+          <a:ext cx="0" cy="0"/>
+          <a:chOff x="0" y="0"/>
+          <a:chExt cx="0" cy="0"/>
+        </a:xfrm>
+      </p:grpSpPr>
+      <p:sp>
+        <p:nvSpPr>
+          <p:cNvPr id="2" name="Shape 0"/>
+          <p:cNvSpPr/>
+          <p:nvPr/>
+        </p:nvSpPr>
+        <p:spPr>
+          <a:xfrm>
+            <a:off x="0" y="0"/>
+            <a:ext cx="12191695" cy="1005840"/>
+          </a:xfrm>
+          <a:prstGeom prst="rect">
+            <a:avLst/>
+          </a:prstGeom>
+          <a:solidFill>
+            <a:srgbClr val="003B71"/>
+          </a:solidFill>
+          <a:ln/>
+        </p:spPr>
+      </p:sp>
+      <p:sp>
+        <p:nvSpPr>
+          <p:cNvPr id="3" name="Text 1"/>
+          <p:cNvSpPr/>
+          <p:nvPr/>
+        </p:nvSpPr>
+        <p:spPr>
+          <a:xfrm>
+            <a:off x="457200" y="137160"/>
+            <a:ext cx="7315200" cy="274320"/>
+          </a:xfrm>
+          <a:prstGeom prst="rect">
+            <a:avLst/>
+          </a:prstGeom>
+          <a:noFill/>
+          <a:ln/>
+        </p:spPr>
+        <p:txBody>
+          <a:bodyPr wrap="square" rtlCol="0" anchor="ctr"/>
+          <a:lstStyle/>
+          <a:p>
+            <a:pPr indent="0" marL="0">
+              <a:buNone/>
+            </a:pPr>
+            <a:r>
+              <a:rPr lang="en-US" sz="1200" b="1" spc="100" kern="0" dirty="0">
+                <a:solidFill>
+                  <a:srgbClr val="F97316"/>
+                </a:solidFill>
+                <a:latin typeface="Arial" pitchFamily="34" charset="0"/>
+                <a:ea typeface="Arial" pitchFamily="34" charset="-122"/>
+                <a:cs typeface="Arial" pitchFamily="34" charset="-120"/>
+              </a:rPr>
               <a:t>BONUS · EXECUTIVE VIEW</a:t>
             </a:r>
             <a:endParaRPr lang="en-US" sz="1200" dirty="0"/>
@@ -2770,7 +7034,7 @@
         <p:spPr>
           <a:xfrm>
             <a:off x="7315200" y="1371600"/>
-            <a:ext cx="4480560" cy="1005840"/>
+            <a:ext cx="4480560" cy="822960"/>
           </a:xfrm>
           <a:prstGeom prst="rect">
             <a:avLst/>
@@ -2786,7 +7050,7 @@
               <a:buNone/>
             </a:pPr>
             <a:r>
-              <a:rPr lang="en-US" sz="1400" dirty="0">
+              <a:rPr lang="en-US" sz="1350" dirty="0">
                 <a:solidFill>
                   <a:srgbClr val="1E293B"/>
                 </a:solidFill>
@@ -2796,7 +7060,7 @@
               </a:rPr>
               <a:t>A branded, dark-themed executive dashboard tracking the Shoprite &amp; Checkers merchandiser pilot: capture rate, coverage, and store performance across 1,023 field reps.</a:t>
             </a:r>
-            <a:endParaRPr lang="en-US" sz="1400" dirty="0"/>
+            <a:endParaRPr lang="en-US" sz="1350" dirty="0"/>
           </a:p>
         </p:txBody>
       </p:sp>
@@ -2808,8 +7072,8 @@
         </p:nvSpPr>
         <p:spPr>
           <a:xfrm>
-            <a:off x="7315200" y="2514600"/>
-            <a:ext cx="4480560" cy="274320"/>
+            <a:off x="7315200" y="2331720"/>
+            <a:ext cx="4480560" cy="256032"/>
           </a:xfrm>
           <a:prstGeom prst="rect">
             <a:avLst/>
@@ -2847,8 +7111,8 @@
         </p:nvSpPr>
         <p:spPr>
           <a:xfrm>
-            <a:off x="7315200" y="2898648"/>
-            <a:ext cx="256032" cy="256032"/>
+            <a:off x="7315200" y="2670048"/>
+            <a:ext cx="237744" cy="237744"/>
           </a:xfrm>
           <a:prstGeom prst="ellipse">
             <a:avLst/>
@@ -2867,8 +7131,8 @@
         </p:nvSpPr>
         <p:spPr>
           <a:xfrm>
-            <a:off x="7315200" y="2898648"/>
-            <a:ext cx="256032" cy="256032"/>
+            <a:off x="7315200" y="2670048"/>
+            <a:ext cx="237744" cy="237744"/>
           </a:xfrm>
           <a:prstGeom prst="rect">
             <a:avLst/>
@@ -2884,7 +7148,7 @@
               <a:buNone/>
             </a:pPr>
             <a:r>
-              <a:rPr lang="en-US" sz="1100" b="1" dirty="0">
+              <a:rPr lang="en-US" sz="1050" b="1" dirty="0">
                 <a:solidFill>
                   <a:srgbClr val="FFFFFF"/>
                 </a:solidFill>
@@ -2894,7 +7158,7 @@
               </a:rPr>
               <a:t>1</a:t>
             </a:r>
-            <a:endParaRPr lang="en-US" sz="1100" dirty="0"/>
+            <a:endParaRPr lang="en-US" sz="1050" dirty="0"/>
           </a:p>
         </p:txBody>
       </p:sp>
@@ -2906,8 +7170,8 @@
         </p:nvSpPr>
         <p:spPr>
           <a:xfrm>
-            <a:off x="7699248" y="2880360"/>
-            <a:ext cx="4114800" cy="457200"/>
+            <a:off x="7680960" y="2633472"/>
+            <a:ext cx="4114800" cy="384048"/>
           </a:xfrm>
           <a:prstGeom prst="rect">
             <a:avLst/>
@@ -2923,7 +7187,7 @@
               <a:buNone/>
             </a:pPr>
             <a:r>
-              <a:rPr lang="en-US" sz="1250" dirty="0">
+              <a:rPr lang="en-US" sz="1200" dirty="0">
                 <a:solidFill>
                   <a:srgbClr val="1E293B"/>
                 </a:solidFill>
@@ -2933,7 +7197,7 @@
               </a:rPr>
               <a:t>Navigate to the /merchandiser-pilot URL</a:t>
             </a:r>
-            <a:endParaRPr lang="en-US" sz="1250" dirty="0"/>
+            <a:endParaRPr lang="en-US" sz="1200" dirty="0"/>
           </a:p>
         </p:txBody>
       </p:sp>
@@ -2945,8 +7209,8 @@
         </p:nvSpPr>
         <p:spPr>
           <a:xfrm>
-            <a:off x="7315200" y="3465576"/>
-            <a:ext cx="256032" cy="256032"/>
+            <a:off x="7315200" y="3127248"/>
+            <a:ext cx="237744" cy="237744"/>
           </a:xfrm>
           <a:prstGeom prst="ellipse">
             <a:avLst/>
@@ -2965,8 +7229,8 @@
         </p:nvSpPr>
         <p:spPr>
           <a:xfrm>
-            <a:off x="7315200" y="3465576"/>
-            <a:ext cx="256032" cy="256032"/>
+            <a:off x="7315200" y="3127248"/>
+            <a:ext cx="237744" cy="237744"/>
           </a:xfrm>
           <a:prstGeom prst="rect">
             <a:avLst/>
@@ -2982,7 +7246,7 @@
               <a:buNone/>
             </a:pPr>
             <a:r>
-              <a:rPr lang="en-US" sz="1100" b="1" dirty="0">
+              <a:rPr lang="en-US" sz="1050" b="1" dirty="0">
                 <a:solidFill>
                   <a:srgbClr val="FFFFFF"/>
                 </a:solidFill>
@@ -2992,7 +7256,7 @@
               </a:rPr>
               <a:t>2</a:t>
             </a:r>
-            <a:endParaRPr lang="en-US" sz="1100" dirty="0"/>
+            <a:endParaRPr lang="en-US" sz="1050" dirty="0"/>
           </a:p>
         </p:txBody>
       </p:sp>
@@ -3004,8 +7268,8 @@
         </p:nvSpPr>
         <p:spPr>
           <a:xfrm>
-            <a:off x="7699248" y="3447288"/>
-            <a:ext cx="4114800" cy="457200"/>
+            <a:off x="7680960" y="3090672"/>
+            <a:ext cx="4114800" cy="384048"/>
           </a:xfrm>
           <a:prstGeom prst="rect">
             <a:avLst/>
@@ -3021,7 +7285,7 @@
               <a:buNone/>
             </a:pPr>
             <a:r>
-              <a:rPr lang="en-US" sz="1250" dirty="0">
+              <a:rPr lang="en-US" sz="1200" dirty="0">
                 <a:solidFill>
                   <a:srgbClr val="1E293B"/>
                 </a:solidFill>
@@ -3029,9 +7293,9 @@
                 <a:ea typeface="Arial" pitchFamily="34" charset="-122"/>
                 <a:cs typeface="Arial" pitchFamily="34" charset="-120"/>
               </a:rPr>
-              <a:t>Filter by Line Manager, Region, Store, Banner, Merchandiser, or Week</a:t>
-            </a:r>
-            <a:endParaRPr lang="en-US" sz="1250" dirty="0"/>
+              <a:t>Use the filter bar to narrow by manager, region, store, banner, merchandiser or week</a:t>
+            </a:r>
+            <a:endParaRPr lang="en-US" sz="1200" dirty="0"/>
           </a:p>
         </p:txBody>
       </p:sp>
@@ -3043,8 +7307,8 @@
         </p:nvSpPr>
         <p:spPr>
           <a:xfrm>
-            <a:off x="7315200" y="4032504"/>
-            <a:ext cx="256032" cy="256032"/>
+            <a:off x="7315200" y="3584448"/>
+            <a:ext cx="237744" cy="237744"/>
           </a:xfrm>
           <a:prstGeom prst="ellipse">
             <a:avLst/>
@@ -3063,8 +7327,8 @@
         </p:nvSpPr>
         <p:spPr>
           <a:xfrm>
-            <a:off x="7315200" y="4032504"/>
-            <a:ext cx="256032" cy="256032"/>
+            <a:off x="7315200" y="3584448"/>
+            <a:ext cx="237744" cy="237744"/>
           </a:xfrm>
           <a:prstGeom prst="rect">
             <a:avLst/>
@@ -3080,7 +7344,7 @@
               <a:buNone/>
             </a:pPr>
             <a:r>
-              <a:rPr lang="en-US" sz="1100" b="1" dirty="0">
+              <a:rPr lang="en-US" sz="1050" b="1" dirty="0">
                 <a:solidFill>
                   <a:srgbClr val="FFFFFF"/>
                 </a:solidFill>
@@ -3090,7 +7354,7 @@
               </a:rPr>
               <a:t>3</a:t>
             </a:r>
-            <a:endParaRPr lang="en-US" sz="1100" dirty="0"/>
+            <a:endParaRPr lang="en-US" sz="1050" dirty="0"/>
           </a:p>
         </p:txBody>
       </p:sp>
@@ -3102,8 +7366,8 @@
         </p:nvSpPr>
         <p:spPr>
           <a:xfrm>
-            <a:off x="7699248" y="4014216"/>
-            <a:ext cx="4114800" cy="457200"/>
+            <a:off x="7680960" y="3547872"/>
+            <a:ext cx="4114800" cy="384048"/>
           </a:xfrm>
           <a:prstGeom prst="rect">
             <a:avLst/>
@@ -3119,7 +7383,7 @@
               <a:buNone/>
             </a:pPr>
             <a:r>
-              <a:rPr lang="en-US" sz="1250" dirty="0">
+              <a:rPr lang="en-US" sz="1200" dirty="0">
                 <a:solidFill>
                   <a:srgbClr val="1E293B"/>
                 </a:solidFill>
@@ -3129,7 +7393,7 @@
               </a:rPr>
               <a:t>Review KPI cards: Active Merchandisers, Tasks Logged, Capture Rate</a:t>
             </a:r>
-            <a:endParaRPr lang="en-US" sz="1250" dirty="0"/>
+            <a:endParaRPr lang="en-US" sz="1200" dirty="0"/>
           </a:p>
         </p:txBody>
       </p:sp>
@@ -3141,8 +7405,8 @@
         </p:nvSpPr>
         <p:spPr>
           <a:xfrm>
-            <a:off x="7315200" y="4599432"/>
-            <a:ext cx="256032" cy="256032"/>
+            <a:off x="7315200" y="4041648"/>
+            <a:ext cx="237744" cy="237744"/>
           </a:xfrm>
           <a:prstGeom prst="ellipse">
             <a:avLst/>
@@ -3161,8 +7425,86 @@
         </p:nvSpPr>
         <p:spPr>
           <a:xfrm>
+            <a:off x="7315200" y="4041648"/>
+            <a:ext cx="237744" cy="237744"/>
+          </a:xfrm>
+          <a:prstGeom prst="rect">
+            <a:avLst/>
+          </a:prstGeom>
+          <a:noFill/>
+          <a:ln/>
+        </p:spPr>
+        <p:txBody>
+          <a:bodyPr wrap="square" rtlCol="0" anchor="ctr"/>
+          <a:lstStyle/>
+          <a:p>
+            <a:pPr algn="ctr" indent="0" marL="0">
+              <a:buNone/>
+            </a:pPr>
+            <a:r>
+              <a:rPr lang="en-US" sz="1050" b="1" dirty="0">
+                <a:solidFill>
+                  <a:srgbClr val="FFFFFF"/>
+                </a:solidFill>
+                <a:latin typeface="Arial" pitchFamily="34" charset="0"/>
+                <a:ea typeface="Arial" pitchFamily="34" charset="-122"/>
+                <a:cs typeface="Arial" pitchFamily="34" charset="-120"/>
+              </a:rPr>
+              <a:t>4</a:t>
+            </a:r>
+            <a:endParaRPr lang="en-US" sz="1050" dirty="0"/>
+          </a:p>
+        </p:txBody>
+      </p:sp>
+      <p:sp>
+        <p:nvSpPr>
+          <p:cNvPr id="20" name="Text 17"/>
+          <p:cNvSpPr/>
+          <p:nvPr/>
+        </p:nvSpPr>
+        <p:spPr>
+          <a:xfrm>
+            <a:off x="7680960" y="4005072"/>
+            <a:ext cx="4114800" cy="384048"/>
+          </a:xfrm>
+          <a:prstGeom prst="rect">
+            <a:avLst/>
+          </a:prstGeom>
+          <a:noFill/>
+          <a:ln/>
+        </p:spPr>
+        <p:txBody>
+          <a:bodyPr wrap="square" rtlCol="0" anchor="t"/>
+          <a:lstStyle/>
+          <a:p>
+            <a:pPr indent="0" marL="0">
+              <a:buNone/>
+            </a:pPr>
+            <a:r>
+              <a:rPr lang="en-US" sz="1200" dirty="0">
+                <a:solidFill>
+                  <a:srgbClr val="1E293B"/>
+                </a:solidFill>
+                <a:latin typeface="Arial" pitchFamily="34" charset="0"/>
+                <a:ea typeface="Arial" pitchFamily="34" charset="-122"/>
+                <a:cs typeface="Arial" pitchFamily="34" charset="-120"/>
+              </a:rPr>
+              <a:t>Scroll to Store Performance for detailed drill-down and CSV export</a:t>
+            </a:r>
+            <a:endParaRPr lang="en-US" sz="1200" dirty="0"/>
+          </a:p>
+        </p:txBody>
+      </p:sp>
+      <p:sp>
+        <p:nvSpPr>
+          <p:cNvPr id="21" name="Text 18"/>
+          <p:cNvSpPr/>
+          <p:nvPr/>
+        </p:nvSpPr>
+        <p:spPr>
+          <a:xfrm>
             <a:off x="7315200" y="4599432"/>
-            <a:ext cx="256032" cy="256032"/>
+            <a:ext cx="4480560" cy="256032"/>
           </a:xfrm>
           <a:prstGeom prst="rect">
             <a:avLst/>
@@ -3174,19 +7516,19 @@
           <a:bodyPr wrap="square" rtlCol="0" anchor="ctr"/>
           <a:lstStyle/>
           <a:p>
-            <a:pPr algn="ctr" indent="0" marL="0">
-              <a:buNone/>
-            </a:pPr>
-            <a:r>
-              <a:rPr lang="en-US" sz="1100" b="1" dirty="0">
-                <a:solidFill>
-                  <a:srgbClr val="FFFFFF"/>
-                </a:solidFill>
-                <a:latin typeface="Arial" pitchFamily="34" charset="0"/>
-                <a:ea typeface="Arial" pitchFamily="34" charset="-122"/>
-                <a:cs typeface="Arial" pitchFamily="34" charset="-120"/>
-              </a:rPr>
-              <a:t>4</a:t>
+            <a:pPr indent="0" marL="0">
+              <a:buNone/>
+            </a:pPr>
+            <a:r>
+              <a:rPr lang="en-US" sz="1100" b="1" spc="100" kern="0" dirty="0">
+                <a:solidFill>
+                  <a:srgbClr val="64748B"/>
+                </a:solidFill>
+                <a:latin typeface="Arial" pitchFamily="34" charset="0"/>
+                <a:ea typeface="Arial" pitchFamily="34" charset="-122"/>
+                <a:cs typeface="Arial" pitchFamily="34" charset="-120"/>
+              </a:rPr>
+              <a:t>DROPDOWNS / FILTERS ON THIS SCREEN</a:t>
             </a:r>
             <a:endParaRPr lang="en-US" sz="1100" dirty="0"/>
           </a:p>
@@ -3194,14 +7536,34 @@
       </p:sp>
       <p:sp>
         <p:nvSpPr>
-          <p:cNvPr id="20" name="Text 17"/>
-          <p:cNvSpPr/>
-          <p:nvPr/>
-        </p:nvSpPr>
-        <p:spPr>
-          <a:xfrm>
-            <a:off x="7699248" y="4581144"/>
-            <a:ext cx="4114800" cy="457200"/>
+          <p:cNvPr id="22" name="Shape 19"/>
+          <p:cNvSpPr/>
+          <p:nvPr/>
+        </p:nvSpPr>
+        <p:spPr>
+          <a:xfrm>
+            <a:off x="7315200" y="4937760"/>
+            <a:ext cx="82296" cy="82296"/>
+          </a:xfrm>
+          <a:prstGeom prst="rect">
+            <a:avLst/>
+          </a:prstGeom>
+          <a:solidFill>
+            <a:srgbClr val="003B71"/>
+          </a:solidFill>
+          <a:ln/>
+        </p:spPr>
+      </p:sp>
+      <p:sp>
+        <p:nvSpPr>
+          <p:cNvPr id="23" name="Text 20"/>
+          <p:cNvSpPr/>
+          <p:nvPr/>
+        </p:nvSpPr>
+        <p:spPr>
+          <a:xfrm>
+            <a:off x="7516368" y="4855464"/>
+            <a:ext cx="4297680" cy="365760"/>
           </a:xfrm>
           <a:prstGeom prst="rect">
             <a:avLst/>
@@ -3217,7 +7579,21 @@
               <a:buNone/>
             </a:pPr>
             <a:r>
-              <a:rPr lang="en-US" sz="1250" dirty="0">
+              <a:rPr lang="en-US" sz="1150" b="1" dirty="0">
+                <a:solidFill>
+                  <a:srgbClr val="003B71"/>
+                </a:solidFill>
+                <a:latin typeface="Arial" pitchFamily="34" charset="0"/>
+                <a:ea typeface="Arial" pitchFamily="34" charset="-122"/>
+                <a:cs typeface="Arial" pitchFamily="34" charset="-120"/>
+              </a:rPr>
+              <a:t>Line Manager / Region / Store / Banner / Merchandiser / Week: </a:t>
+            </a:r>
+            <a:pPr indent="0" marL="0">
+              <a:buNone/>
+            </a:pPr>
+            <a:r>
+              <a:rPr lang="en-US" sz="1150" dirty="0">
                 <a:solidFill>
                   <a:srgbClr val="1E293B"/>
                 </a:solidFill>
@@ -3225,9 +7601,9 @@
                 <a:ea typeface="Arial" pitchFamily="34" charset="-122"/>
                 <a:cs typeface="Arial" pitchFamily="34" charset="-120"/>
               </a:rPr>
-              <a:t>Scroll to Store Performance for detailed drill-down and CSV export</a:t>
-            </a:r>
-            <a:endParaRPr lang="en-US" sz="1250" dirty="0"/>
+              <a:t>Six independent filters across the top of the dashboard</a:t>
+            </a:r>
+            <a:endParaRPr lang="en-US" sz="1150" dirty="0"/>
           </a:p>
         </p:txBody>
       </p:sp>
@@ -3415,7 +7791,7 @@
         <p:spPr>
           <a:xfrm>
             <a:off x="7315200" y="1371600"/>
-            <a:ext cx="4480560" cy="1005840"/>
+            <a:ext cx="4480560" cy="822960"/>
           </a:xfrm>
           <a:prstGeom prst="rect">
             <a:avLst/>
@@ -3431,7 +7807,7 @@
               <a:buNone/>
             </a:pPr>
             <a:r>
-              <a:rPr lang="en-US" sz="1400" dirty="0">
+              <a:rPr lang="en-US" sz="1350" dirty="0">
                 <a:solidFill>
                   <a:srgbClr val="1E293B"/>
                 </a:solidFill>
@@ -3441,7 +7817,7 @@
               </a:rPr>
               <a:t>The landing screen for StockFix. Every user starts here and picks the role that matches how they'll use the app.</a:t>
             </a:r>
-            <a:endParaRPr lang="en-US" sz="1400" dirty="0"/>
+            <a:endParaRPr lang="en-US" sz="1350" dirty="0"/>
           </a:p>
         </p:txBody>
       </p:sp>
@@ -3453,8 +7829,8 @@
         </p:nvSpPr>
         <p:spPr>
           <a:xfrm>
-            <a:off x="7315200" y="2514600"/>
-            <a:ext cx="4480560" cy="274320"/>
+            <a:off x="7315200" y="2331720"/>
+            <a:ext cx="4480560" cy="256032"/>
           </a:xfrm>
           <a:prstGeom prst="rect">
             <a:avLst/>
@@ -3492,8 +7868,8 @@
         </p:nvSpPr>
         <p:spPr>
           <a:xfrm>
-            <a:off x="7315200" y="2898648"/>
-            <a:ext cx="256032" cy="256032"/>
+            <a:off x="7315200" y="2670048"/>
+            <a:ext cx="237744" cy="237744"/>
           </a:xfrm>
           <a:prstGeom prst="ellipse">
             <a:avLst/>
@@ -3512,8 +7888,8 @@
         </p:nvSpPr>
         <p:spPr>
           <a:xfrm>
-            <a:off x="7315200" y="2898648"/>
-            <a:ext cx="256032" cy="256032"/>
+            <a:off x="7315200" y="2670048"/>
+            <a:ext cx="237744" cy="237744"/>
           </a:xfrm>
           <a:prstGeom prst="rect">
             <a:avLst/>
@@ -3529,7 +7905,7 @@
               <a:buNone/>
             </a:pPr>
             <a:r>
-              <a:rPr lang="en-US" sz="1100" b="1" dirty="0">
+              <a:rPr lang="en-US" sz="1050" b="1" dirty="0">
                 <a:solidFill>
                   <a:srgbClr val="FFFFFF"/>
                 </a:solidFill>
@@ -3539,7 +7915,7 @@
               </a:rPr>
               <a:t>1</a:t>
             </a:r>
-            <a:endParaRPr lang="en-US" sz="1100" dirty="0"/>
+            <a:endParaRPr lang="en-US" sz="1050" dirty="0"/>
           </a:p>
         </p:txBody>
       </p:sp>
@@ -3551,8 +7927,8 @@
         </p:nvSpPr>
         <p:spPr>
           <a:xfrm>
-            <a:off x="7699248" y="2880360"/>
-            <a:ext cx="4114800" cy="457200"/>
+            <a:off x="7680960" y="2633472"/>
+            <a:ext cx="4114800" cy="384048"/>
           </a:xfrm>
           <a:prstGeom prst="rect">
             <a:avLst/>
@@ -3568,7 +7944,7 @@
               <a:buNone/>
             </a:pPr>
             <a:r>
-              <a:rPr lang="en-US" sz="1250" dirty="0">
+              <a:rPr lang="en-US" sz="1200" dirty="0">
                 <a:solidFill>
                   <a:srgbClr val="1E293B"/>
                 </a:solidFill>
@@ -3578,7 +7954,7 @@
               </a:rPr>
               <a:t>Open the StockFix app URL</a:t>
             </a:r>
-            <a:endParaRPr lang="en-US" sz="1250" dirty="0"/>
+            <a:endParaRPr lang="en-US" sz="1200" dirty="0"/>
           </a:p>
         </p:txBody>
       </p:sp>
@@ -3590,8 +7966,8 @@
         </p:nvSpPr>
         <p:spPr>
           <a:xfrm>
-            <a:off x="7315200" y="3465576"/>
-            <a:ext cx="256032" cy="256032"/>
+            <a:off x="7315200" y="3127248"/>
+            <a:ext cx="237744" cy="237744"/>
           </a:xfrm>
           <a:prstGeom prst="ellipse">
             <a:avLst/>
@@ -3610,8 +7986,8 @@
         </p:nvSpPr>
         <p:spPr>
           <a:xfrm>
-            <a:off x="7315200" y="3465576"/>
-            <a:ext cx="256032" cy="256032"/>
+            <a:off x="7315200" y="3127248"/>
+            <a:ext cx="237744" cy="237744"/>
           </a:xfrm>
           <a:prstGeom prst="rect">
             <a:avLst/>
@@ -3627,7 +8003,7 @@
               <a:buNone/>
             </a:pPr>
             <a:r>
-              <a:rPr lang="en-US" sz="1100" b="1" dirty="0">
+              <a:rPr lang="en-US" sz="1050" b="1" dirty="0">
                 <a:solidFill>
                   <a:srgbClr val="FFFFFF"/>
                 </a:solidFill>
@@ -3637,7 +8013,7 @@
               </a:rPr>
               <a:t>2</a:t>
             </a:r>
-            <a:endParaRPr lang="en-US" sz="1100" dirty="0"/>
+            <a:endParaRPr lang="en-US" sz="1050" dirty="0"/>
           </a:p>
         </p:txBody>
       </p:sp>
@@ -3649,8 +8025,8 @@
         </p:nvSpPr>
         <p:spPr>
           <a:xfrm>
-            <a:off x="7699248" y="3447288"/>
-            <a:ext cx="4114800" cy="457200"/>
+            <a:off x="7680960" y="3090672"/>
+            <a:ext cx="4114800" cy="384048"/>
           </a:xfrm>
           <a:prstGeom prst="rect">
             <a:avLst/>
@@ -3666,7 +8042,7 @@
               <a:buNone/>
             </a:pPr>
             <a:r>
-              <a:rPr lang="en-US" sz="1250" dirty="0">
+              <a:rPr lang="en-US" sz="1200" dirty="0">
                 <a:solidFill>
                   <a:srgbClr val="1E293B"/>
                 </a:solidFill>
@@ -3676,7 +8052,7 @@
               </a:rPr>
               <a:t>Choose "I'm a Rep / Merchandiser" for field task capture</a:t>
             </a:r>
-            <a:endParaRPr lang="en-US" sz="1250" dirty="0"/>
+            <a:endParaRPr lang="en-US" sz="1200" dirty="0"/>
           </a:p>
         </p:txBody>
       </p:sp>
@@ -3688,8 +8064,8 @@
         </p:nvSpPr>
         <p:spPr>
           <a:xfrm>
-            <a:off x="7315200" y="4032504"/>
-            <a:ext cx="256032" cy="256032"/>
+            <a:off x="7315200" y="3584448"/>
+            <a:ext cx="237744" cy="237744"/>
           </a:xfrm>
           <a:prstGeom prst="ellipse">
             <a:avLst/>
@@ -3708,8 +8084,8 @@
         </p:nvSpPr>
         <p:spPr>
           <a:xfrm>
-            <a:off x="7315200" y="4032504"/>
-            <a:ext cx="256032" cy="256032"/>
+            <a:off x="7315200" y="3584448"/>
+            <a:ext cx="237744" cy="237744"/>
           </a:xfrm>
           <a:prstGeom prst="rect">
             <a:avLst/>
@@ -3725,7 +8101,7 @@
               <a:buNone/>
             </a:pPr>
             <a:r>
-              <a:rPr lang="en-US" sz="1100" b="1" dirty="0">
+              <a:rPr lang="en-US" sz="1050" b="1" dirty="0">
                 <a:solidFill>
                   <a:srgbClr val="FFFFFF"/>
                 </a:solidFill>
@@ -3735,7 +8111,7 @@
               </a:rPr>
               <a:t>3</a:t>
             </a:r>
-            <a:endParaRPr lang="en-US" sz="1100" dirty="0"/>
+            <a:endParaRPr lang="en-US" sz="1050" dirty="0"/>
           </a:p>
         </p:txBody>
       </p:sp>
@@ -3747,8 +8123,8 @@
         </p:nvSpPr>
         <p:spPr>
           <a:xfrm>
-            <a:off x="7699248" y="4014216"/>
-            <a:ext cx="4114800" cy="457200"/>
+            <a:off x="7680960" y="3547872"/>
+            <a:ext cx="4114800" cy="384048"/>
           </a:xfrm>
           <a:prstGeom prst="rect">
             <a:avLst/>
@@ -3764,7 +8140,7 @@
               <a:buNone/>
             </a:pPr>
             <a:r>
-              <a:rPr lang="en-US" sz="1250" dirty="0">
+              <a:rPr lang="en-US" sz="1200" dirty="0">
                 <a:solidFill>
                   <a:srgbClr val="1E293B"/>
                 </a:solidFill>
@@ -3774,7 +8150,7 @@
               </a:rPr>
               <a:t>Choose "I'm a Manager" for oversight &amp; reporting</a:t>
             </a:r>
-            <a:endParaRPr lang="en-US" sz="1250" dirty="0"/>
+            <a:endParaRPr lang="en-US" sz="1200" dirty="0"/>
           </a:p>
         </p:txBody>
       </p:sp>
@@ -3786,8 +8162,8 @@
         </p:nvSpPr>
         <p:spPr>
           <a:xfrm>
-            <a:off x="7315200" y="4599432"/>
-            <a:ext cx="256032" cy="256032"/>
+            <a:off x="7315200" y="4041648"/>
+            <a:ext cx="237744" cy="237744"/>
           </a:xfrm>
           <a:prstGeom prst="ellipse">
             <a:avLst/>
@@ -3806,8 +8182,8 @@
         </p:nvSpPr>
         <p:spPr>
           <a:xfrm>
-            <a:off x="7315200" y="4599432"/>
-            <a:ext cx="256032" cy="256032"/>
+            <a:off x="7315200" y="4041648"/>
+            <a:ext cx="237744" cy="237744"/>
           </a:xfrm>
           <a:prstGeom prst="rect">
             <a:avLst/>
@@ -3823,7 +8199,7 @@
               <a:buNone/>
             </a:pPr>
             <a:r>
-              <a:rPr lang="en-US" sz="1100" b="1" dirty="0">
+              <a:rPr lang="en-US" sz="1050" b="1" dirty="0">
                 <a:solidFill>
                   <a:srgbClr val="FFFFFF"/>
                 </a:solidFill>
@@ -3833,7 +8209,7 @@
               </a:rPr>
               <a:t>4</a:t>
             </a:r>
-            <a:endParaRPr lang="en-US" sz="1100" dirty="0"/>
+            <a:endParaRPr lang="en-US" sz="1050" dirty="0"/>
           </a:p>
         </p:txBody>
       </p:sp>
@@ -3845,8 +8221,8 @@
         </p:nvSpPr>
         <p:spPr>
           <a:xfrm>
-            <a:off x="7699248" y="4581144"/>
-            <a:ext cx="4114800" cy="457200"/>
+            <a:off x="7680960" y="4005072"/>
+            <a:ext cx="4114800" cy="384048"/>
           </a:xfrm>
           <a:prstGeom prst="rect">
             <a:avLst/>
@@ -3862,7 +8238,7 @@
               <a:buNone/>
             </a:pPr>
             <a:r>
-              <a:rPr lang="en-US" sz="1250" dirty="0">
+              <a:rPr lang="en-US" sz="1200" dirty="0">
                 <a:solidFill>
                   <a:srgbClr val="1E293B"/>
                 </a:solidFill>
@@ -3872,7 +8248,7 @@
               </a:rPr>
               <a:t>Choose "I'm a Client" for the external client view</a:t>
             </a:r>
-            <a:endParaRPr lang="en-US" sz="1250" dirty="0"/>
+            <a:endParaRPr lang="en-US" sz="1200" dirty="0"/>
           </a:p>
         </p:txBody>
       </p:sp>
@@ -4000,7 +8376,7 @@
                 <a:ea typeface="Arial" pitchFamily="34" charset="-122"/>
                 <a:cs typeface="Arial" pitchFamily="34" charset="-120"/>
               </a:rPr>
-              <a:t>Select Your Name</a:t>
+              <a:t>Select Your Name (dropdown open)</a:t>
             </a:r>
             <a:endParaRPr lang="en-US" sz="2600" dirty="0"/>
           </a:p>
@@ -4008,7 +8384,7 @@
       </p:sp>
       <p:pic>
         <p:nvPicPr>
-          <p:cNvPr id="5" name="Image 0" descr="/home/runner/workspace/screenshots/stockfix_guide/02_select_rep_store.jpg">    </p:cNvPr>
+          <p:cNvPr id="5" name="Image 0" descr="/home/runner/workspace/screenshots/stockfix_guide/12_select_rep_dropdown_open.jpg">    </p:cNvPr>
           <p:cNvPicPr>
             <a:picLocks noChangeAspect="1"/>
           </p:cNvPicPr>
@@ -4060,7 +8436,7 @@
         <p:spPr>
           <a:xfrm>
             <a:off x="7315200" y="1371600"/>
-            <a:ext cx="4480560" cy="1005840"/>
+            <a:ext cx="4480560" cy="822960"/>
           </a:xfrm>
           <a:prstGeom prst="rect">
             <a:avLst/>
@@ -4076,7 +8452,7 @@
               <a:buNone/>
             </a:pPr>
             <a:r>
-              <a:rPr lang="en-US" sz="1400" dirty="0">
+              <a:rPr lang="en-US" sz="1350" dirty="0">
                 <a:solidFill>
                   <a:srgbClr val="1E293B"/>
                 </a:solidFill>
@@ -4084,9 +8460,9 @@
                 <a:ea typeface="Arial" pitchFamily="34" charset="-122"/>
                 <a:cs typeface="Arial" pitchFamily="34" charset="-120"/>
               </a:rPr>
-              <a:t>Reps identify themselves by selecting their name from a dropdown list — no password required for this demo flow.</a:t>
-            </a:r>
-            <a:endParaRPr lang="en-US" sz="1400" dirty="0"/>
+              <a:t>Tapping the "Select Rep" field opens a searchable dropdown of every rep name. This is the first dropdown a rep will use.</a:t>
+            </a:r>
+            <a:endParaRPr lang="en-US" sz="1350" dirty="0"/>
           </a:p>
         </p:txBody>
       </p:sp>
@@ -4098,8 +8474,8 @@
         </p:nvSpPr>
         <p:spPr>
           <a:xfrm>
-            <a:off x="7315200" y="2514600"/>
-            <a:ext cx="4480560" cy="274320"/>
+            <a:off x="7315200" y="2331720"/>
+            <a:ext cx="4480560" cy="256032"/>
           </a:xfrm>
           <a:prstGeom prst="rect">
             <a:avLst/>
@@ -4137,8 +8513,8 @@
         </p:nvSpPr>
         <p:spPr>
           <a:xfrm>
-            <a:off x="7315200" y="2898648"/>
-            <a:ext cx="256032" cy="256032"/>
+            <a:off x="7315200" y="2670048"/>
+            <a:ext cx="237744" cy="237744"/>
           </a:xfrm>
           <a:prstGeom prst="ellipse">
             <a:avLst/>
@@ -4157,8 +8533,8 @@
         </p:nvSpPr>
         <p:spPr>
           <a:xfrm>
-            <a:off x="7315200" y="2898648"/>
-            <a:ext cx="256032" cy="256032"/>
+            <a:off x="7315200" y="2670048"/>
+            <a:ext cx="237744" cy="237744"/>
           </a:xfrm>
           <a:prstGeom prst="rect">
             <a:avLst/>
@@ -4174,7 +8550,7 @@
               <a:buNone/>
             </a:pPr>
             <a:r>
-              <a:rPr lang="en-US" sz="1100" b="1" dirty="0">
+              <a:rPr lang="en-US" sz="1050" b="1" dirty="0">
                 <a:solidFill>
                   <a:srgbClr val="FFFFFF"/>
                 </a:solidFill>
@@ -4184,7 +8560,7 @@
               </a:rPr>
               <a:t>1</a:t>
             </a:r>
-            <a:endParaRPr lang="en-US" sz="1100" dirty="0"/>
+            <a:endParaRPr lang="en-US" sz="1050" dirty="0"/>
           </a:p>
         </p:txBody>
       </p:sp>
@@ -4196,8 +8572,8 @@
         </p:nvSpPr>
         <p:spPr>
           <a:xfrm>
-            <a:off x="7699248" y="2880360"/>
-            <a:ext cx="4114800" cy="457200"/>
+            <a:off x="7680960" y="2633472"/>
+            <a:ext cx="4114800" cy="384048"/>
           </a:xfrm>
           <a:prstGeom prst="rect">
             <a:avLst/>
@@ -4213,7 +8589,7 @@
               <a:buNone/>
             </a:pPr>
             <a:r>
-              <a:rPr lang="en-US" sz="1250" dirty="0">
+              <a:rPr lang="en-US" sz="1200" dirty="0">
                 <a:solidFill>
                   <a:srgbClr val="1E293B"/>
                 </a:solidFill>
@@ -4223,7 +8599,7 @@
               </a:rPr>
               <a:t>From Choose Access, tap "I'm a Rep / Merchandiser"</a:t>
             </a:r>
-            <a:endParaRPr lang="en-US" sz="1250" dirty="0"/>
+            <a:endParaRPr lang="en-US" sz="1200" dirty="0"/>
           </a:p>
         </p:txBody>
       </p:sp>
@@ -4235,8 +8611,8 @@
         </p:nvSpPr>
         <p:spPr>
           <a:xfrm>
-            <a:off x="7315200" y="3465576"/>
-            <a:ext cx="256032" cy="256032"/>
+            <a:off x="7315200" y="3127248"/>
+            <a:ext cx="237744" cy="237744"/>
           </a:xfrm>
           <a:prstGeom prst="ellipse">
             <a:avLst/>
@@ -4255,8 +8631,8 @@
         </p:nvSpPr>
         <p:spPr>
           <a:xfrm>
-            <a:off x="7315200" y="3465576"/>
-            <a:ext cx="256032" cy="256032"/>
+            <a:off x="7315200" y="3127248"/>
+            <a:ext cx="237744" cy="237744"/>
           </a:xfrm>
           <a:prstGeom prst="rect">
             <a:avLst/>
@@ -4272,7 +8648,7 @@
               <a:buNone/>
             </a:pPr>
             <a:r>
-              <a:rPr lang="en-US" sz="1100" b="1" dirty="0">
+              <a:rPr lang="en-US" sz="1050" b="1" dirty="0">
                 <a:solidFill>
                   <a:srgbClr val="FFFFFF"/>
                 </a:solidFill>
@@ -4282,7 +8658,7 @@
               </a:rPr>
               <a:t>2</a:t>
             </a:r>
-            <a:endParaRPr lang="en-US" sz="1100" dirty="0"/>
+            <a:endParaRPr lang="en-US" sz="1050" dirty="0"/>
           </a:p>
         </p:txBody>
       </p:sp>
@@ -4294,8 +8670,8 @@
         </p:nvSpPr>
         <p:spPr>
           <a:xfrm>
-            <a:off x="7699248" y="3447288"/>
-            <a:ext cx="4114800" cy="457200"/>
+            <a:off x="7680960" y="3090672"/>
+            <a:ext cx="4114800" cy="384048"/>
           </a:xfrm>
           <a:prstGeom prst="rect">
             <a:avLst/>
@@ -4311,7 +8687,7 @@
               <a:buNone/>
             </a:pPr>
             <a:r>
-              <a:rPr lang="en-US" sz="1250" dirty="0">
+              <a:rPr lang="en-US" sz="1200" dirty="0">
                 <a:solidFill>
                   <a:srgbClr val="1E293B"/>
                 </a:solidFill>
@@ -4319,9 +8695,9 @@
                 <a:ea typeface="Arial" pitchFamily="34" charset="-122"/>
                 <a:cs typeface="Arial" pitchFamily="34" charset="-120"/>
               </a:rPr>
-              <a:t>Open the "Select Rep" dropdown</a:t>
-            </a:r>
-            <a:endParaRPr lang="en-US" sz="1250" dirty="0"/>
+              <a:t>Tap the "Select Rep" field to open this dropdown</a:t>
+            </a:r>
+            <a:endParaRPr lang="en-US" sz="1200" dirty="0"/>
           </a:p>
         </p:txBody>
       </p:sp>
@@ -4333,8 +8709,8 @@
         </p:nvSpPr>
         <p:spPr>
           <a:xfrm>
-            <a:off x="7315200" y="4032504"/>
-            <a:ext cx="256032" cy="256032"/>
+            <a:off x="7315200" y="3584448"/>
+            <a:ext cx="237744" cy="237744"/>
           </a:xfrm>
           <a:prstGeom prst="ellipse">
             <a:avLst/>
@@ -4353,8 +8729,8 @@
         </p:nvSpPr>
         <p:spPr>
           <a:xfrm>
-            <a:off x="7315200" y="4032504"/>
-            <a:ext cx="256032" cy="256032"/>
+            <a:off x="7315200" y="3584448"/>
+            <a:ext cx="237744" cy="237744"/>
           </a:xfrm>
           <a:prstGeom prst="rect">
             <a:avLst/>
@@ -4370,7 +8746,7 @@
               <a:buNone/>
             </a:pPr>
             <a:r>
-              <a:rPr lang="en-US" sz="1100" b="1" dirty="0">
+              <a:rPr lang="en-US" sz="1050" b="1" dirty="0">
                 <a:solidFill>
                   <a:srgbClr val="FFFFFF"/>
                 </a:solidFill>
@@ -4380,7 +8756,7 @@
               </a:rPr>
               <a:t>3</a:t>
             </a:r>
-            <a:endParaRPr lang="en-US" sz="1100" dirty="0"/>
+            <a:endParaRPr lang="en-US" sz="1050" dirty="0"/>
           </a:p>
         </p:txBody>
       </p:sp>
@@ -4392,8 +8768,8 @@
         </p:nvSpPr>
         <p:spPr>
           <a:xfrm>
-            <a:off x="7699248" y="4014216"/>
-            <a:ext cx="4114800" cy="457200"/>
+            <a:off x="7680960" y="3547872"/>
+            <a:ext cx="4114800" cy="384048"/>
           </a:xfrm>
           <a:prstGeom prst="rect">
             <a:avLst/>
@@ -4409,7 +8785,7 @@
               <a:buNone/>
             </a:pPr>
             <a:r>
-              <a:rPr lang="en-US" sz="1250" dirty="0">
+              <a:rPr lang="en-US" sz="1200" dirty="0">
                 <a:solidFill>
                   <a:srgbClr val="1E293B"/>
                 </a:solidFill>
@@ -4417,9 +8793,9 @@
                 <a:ea typeface="Arial" pitchFamily="34" charset="-122"/>
                 <a:cs typeface="Arial" pitchFamily="34" charset="-120"/>
               </a:rPr>
-              <a:t>Pick your name from the list</a:t>
-            </a:r>
-            <a:endParaRPr lang="en-US" sz="1250" dirty="0"/>
+              <a:t>Type to search, or scroll and tap your name</a:t>
+            </a:r>
+            <a:endParaRPr lang="en-US" sz="1200" dirty="0"/>
           </a:p>
         </p:txBody>
       </p:sp>
@@ -4431,8 +8807,8 @@
         </p:nvSpPr>
         <p:spPr>
           <a:xfrm>
-            <a:off x="7315200" y="4599432"/>
-            <a:ext cx="256032" cy="256032"/>
+            <a:off x="7315200" y="4041648"/>
+            <a:ext cx="237744" cy="237744"/>
           </a:xfrm>
           <a:prstGeom prst="ellipse">
             <a:avLst/>
@@ -4451,8 +8827,86 @@
         </p:nvSpPr>
         <p:spPr>
           <a:xfrm>
+            <a:off x="7315200" y="4041648"/>
+            <a:ext cx="237744" cy="237744"/>
+          </a:xfrm>
+          <a:prstGeom prst="rect">
+            <a:avLst/>
+          </a:prstGeom>
+          <a:noFill/>
+          <a:ln/>
+        </p:spPr>
+        <p:txBody>
+          <a:bodyPr wrap="square" rtlCol="0" anchor="ctr"/>
+          <a:lstStyle/>
+          <a:p>
+            <a:pPr algn="ctr" indent="0" marL="0">
+              <a:buNone/>
+            </a:pPr>
+            <a:r>
+              <a:rPr lang="en-US" sz="1050" b="1" dirty="0">
+                <a:solidFill>
+                  <a:srgbClr val="FFFFFF"/>
+                </a:solidFill>
+                <a:latin typeface="Arial" pitchFamily="34" charset="0"/>
+                <a:ea typeface="Arial" pitchFamily="34" charset="-122"/>
+                <a:cs typeface="Arial" pitchFamily="34" charset="-120"/>
+              </a:rPr>
+              <a:t>4</a:t>
+            </a:r>
+            <a:endParaRPr lang="en-US" sz="1050" dirty="0"/>
+          </a:p>
+        </p:txBody>
+      </p:sp>
+      <p:sp>
+        <p:nvSpPr>
+          <p:cNvPr id="20" name="Text 17"/>
+          <p:cNvSpPr/>
+          <p:nvPr/>
+        </p:nvSpPr>
+        <p:spPr>
+          <a:xfrm>
+            <a:off x="7680960" y="4005072"/>
+            <a:ext cx="4114800" cy="384048"/>
+          </a:xfrm>
+          <a:prstGeom prst="rect">
+            <a:avLst/>
+          </a:prstGeom>
+          <a:noFill/>
+          <a:ln/>
+        </p:spPr>
+        <p:txBody>
+          <a:bodyPr wrap="square" rtlCol="0" anchor="t"/>
+          <a:lstStyle/>
+          <a:p>
+            <a:pPr indent="0" marL="0">
+              <a:buNone/>
+            </a:pPr>
+            <a:r>
+              <a:rPr lang="en-US" sz="1200" dirty="0">
+                <a:solidFill>
+                  <a:srgbClr val="1E293B"/>
+                </a:solidFill>
+                <a:latin typeface="Arial" pitchFamily="34" charset="0"/>
+                <a:ea typeface="Arial" pitchFamily="34" charset="-122"/>
+                <a:cs typeface="Arial" pitchFamily="34" charset="-120"/>
+              </a:rPr>
+              <a:t>The dropdown closes and your name is filled in</a:t>
+            </a:r>
+            <a:endParaRPr lang="en-US" sz="1200" dirty="0"/>
+          </a:p>
+        </p:txBody>
+      </p:sp>
+      <p:sp>
+        <p:nvSpPr>
+          <p:cNvPr id="21" name="Text 18"/>
+          <p:cNvSpPr/>
+          <p:nvPr/>
+        </p:nvSpPr>
+        <p:spPr>
+          <a:xfrm>
             <a:off x="7315200" y="4599432"/>
-            <a:ext cx="256032" cy="256032"/>
+            <a:ext cx="4480560" cy="256032"/>
           </a:xfrm>
           <a:prstGeom prst="rect">
             <a:avLst/>
@@ -4464,19 +8918,19 @@
           <a:bodyPr wrap="square" rtlCol="0" anchor="ctr"/>
           <a:lstStyle/>
           <a:p>
-            <a:pPr algn="ctr" indent="0" marL="0">
-              <a:buNone/>
-            </a:pPr>
-            <a:r>
-              <a:rPr lang="en-US" sz="1100" b="1" dirty="0">
-                <a:solidFill>
-                  <a:srgbClr val="FFFFFF"/>
-                </a:solidFill>
-                <a:latin typeface="Arial" pitchFamily="34" charset="0"/>
-                <a:ea typeface="Arial" pitchFamily="34" charset="-122"/>
-                <a:cs typeface="Arial" pitchFamily="34" charset="-120"/>
-              </a:rPr>
-              <a:t>4</a:t>
+            <a:pPr indent="0" marL="0">
+              <a:buNone/>
+            </a:pPr>
+            <a:r>
+              <a:rPr lang="en-US" sz="1100" b="1" spc="100" kern="0" dirty="0">
+                <a:solidFill>
+                  <a:srgbClr val="64748B"/>
+                </a:solidFill>
+                <a:latin typeface="Arial" pitchFamily="34" charset="0"/>
+                <a:ea typeface="Arial" pitchFamily="34" charset="-122"/>
+                <a:cs typeface="Arial" pitchFamily="34" charset="-120"/>
+              </a:rPr>
+              <a:t>DROPDOWNS / FILTERS ON THIS SCREEN</a:t>
             </a:r>
             <a:endParaRPr lang="en-US" sz="1100" dirty="0"/>
           </a:p>
@@ -4484,14 +8938,34 @@
       </p:sp>
       <p:sp>
         <p:nvSpPr>
-          <p:cNvPr id="20" name="Text 17"/>
-          <p:cNvSpPr/>
-          <p:nvPr/>
-        </p:nvSpPr>
-        <p:spPr>
-          <a:xfrm>
-            <a:off x="7699248" y="4581144"/>
-            <a:ext cx="4114800" cy="457200"/>
+          <p:cNvPr id="22" name="Shape 19"/>
+          <p:cNvSpPr/>
+          <p:nvPr/>
+        </p:nvSpPr>
+        <p:spPr>
+          <a:xfrm>
+            <a:off x="7315200" y="4937760"/>
+            <a:ext cx="82296" cy="82296"/>
+          </a:xfrm>
+          <a:prstGeom prst="rect">
+            <a:avLst/>
+          </a:prstGeom>
+          <a:solidFill>
+            <a:srgbClr val="003B71"/>
+          </a:solidFill>
+          <a:ln/>
+        </p:spPr>
+      </p:sp>
+      <p:sp>
+        <p:nvSpPr>
+          <p:cNvPr id="23" name="Text 20"/>
+          <p:cNvSpPr/>
+          <p:nvPr/>
+        </p:nvSpPr>
+        <p:spPr>
+          <a:xfrm>
+            <a:off x="7516368" y="4855464"/>
+            <a:ext cx="4297680" cy="365760"/>
           </a:xfrm>
           <a:prstGeom prst="rect">
             <a:avLst/>
@@ -4507,7 +8981,21 @@
               <a:buNone/>
             </a:pPr>
             <a:r>
-              <a:rPr lang="en-US" sz="1250" dirty="0">
+              <a:rPr lang="en-US" sz="1150" b="1" dirty="0">
+                <a:solidFill>
+                  <a:srgbClr val="003B71"/>
+                </a:solidFill>
+                <a:latin typeface="Arial" pitchFamily="34" charset="0"/>
+                <a:ea typeface="Arial" pitchFamily="34" charset="-122"/>
+                <a:cs typeface="Arial" pitchFamily="34" charset="-120"/>
+              </a:rPr>
+              <a:t>Select Rep: </a:t>
+            </a:r>
+            <a:pPr indent="0" marL="0">
+              <a:buNone/>
+            </a:pPr>
+            <a:r>
+              <a:rPr lang="en-US" sz="1150" dirty="0">
                 <a:solidFill>
                   <a:srgbClr val="1E293B"/>
                 </a:solidFill>
@@ -4515,9 +9003,9 @@
                 <a:ea typeface="Arial" pitchFamily="34" charset="-122"/>
                 <a:cs typeface="Arial" pitchFamily="34" charset="-120"/>
               </a:rPr>
-              <a:t>You're taken straight to your Dashboard</a:t>
-            </a:r>
-            <a:endParaRPr lang="en-US" sz="1250" dirty="0"/>
+              <a:t>Searchable list of every rep name in the system</a:t>
+            </a:r>
+            <a:endParaRPr lang="en-US" sz="1150" dirty="0"/>
           </a:p>
         </p:txBody>
       </p:sp>
@@ -4606,7 +9094,7 @@
                 <a:ea typeface="Arial" pitchFamily="34" charset="-122"/>
                 <a:cs typeface="Arial" pitchFamily="34" charset="-120"/>
               </a:rPr>
-              <a:t>STEP 3 · MAIN HUB</a:t>
+              <a:t>STEP 3 · REP LOGIN</a:t>
             </a:r>
             <a:endParaRPr lang="en-US" sz="1200" dirty="0"/>
           </a:p>
@@ -4645,7 +9133,7 @@
                 <a:ea typeface="Arial" pitchFamily="34" charset="-122"/>
                 <a:cs typeface="Arial" pitchFamily="34" charset="-120"/>
               </a:rPr>
-              <a:t>StockFix Dashboard</a:t>
+              <a:t>Select Your Store</a:t>
             </a:r>
             <a:endParaRPr lang="en-US" sz="2600" dirty="0"/>
           </a:p>
@@ -4653,7 +9141,7 @@
       </p:sp>
       <p:pic>
         <p:nvPicPr>
-          <p:cNvPr id="5" name="Image 0" descr="/home/runner/workspace/screenshots/stockfix_guide/03_dashboard.jpg">    </p:cNvPr>
+          <p:cNvPr id="5" name="Image 0" descr="/home/runner/workspace/screenshots/stockfix_guide/02_select_rep_store.jpg">    </p:cNvPr>
           <p:cNvPicPr>
             <a:picLocks noChangeAspect="1"/>
           </p:cNvPicPr>
@@ -4705,7 +9193,7 @@
         <p:spPr>
           <a:xfrm>
             <a:off x="7315200" y="1371600"/>
-            <a:ext cx="4480560" cy="1005840"/>
+            <a:ext cx="4480560" cy="822960"/>
           </a:xfrm>
           <a:prstGeom prst="rect">
             <a:avLst/>
@@ -4721,7 +9209,7 @@
               <a:buNone/>
             </a:pPr>
             <a:r>
-              <a:rPr lang="en-US" sz="1400" dirty="0">
+              <a:rPr lang="en-US" sz="1350" dirty="0">
                 <a:solidFill>
                   <a:srgbClr val="1E293B"/>
                 </a:solidFill>
@@ -4729,9 +9217,9 @@
                 <a:ea typeface="Arial" pitchFamily="34" charset="-122"/>
                 <a:cs typeface="Arial" pitchFamily="34" charset="-120"/>
               </a:rPr>
-              <a:t>The central hub showing total tasks, pending vs completed counts, P4 sales, and a breakdown of actions by type. Includes quick filters by region, client, and store.</a:t>
-            </a:r>
-            <a:endParaRPr lang="en-US" sz="1400" dirty="0"/>
+              <a:t>After picking a name, a second dropdown appears for choosing the store to visit — plus two buttons for what to do next.</a:t>
+            </a:r>
+            <a:endParaRPr lang="en-US" sz="1350" dirty="0"/>
           </a:p>
         </p:txBody>
       </p:sp>
@@ -4743,8 +9231,8 @@
         </p:nvSpPr>
         <p:spPr>
           <a:xfrm>
-            <a:off x="7315200" y="2514600"/>
-            <a:ext cx="4480560" cy="274320"/>
+            <a:off x="7315200" y="2331720"/>
+            <a:ext cx="4480560" cy="256032"/>
           </a:xfrm>
           <a:prstGeom prst="rect">
             <a:avLst/>
@@ -4782,8 +9270,8 @@
         </p:nvSpPr>
         <p:spPr>
           <a:xfrm>
-            <a:off x="7315200" y="2898648"/>
-            <a:ext cx="256032" cy="256032"/>
+            <a:off x="7315200" y="2670048"/>
+            <a:ext cx="237744" cy="237744"/>
           </a:xfrm>
           <a:prstGeom prst="ellipse">
             <a:avLst/>
@@ -4802,8 +9290,8 @@
         </p:nvSpPr>
         <p:spPr>
           <a:xfrm>
-            <a:off x="7315200" y="2898648"/>
-            <a:ext cx="256032" cy="256032"/>
+            <a:off x="7315200" y="2670048"/>
+            <a:ext cx="237744" cy="237744"/>
           </a:xfrm>
           <a:prstGeom prst="rect">
             <a:avLst/>
@@ -4819,7 +9307,7 @@
               <a:buNone/>
             </a:pPr>
             <a:r>
-              <a:rPr lang="en-US" sz="1100" b="1" dirty="0">
+              <a:rPr lang="en-US" sz="1050" b="1" dirty="0">
                 <a:solidFill>
                   <a:srgbClr val="FFFFFF"/>
                 </a:solidFill>
@@ -4829,7 +9317,7 @@
               </a:rPr>
               <a:t>1</a:t>
             </a:r>
-            <a:endParaRPr lang="en-US" sz="1100" dirty="0"/>
+            <a:endParaRPr lang="en-US" sz="1050" dirty="0"/>
           </a:p>
         </p:txBody>
       </p:sp>
@@ -4841,8 +9329,8 @@
         </p:nvSpPr>
         <p:spPr>
           <a:xfrm>
-            <a:off x="7699248" y="2880360"/>
-            <a:ext cx="4114800" cy="457200"/>
+            <a:off x="7680960" y="2633472"/>
+            <a:ext cx="4114800" cy="384048"/>
           </a:xfrm>
           <a:prstGeom prst="rect">
             <a:avLst/>
@@ -4858,7 +9346,7 @@
               <a:buNone/>
             </a:pPr>
             <a:r>
-              <a:rPr lang="en-US" sz="1250" dirty="0">
+              <a:rPr lang="en-US" sz="1200" dirty="0">
                 <a:solidFill>
                   <a:srgbClr val="1E293B"/>
                 </a:solidFill>
@@ -4866,9 +9354,9 @@
                 <a:ea typeface="Arial" pitchFamily="34" charset="-122"/>
                 <a:cs typeface="Arial" pitchFamily="34" charset="-120"/>
               </a:rPr>
-              <a:t>Land here automatically after login</a:t>
-            </a:r>
-            <a:endParaRPr lang="en-US" sz="1250" dirty="0"/>
+              <a:t>With your name selected, the "Select Store" dropdown appears</a:t>
+            </a:r>
+            <a:endParaRPr lang="en-US" sz="1200" dirty="0"/>
           </a:p>
         </p:txBody>
       </p:sp>
@@ -4880,8 +9368,8 @@
         </p:nvSpPr>
         <p:spPr>
           <a:xfrm>
-            <a:off x="7315200" y="3465576"/>
-            <a:ext cx="256032" cy="256032"/>
+            <a:off x="7315200" y="3127248"/>
+            <a:ext cx="237744" cy="237744"/>
           </a:xfrm>
           <a:prstGeom prst="ellipse">
             <a:avLst/>
@@ -4900,8 +9388,8 @@
         </p:nvSpPr>
         <p:spPr>
           <a:xfrm>
-            <a:off x="7315200" y="3465576"/>
-            <a:ext cx="256032" cy="256032"/>
+            <a:off x="7315200" y="3127248"/>
+            <a:ext cx="237744" cy="237744"/>
           </a:xfrm>
           <a:prstGeom prst="rect">
             <a:avLst/>
@@ -4917,7 +9405,7 @@
               <a:buNone/>
             </a:pPr>
             <a:r>
-              <a:rPr lang="en-US" sz="1100" b="1" dirty="0">
+              <a:rPr lang="en-US" sz="1050" b="1" dirty="0">
                 <a:solidFill>
                   <a:srgbClr val="FFFFFF"/>
                 </a:solidFill>
@@ -4927,7 +9415,7 @@
               </a:rPr>
               <a:t>2</a:t>
             </a:r>
-            <a:endParaRPr lang="en-US" sz="1100" dirty="0"/>
+            <a:endParaRPr lang="en-US" sz="1050" dirty="0"/>
           </a:p>
         </p:txBody>
       </p:sp>
@@ -4939,8 +9427,8 @@
         </p:nvSpPr>
         <p:spPr>
           <a:xfrm>
-            <a:off x="7699248" y="3447288"/>
-            <a:ext cx="4114800" cy="457200"/>
+            <a:off x="7680960" y="3090672"/>
+            <a:ext cx="4114800" cy="384048"/>
           </a:xfrm>
           <a:prstGeom prst="rect">
             <a:avLst/>
@@ -4956,7 +9444,7 @@
               <a:buNone/>
             </a:pPr>
             <a:r>
-              <a:rPr lang="en-US" sz="1250" dirty="0">
+              <a:rPr lang="en-US" sz="1200" dirty="0">
                 <a:solidFill>
                   <a:srgbClr val="1E293B"/>
                 </a:solidFill>
@@ -4964,9 +9452,9 @@
                 <a:ea typeface="Arial" pitchFamily="34" charset="-122"/>
                 <a:cs typeface="Arial" pitchFamily="34" charset="-120"/>
               </a:rPr>
-              <a:t>Use Quick Filters to narrow by region, client, or store</a:t>
-            </a:r>
-            <a:endParaRPr lang="en-US" sz="1250" dirty="0"/>
+              <a:t>Tap it and choose the store you're visiting today</a:t>
+            </a:r>
+            <a:endParaRPr lang="en-US" sz="1200" dirty="0"/>
           </a:p>
         </p:txBody>
       </p:sp>
@@ -4978,8 +9466,8 @@
         </p:nvSpPr>
         <p:spPr>
           <a:xfrm>
-            <a:off x="7315200" y="4032504"/>
-            <a:ext cx="256032" cy="256032"/>
+            <a:off x="7315200" y="3584448"/>
+            <a:ext cx="237744" cy="237744"/>
           </a:xfrm>
           <a:prstGeom prst="ellipse">
             <a:avLst/>
@@ -4998,8 +9486,8 @@
         </p:nvSpPr>
         <p:spPr>
           <a:xfrm>
-            <a:off x="7315200" y="4032504"/>
-            <a:ext cx="256032" cy="256032"/>
+            <a:off x="7315200" y="3584448"/>
+            <a:ext cx="237744" cy="237744"/>
           </a:xfrm>
           <a:prstGeom prst="rect">
             <a:avLst/>
@@ -5015,7 +9503,7 @@
               <a:buNone/>
             </a:pPr>
             <a:r>
-              <a:rPr lang="en-US" sz="1100" b="1" dirty="0">
+              <a:rPr lang="en-US" sz="1050" b="1" dirty="0">
                 <a:solidFill>
                   <a:srgbClr val="FFFFFF"/>
                 </a:solidFill>
@@ -5025,7 +9513,7 @@
               </a:rPr>
               <a:t>3</a:t>
             </a:r>
-            <a:endParaRPr lang="en-US" sz="1100" dirty="0"/>
+            <a:endParaRPr lang="en-US" sz="1050" dirty="0"/>
           </a:p>
         </p:txBody>
       </p:sp>
@@ -5037,8 +9525,8 @@
         </p:nvSpPr>
         <p:spPr>
           <a:xfrm>
-            <a:off x="7699248" y="4014216"/>
-            <a:ext cx="4114800" cy="457200"/>
+            <a:off x="7680960" y="3547872"/>
+            <a:ext cx="4114800" cy="384048"/>
           </a:xfrm>
           <a:prstGeom prst="rect">
             <a:avLst/>
@@ -5054,7 +9542,7 @@
               <a:buNone/>
             </a:pPr>
             <a:r>
-              <a:rPr lang="en-US" sz="1250" dirty="0">
+              <a:rPr lang="en-US" sz="1200" dirty="0">
                 <a:solidFill>
                   <a:srgbClr val="1E293B"/>
                 </a:solidFill>
@@ -5062,9 +9550,9 @@
                 <a:ea typeface="Arial" pitchFamily="34" charset="-122"/>
                 <a:cs typeface="Arial" pitchFamily="34" charset="-120"/>
               </a:rPr>
-              <a:t>Tap "Import" to upload a new Excel task list (managers)</a:t>
-            </a:r>
-            <a:endParaRPr lang="en-US" sz="1250" dirty="0"/>
+              <a:t>Tap "START VISIT" to begin capturing tasks at that store</a:t>
+            </a:r>
+            <a:endParaRPr lang="en-US" sz="1200" dirty="0"/>
           </a:p>
         </p:txBody>
       </p:sp>
@@ -5076,8 +9564,8 @@
         </p:nvSpPr>
         <p:spPr>
           <a:xfrm>
-            <a:off x="7315200" y="4599432"/>
-            <a:ext cx="256032" cy="256032"/>
+            <a:off x="7315200" y="4041648"/>
+            <a:ext cx="237744" cy="237744"/>
           </a:xfrm>
           <a:prstGeom prst="ellipse">
             <a:avLst/>
@@ -5096,8 +9584,86 @@
         </p:nvSpPr>
         <p:spPr>
           <a:xfrm>
+            <a:off x="7315200" y="4041648"/>
+            <a:ext cx="237744" cy="237744"/>
+          </a:xfrm>
+          <a:prstGeom prst="rect">
+            <a:avLst/>
+          </a:prstGeom>
+          <a:noFill/>
+          <a:ln/>
+        </p:spPr>
+        <p:txBody>
+          <a:bodyPr wrap="square" rtlCol="0" anchor="ctr"/>
+          <a:lstStyle/>
+          <a:p>
+            <a:pPr algn="ctr" indent="0" marL="0">
+              <a:buNone/>
+            </a:pPr>
+            <a:r>
+              <a:rPr lang="en-US" sz="1050" b="1" dirty="0">
+                <a:solidFill>
+                  <a:srgbClr val="FFFFFF"/>
+                </a:solidFill>
+                <a:latin typeface="Arial" pitchFamily="34" charset="0"/>
+                <a:ea typeface="Arial" pitchFamily="34" charset="-122"/>
+                <a:cs typeface="Arial" pitchFamily="34" charset="-120"/>
+              </a:rPr>
+              <a:t>4</a:t>
+            </a:r>
+            <a:endParaRPr lang="en-US" sz="1050" dirty="0"/>
+          </a:p>
+        </p:txBody>
+      </p:sp>
+      <p:sp>
+        <p:nvSpPr>
+          <p:cNvPr id="20" name="Text 17"/>
+          <p:cNvSpPr/>
+          <p:nvPr/>
+        </p:nvSpPr>
+        <p:spPr>
+          <a:xfrm>
+            <a:off x="7680960" y="4005072"/>
+            <a:ext cx="4114800" cy="384048"/>
+          </a:xfrm>
+          <a:prstGeom prst="rect">
+            <a:avLst/>
+          </a:prstGeom>
+          <a:noFill/>
+          <a:ln/>
+        </p:spPr>
+        <p:txBody>
+          <a:bodyPr wrap="square" rtlCol="0" anchor="t"/>
+          <a:lstStyle/>
+          <a:p>
+            <a:pPr indent="0" marL="0">
+              <a:buNone/>
+            </a:pPr>
+            <a:r>
+              <a:rPr lang="en-US" sz="1200" dirty="0">
+                <a:solidFill>
+                  <a:srgbClr val="1E293B"/>
+                </a:solidFill>
+                <a:latin typeface="Arial" pitchFamily="34" charset="0"/>
+                <a:ea typeface="Arial" pitchFamily="34" charset="-122"/>
+                <a:cs typeface="Arial" pitchFamily="34" charset="-120"/>
+              </a:rPr>
+              <a:t>Or tap "My Dashboard" to see your own task progress instead</a:t>
+            </a:r>
+            <a:endParaRPr lang="en-US" sz="1200" dirty="0"/>
+          </a:p>
+        </p:txBody>
+      </p:sp>
+      <p:sp>
+        <p:nvSpPr>
+          <p:cNvPr id="21" name="Text 18"/>
+          <p:cNvSpPr/>
+          <p:nvPr/>
+        </p:nvSpPr>
+        <p:spPr>
+          <a:xfrm>
             <a:off x="7315200" y="4599432"/>
-            <a:ext cx="256032" cy="256032"/>
+            <a:ext cx="4480560" cy="256032"/>
           </a:xfrm>
           <a:prstGeom prst="rect">
             <a:avLst/>
@@ -5109,19 +9675,19 @@
           <a:bodyPr wrap="square" rtlCol="0" anchor="ctr"/>
           <a:lstStyle/>
           <a:p>
-            <a:pPr algn="ctr" indent="0" marL="0">
-              <a:buNone/>
-            </a:pPr>
-            <a:r>
-              <a:rPr lang="en-US" sz="1100" b="1" dirty="0">
-                <a:solidFill>
-                  <a:srgbClr val="FFFFFF"/>
-                </a:solidFill>
-                <a:latin typeface="Arial" pitchFamily="34" charset="0"/>
-                <a:ea typeface="Arial" pitchFamily="34" charset="-122"/>
-                <a:cs typeface="Arial" pitchFamily="34" charset="-120"/>
-              </a:rPr>
-              <a:t>4</a:t>
+            <a:pPr indent="0" marL="0">
+              <a:buNone/>
+            </a:pPr>
+            <a:r>
+              <a:rPr lang="en-US" sz="1100" b="1" spc="100" kern="0" dirty="0">
+                <a:solidFill>
+                  <a:srgbClr val="64748B"/>
+                </a:solidFill>
+                <a:latin typeface="Arial" pitchFamily="34" charset="0"/>
+                <a:ea typeface="Arial" pitchFamily="34" charset="-122"/>
+                <a:cs typeface="Arial" pitchFamily="34" charset="-120"/>
+              </a:rPr>
+              <a:t>DROPDOWNS / FILTERS ON THIS SCREEN</a:t>
             </a:r>
             <a:endParaRPr lang="en-US" sz="1100" dirty="0"/>
           </a:p>
@@ -5129,14 +9695,34 @@
       </p:sp>
       <p:sp>
         <p:nvSpPr>
-          <p:cNvPr id="20" name="Text 17"/>
-          <p:cNvSpPr/>
-          <p:nvPr/>
-        </p:nvSpPr>
-        <p:spPr>
-          <a:xfrm>
-            <a:off x="7699248" y="4581144"/>
-            <a:ext cx="4114800" cy="457200"/>
+          <p:cNvPr id="22" name="Shape 19"/>
+          <p:cNvSpPr/>
+          <p:nvPr/>
+        </p:nvSpPr>
+        <p:spPr>
+          <a:xfrm>
+            <a:off x="7315200" y="4937760"/>
+            <a:ext cx="82296" cy="82296"/>
+          </a:xfrm>
+          <a:prstGeom prst="rect">
+            <a:avLst/>
+          </a:prstGeom>
+          <a:solidFill>
+            <a:srgbClr val="003B71"/>
+          </a:solidFill>
+          <a:ln/>
+        </p:spPr>
+      </p:sp>
+      <p:sp>
+        <p:nvSpPr>
+          <p:cNvPr id="23" name="Text 20"/>
+          <p:cNvSpPr/>
+          <p:nvPr/>
+        </p:nvSpPr>
+        <p:spPr>
+          <a:xfrm>
+            <a:off x="7516368" y="4855464"/>
+            <a:ext cx="4297680" cy="365760"/>
           </a:xfrm>
           <a:prstGeom prst="rect">
             <a:avLst/>
@@ -5152,7 +9738,21 @@
               <a:buNone/>
             </a:pPr>
             <a:r>
-              <a:rPr lang="en-US" sz="1250" dirty="0">
+              <a:rPr lang="en-US" sz="1150" b="1" dirty="0">
+                <a:solidFill>
+                  <a:srgbClr val="003B71"/>
+                </a:solidFill>
+                <a:latin typeface="Arial" pitchFamily="34" charset="0"/>
+                <a:ea typeface="Arial" pitchFamily="34" charset="-122"/>
+                <a:cs typeface="Arial" pitchFamily="34" charset="-120"/>
+              </a:rPr>
+              <a:t>Select Store: </a:t>
+            </a:r>
+            <a:pPr indent="0" marL="0">
+              <a:buNone/>
+            </a:pPr>
+            <a:r>
+              <a:rPr lang="en-US" sz="1150" dirty="0">
                 <a:solidFill>
                   <a:srgbClr val="1E293B"/>
                 </a:solidFill>
@@ -5160,9 +9760,9 @@
                 <a:ea typeface="Arial" pitchFamily="34" charset="-122"/>
                 <a:cs typeface="Arial" pitchFamily="34" charset="-120"/>
               </a:rPr>
-              <a:t>Tap "Export" to download current task data</a:t>
-            </a:r>
-            <a:endParaRPr lang="en-US" sz="1250" dirty="0"/>
+              <a:t>Searchable list of stores assigned to the selected rep</a:t>
+            </a:r>
+            <a:endParaRPr lang="en-US" sz="1150" dirty="0"/>
           </a:p>
         </p:txBody>
       </p:sp>
@@ -5251,7 +9851,7 @@
                 <a:ea typeface="Arial" pitchFamily="34" charset="-122"/>
                 <a:cs typeface="Arial" pitchFamily="34" charset="-120"/>
               </a:rPr>
-              <a:t>STEP 4 · TASK DETAIL</a:t>
+              <a:t>STEP 4 · MAIN HUB · WHERE TO SEE TASKS</a:t>
             </a:r>
             <a:endParaRPr lang="en-US" sz="1200" dirty="0"/>
           </a:p>
@@ -5290,7 +9890,7 @@
                 <a:ea typeface="Arial" pitchFamily="34" charset="-122"/>
                 <a:cs typeface="Arial" pitchFamily="34" charset="-120"/>
               </a:rPr>
-              <a:t>Task Feedback</a:t>
+              <a:t>StockFix Dashboard</a:t>
             </a:r>
             <a:endParaRPr lang="en-US" sz="2600" dirty="0"/>
           </a:p>
@@ -5298,7 +9898,7 @@
       </p:sp>
       <p:pic>
         <p:nvPicPr>
-          <p:cNvPr id="5" name="Image 0" descr="/home/runner/workspace/screenshots/stockfix_guide/04_task_detail.jpg">    </p:cNvPr>
+          <p:cNvPr id="5" name="Image 0" descr="/home/runner/workspace/screenshots/stockfix_guide/03_dashboard.jpg">    </p:cNvPr>
           <p:cNvPicPr>
             <a:picLocks noChangeAspect="1"/>
           </p:cNvPicPr>
@@ -5350,7 +9950,7 @@
         <p:spPr>
           <a:xfrm>
             <a:off x="7315200" y="1371600"/>
-            <a:ext cx="4480560" cy="1005840"/>
+            <a:ext cx="4480560" cy="822960"/>
           </a:xfrm>
           <a:prstGeom prst="rect">
             <a:avLst/>
@@ -5366,7 +9966,7 @@
               <a:buNone/>
             </a:pPr>
             <a:r>
-              <a:rPr lang="en-US" sz="1400" dirty="0">
+              <a:rPr lang="en-US" sz="1350" dirty="0">
                 <a:solidFill>
                   <a:srgbClr val="1E293B"/>
                 </a:solidFill>
@@ -5374,9 +9974,9 @@
                 <a:ea typeface="Arial" pitchFamily="34" charset="-122"/>
                 <a:cs typeface="Arial" pitchFamily="34" charset="-120"/>
               </a:rPr>
-              <a:t>Opening an individual task shows stock metrics (SOH, DC stock, sell-out, WFC) with trend charts, plus an action capture form for the rep to log their findings.</a:t>
-            </a:r>
-            <a:endParaRPr lang="en-US" sz="1400" dirty="0"/>
+              <a:t>This is the main hub. To see the full task list, tap the "Total Tasks", "Pending", or "Completed" card — each one opens the Tasks screen, optionally pre-filtered.</a:t>
+            </a:r>
+            <a:endParaRPr lang="en-US" sz="1350" dirty="0"/>
           </a:p>
         </p:txBody>
       </p:sp>
@@ -5388,8 +9988,8 @@
         </p:nvSpPr>
         <p:spPr>
           <a:xfrm>
-            <a:off x="7315200" y="2514600"/>
-            <a:ext cx="4480560" cy="274320"/>
+            <a:off x="7315200" y="2331720"/>
+            <a:ext cx="4480560" cy="256032"/>
           </a:xfrm>
           <a:prstGeom prst="rect">
             <a:avLst/>
@@ -5427,8 +10027,8 @@
         </p:nvSpPr>
         <p:spPr>
           <a:xfrm>
-            <a:off x="7315200" y="2898648"/>
-            <a:ext cx="256032" cy="256032"/>
+            <a:off x="7315200" y="2670048"/>
+            <a:ext cx="237744" cy="237744"/>
           </a:xfrm>
           <a:prstGeom prst="ellipse">
             <a:avLst/>
@@ -5447,8 +10047,8 @@
         </p:nvSpPr>
         <p:spPr>
           <a:xfrm>
-            <a:off x="7315200" y="2898648"/>
-            <a:ext cx="256032" cy="256032"/>
+            <a:off x="7315200" y="2670048"/>
+            <a:ext cx="237744" cy="237744"/>
           </a:xfrm>
           <a:prstGeom prst="rect">
             <a:avLst/>
@@ -5464,7 +10064,7 @@
               <a:buNone/>
             </a:pPr>
             <a:r>
-              <a:rPr lang="en-US" sz="1100" b="1" dirty="0">
+              <a:rPr lang="en-US" sz="1050" b="1" dirty="0">
                 <a:solidFill>
                   <a:srgbClr val="FFFFFF"/>
                 </a:solidFill>
@@ -5474,7 +10074,7 @@
               </a:rPr>
               <a:t>1</a:t>
             </a:r>
-            <a:endParaRPr lang="en-US" sz="1100" dirty="0"/>
+            <a:endParaRPr lang="en-US" sz="1050" dirty="0"/>
           </a:p>
         </p:txBody>
       </p:sp>
@@ -5486,8 +10086,8 @@
         </p:nvSpPr>
         <p:spPr>
           <a:xfrm>
-            <a:off x="7699248" y="2880360"/>
-            <a:ext cx="4114800" cy="457200"/>
+            <a:off x="7680960" y="2633472"/>
+            <a:ext cx="4114800" cy="384048"/>
           </a:xfrm>
           <a:prstGeom prst="rect">
             <a:avLst/>
@@ -5503,7 +10103,7 @@
               <a:buNone/>
             </a:pPr>
             <a:r>
-              <a:rPr lang="en-US" sz="1250" dirty="0">
+              <a:rPr lang="en-US" sz="1200" dirty="0">
                 <a:solidFill>
                   <a:srgbClr val="1E293B"/>
                 </a:solidFill>
@@ -5511,9 +10111,9 @@
                 <a:ea typeface="Arial" pitchFamily="34" charset="-122"/>
                 <a:cs typeface="Arial" pitchFamily="34" charset="-120"/>
               </a:rPr>
-              <a:t>From the Dashboard or Store view, tap any task card</a:t>
-            </a:r>
-            <a:endParaRPr lang="en-US" sz="1250" dirty="0"/>
+              <a:t>Tap the "Total Tasks" card to see ALL tasks</a:t>
+            </a:r>
+            <a:endParaRPr lang="en-US" sz="1200" dirty="0"/>
           </a:p>
         </p:txBody>
       </p:sp>
@@ -5525,8 +10125,8 @@
         </p:nvSpPr>
         <p:spPr>
           <a:xfrm>
-            <a:off x="7315200" y="3465576"/>
-            <a:ext cx="256032" cy="256032"/>
+            <a:off x="7315200" y="3127248"/>
+            <a:ext cx="237744" cy="237744"/>
           </a:xfrm>
           <a:prstGeom prst="ellipse">
             <a:avLst/>
@@ -5545,8 +10145,8 @@
         </p:nvSpPr>
         <p:spPr>
           <a:xfrm>
-            <a:off x="7315200" y="3465576"/>
-            <a:ext cx="256032" cy="256032"/>
+            <a:off x="7315200" y="3127248"/>
+            <a:ext cx="237744" cy="237744"/>
           </a:xfrm>
           <a:prstGeom prst="rect">
             <a:avLst/>
@@ -5562,7 +10162,7 @@
               <a:buNone/>
             </a:pPr>
             <a:r>
-              <a:rPr lang="en-US" sz="1100" b="1" dirty="0">
+              <a:rPr lang="en-US" sz="1050" b="1" dirty="0">
                 <a:solidFill>
                   <a:srgbClr val="FFFFFF"/>
                 </a:solidFill>
@@ -5572,7 +10172,7 @@
               </a:rPr>
               <a:t>2</a:t>
             </a:r>
-            <a:endParaRPr lang="en-US" sz="1100" dirty="0"/>
+            <a:endParaRPr lang="en-US" sz="1050" dirty="0"/>
           </a:p>
         </p:txBody>
       </p:sp>
@@ -5584,8 +10184,8 @@
         </p:nvSpPr>
         <p:spPr>
           <a:xfrm>
-            <a:off x="7699248" y="3447288"/>
-            <a:ext cx="4114800" cy="457200"/>
+            <a:off x="7680960" y="3090672"/>
+            <a:ext cx="4114800" cy="384048"/>
           </a:xfrm>
           <a:prstGeom prst="rect">
             <a:avLst/>
@@ -5601,7 +10201,7 @@
               <a:buNone/>
             </a:pPr>
             <a:r>
-              <a:rPr lang="en-US" sz="1250" dirty="0">
+              <a:rPr lang="en-US" sz="1200" dirty="0">
                 <a:solidFill>
                   <a:srgbClr val="1E293B"/>
                 </a:solidFill>
@@ -5609,9 +10209,9 @@
                 <a:ea typeface="Arial" pitchFamily="34" charset="-122"/>
                 <a:cs typeface="Arial" pitchFamily="34" charset="-120"/>
               </a:rPr>
-              <a:t>Review SOH, DC SOH, Sell Out, and WFC figures and trends</a:t>
-            </a:r>
-            <a:endParaRPr lang="en-US" sz="1250" dirty="0"/>
+              <a:t>Tap "Pending" to jump straight to open tasks only</a:t>
+            </a:r>
+            <a:endParaRPr lang="en-US" sz="1200" dirty="0"/>
           </a:p>
         </p:txBody>
       </p:sp>
@@ -5623,8 +10223,8 @@
         </p:nvSpPr>
         <p:spPr>
           <a:xfrm>
-            <a:off x="7315200" y="4032504"/>
-            <a:ext cx="256032" cy="256032"/>
+            <a:off x="7315200" y="3584448"/>
+            <a:ext cx="237744" cy="237744"/>
           </a:xfrm>
           <a:prstGeom prst="ellipse">
             <a:avLst/>
@@ -5643,8 +10243,8 @@
         </p:nvSpPr>
         <p:spPr>
           <a:xfrm>
-            <a:off x="7315200" y="4032504"/>
-            <a:ext cx="256032" cy="256032"/>
+            <a:off x="7315200" y="3584448"/>
+            <a:ext cx="237744" cy="237744"/>
           </a:xfrm>
           <a:prstGeom prst="rect">
             <a:avLst/>
@@ -5660,7 +10260,7 @@
               <a:buNone/>
             </a:pPr>
             <a:r>
-              <a:rPr lang="en-US" sz="1100" b="1" dirty="0">
+              <a:rPr lang="en-US" sz="1050" b="1" dirty="0">
                 <a:solidFill>
                   <a:srgbClr val="FFFFFF"/>
                 </a:solidFill>
@@ -5670,7 +10270,7 @@
               </a:rPr>
               <a:t>3</a:t>
             </a:r>
-            <a:endParaRPr lang="en-US" sz="1100" dirty="0"/>
+            <a:endParaRPr lang="en-US" sz="1050" dirty="0"/>
           </a:p>
         </p:txBody>
       </p:sp>
@@ -5682,8 +10282,8 @@
         </p:nvSpPr>
         <p:spPr>
           <a:xfrm>
-            <a:off x="7699248" y="4014216"/>
-            <a:ext cx="4114800" cy="457200"/>
+            <a:off x="7680960" y="3547872"/>
+            <a:ext cx="4114800" cy="384048"/>
           </a:xfrm>
           <a:prstGeom prst="rect">
             <a:avLst/>
@@ -5699,7 +10299,7 @@
               <a:buNone/>
             </a:pPr>
             <a:r>
-              <a:rPr lang="en-US" sz="1250" dirty="0">
+              <a:rPr lang="en-US" sz="1200" dirty="0">
                 <a:solidFill>
                   <a:srgbClr val="1E293B"/>
                 </a:solidFill>
@@ -5707,9 +10307,9 @@
                 <a:ea typeface="Arial" pitchFamily="34" charset="-122"/>
                 <a:cs typeface="Arial" pitchFamily="34" charset="-120"/>
               </a:rPr>
-              <a:t>Fill in Physical Count and confirm if system stock was adjusted</a:t>
-            </a:r>
-            <a:endParaRPr lang="en-US" sz="1250" dirty="0"/>
+              <a:t>Tap "Completed" to see tasks already actioned</a:t>
+            </a:r>
+            <a:endParaRPr lang="en-US" sz="1200" dirty="0"/>
           </a:p>
         </p:txBody>
       </p:sp>
@@ -5721,8 +10321,8 @@
         </p:nvSpPr>
         <p:spPr>
           <a:xfrm>
-            <a:off x="7315200" y="4599432"/>
-            <a:ext cx="256032" cy="256032"/>
+            <a:off x="7315200" y="4041648"/>
+            <a:ext cx="237744" cy="237744"/>
           </a:xfrm>
           <a:prstGeom prst="ellipse">
             <a:avLst/>
@@ -5741,8 +10341,86 @@
         </p:nvSpPr>
         <p:spPr>
           <a:xfrm>
+            <a:off x="7315200" y="4041648"/>
+            <a:ext cx="237744" cy="237744"/>
+          </a:xfrm>
+          <a:prstGeom prst="rect">
+            <a:avLst/>
+          </a:prstGeom>
+          <a:noFill/>
+          <a:ln/>
+        </p:spPr>
+        <p:txBody>
+          <a:bodyPr wrap="square" rtlCol="0" anchor="ctr"/>
+          <a:lstStyle/>
+          <a:p>
+            <a:pPr algn="ctr" indent="0" marL="0">
+              <a:buNone/>
+            </a:pPr>
+            <a:r>
+              <a:rPr lang="en-US" sz="1050" b="1" dirty="0">
+                <a:solidFill>
+                  <a:srgbClr val="FFFFFF"/>
+                </a:solidFill>
+                <a:latin typeface="Arial" pitchFamily="34" charset="0"/>
+                <a:ea typeface="Arial" pitchFamily="34" charset="-122"/>
+                <a:cs typeface="Arial" pitchFamily="34" charset="-120"/>
+              </a:rPr>
+              <a:t>4</a:t>
+            </a:r>
+            <a:endParaRPr lang="en-US" sz="1050" dirty="0"/>
+          </a:p>
+        </p:txBody>
+      </p:sp>
+      <p:sp>
+        <p:nvSpPr>
+          <p:cNvPr id="20" name="Text 17"/>
+          <p:cNvSpPr/>
+          <p:nvPr/>
+        </p:nvSpPr>
+        <p:spPr>
+          <a:xfrm>
+            <a:off x="7680960" y="4005072"/>
+            <a:ext cx="4114800" cy="384048"/>
+          </a:xfrm>
+          <a:prstGeom prst="rect">
+            <a:avLst/>
+          </a:prstGeom>
+          <a:noFill/>
+          <a:ln/>
+        </p:spPr>
+        <p:txBody>
+          <a:bodyPr wrap="square" rtlCol="0" anchor="t"/>
+          <a:lstStyle/>
+          <a:p>
+            <a:pPr indent="0" marL="0">
+              <a:buNone/>
+            </a:pPr>
+            <a:r>
+              <a:rPr lang="en-US" sz="1200" dirty="0">
+                <a:solidFill>
+                  <a:srgbClr val="1E293B"/>
+                </a:solidFill>
+                <a:latin typeface="Arial" pitchFamily="34" charset="0"/>
+                <a:ea typeface="Arial" pitchFamily="34" charset="-122"/>
+                <a:cs typeface="Arial" pitchFamily="34" charset="-120"/>
+              </a:rPr>
+              <a:t>Or tap "Tasks" in the bottom nav bar at any time</a:t>
+            </a:r>
+            <a:endParaRPr lang="en-US" sz="1200" dirty="0"/>
+          </a:p>
+        </p:txBody>
+      </p:sp>
+      <p:sp>
+        <p:nvSpPr>
+          <p:cNvPr id="21" name="Text 18"/>
+          <p:cNvSpPr/>
+          <p:nvPr/>
+        </p:nvSpPr>
+        <p:spPr>
+          <a:xfrm>
             <a:off x="7315200" y="4599432"/>
-            <a:ext cx="256032" cy="256032"/>
+            <a:ext cx="4480560" cy="256032"/>
           </a:xfrm>
           <a:prstGeom prst="rect">
             <a:avLst/>
@@ -5754,19 +10432,19 @@
           <a:bodyPr wrap="square" rtlCol="0" anchor="ctr"/>
           <a:lstStyle/>
           <a:p>
-            <a:pPr algn="ctr" indent="0" marL="0">
-              <a:buNone/>
-            </a:pPr>
-            <a:r>
-              <a:rPr lang="en-US" sz="1100" b="1" dirty="0">
-                <a:solidFill>
-                  <a:srgbClr val="FFFFFF"/>
-                </a:solidFill>
-                <a:latin typeface="Arial" pitchFamily="34" charset="0"/>
-                <a:ea typeface="Arial" pitchFamily="34" charset="-122"/>
-                <a:cs typeface="Arial" pitchFamily="34" charset="-120"/>
-              </a:rPr>
-              <a:t>4</a:t>
+            <a:pPr indent="0" marL="0">
+              <a:buNone/>
+            </a:pPr>
+            <a:r>
+              <a:rPr lang="en-US" sz="1100" b="1" spc="100" kern="0" dirty="0">
+                <a:solidFill>
+                  <a:srgbClr val="64748B"/>
+                </a:solidFill>
+                <a:latin typeface="Arial" pitchFamily="34" charset="0"/>
+                <a:ea typeface="Arial" pitchFamily="34" charset="-122"/>
+                <a:cs typeface="Arial" pitchFamily="34" charset="-120"/>
+              </a:rPr>
+              <a:t>DROPDOWNS / FILTERS ON THIS SCREEN</a:t>
             </a:r>
             <a:endParaRPr lang="en-US" sz="1100" dirty="0"/>
           </a:p>
@@ -5774,14 +10452,34 @@
       </p:sp>
       <p:sp>
         <p:nvSpPr>
-          <p:cNvPr id="20" name="Text 17"/>
-          <p:cNvSpPr/>
-          <p:nvPr/>
-        </p:nvSpPr>
-        <p:spPr>
-          <a:xfrm>
-            <a:off x="7699248" y="4581144"/>
-            <a:ext cx="4114800" cy="457200"/>
+          <p:cNvPr id="22" name="Shape 19"/>
+          <p:cNvSpPr/>
+          <p:nvPr/>
+        </p:nvSpPr>
+        <p:spPr>
+          <a:xfrm>
+            <a:off x="7315200" y="4937760"/>
+            <a:ext cx="82296" cy="82296"/>
+          </a:xfrm>
+          <a:prstGeom prst="rect">
+            <a:avLst/>
+          </a:prstGeom>
+          <a:solidFill>
+            <a:srgbClr val="003B71"/>
+          </a:solidFill>
+          <a:ln/>
+        </p:spPr>
+      </p:sp>
+      <p:sp>
+        <p:nvSpPr>
+          <p:cNvPr id="23" name="Text 20"/>
+          <p:cNvSpPr/>
+          <p:nvPr/>
+        </p:nvSpPr>
+        <p:spPr>
+          <a:xfrm>
+            <a:off x="7516368" y="4855464"/>
+            <a:ext cx="4297680" cy="365760"/>
           </a:xfrm>
           <a:prstGeom prst="rect">
             <a:avLst/>
@@ -5797,7 +10495,21 @@
               <a:buNone/>
             </a:pPr>
             <a:r>
-              <a:rPr lang="en-US" sz="1250" dirty="0">
+              <a:rPr lang="en-US" sz="1150" b="1" dirty="0">
+                <a:solidFill>
+                  <a:srgbClr val="003B71"/>
+                </a:solidFill>
+                <a:latin typeface="Arial" pitchFamily="34" charset="0"/>
+                <a:ea typeface="Arial" pitchFamily="34" charset="-122"/>
+                <a:cs typeface="Arial" pitchFamily="34" charset="-120"/>
+              </a:rPr>
+              <a:t>Region: </a:t>
+            </a:r>
+            <a:pPr indent="0" marL="0">
+              <a:buNone/>
+            </a:pPr>
+            <a:r>
+              <a:rPr lang="en-US" sz="1150" dirty="0">
                 <a:solidFill>
                   <a:srgbClr val="1E293B"/>
                 </a:solidFill>
@@ -5805,9 +10517,155 @@
                 <a:ea typeface="Arial" pitchFamily="34" charset="-122"/>
                 <a:cs typeface="Arial" pitchFamily="34" charset="-120"/>
               </a:rPr>
-              <a:t>Select a Reason Code and Action Taken, then add feedback notes</a:t>
-            </a:r>
-            <a:endParaRPr lang="en-US" sz="1250" dirty="0"/>
+              <a:t>Filter dashboard totals by region</a:t>
+            </a:r>
+            <a:endParaRPr lang="en-US" sz="1150" dirty="0"/>
+          </a:p>
+        </p:txBody>
+      </p:sp>
+      <p:sp>
+        <p:nvSpPr>
+          <p:cNvPr id="24" name="Shape 21"/>
+          <p:cNvSpPr/>
+          <p:nvPr/>
+        </p:nvSpPr>
+        <p:spPr>
+          <a:xfrm>
+            <a:off x="7315200" y="5321808"/>
+            <a:ext cx="82296" cy="82296"/>
+          </a:xfrm>
+          <a:prstGeom prst="rect">
+            <a:avLst/>
+          </a:prstGeom>
+          <a:solidFill>
+            <a:srgbClr val="003B71"/>
+          </a:solidFill>
+          <a:ln/>
+        </p:spPr>
+      </p:sp>
+      <p:sp>
+        <p:nvSpPr>
+          <p:cNvPr id="25" name="Text 22"/>
+          <p:cNvSpPr/>
+          <p:nvPr/>
+        </p:nvSpPr>
+        <p:spPr>
+          <a:xfrm>
+            <a:off x="7516368" y="5239512"/>
+            <a:ext cx="4297680" cy="365760"/>
+          </a:xfrm>
+          <a:prstGeom prst="rect">
+            <a:avLst/>
+          </a:prstGeom>
+          <a:noFill/>
+          <a:ln/>
+        </p:spPr>
+        <p:txBody>
+          <a:bodyPr wrap="square" rtlCol="0" anchor="t"/>
+          <a:lstStyle/>
+          <a:p>
+            <a:pPr indent="0" marL="0">
+              <a:buNone/>
+            </a:pPr>
+            <a:r>
+              <a:rPr lang="en-US" sz="1150" b="1" dirty="0">
+                <a:solidFill>
+                  <a:srgbClr val="003B71"/>
+                </a:solidFill>
+                <a:latin typeface="Arial" pitchFamily="34" charset="0"/>
+                <a:ea typeface="Arial" pitchFamily="34" charset="-122"/>
+                <a:cs typeface="Arial" pitchFamily="34" charset="-120"/>
+              </a:rPr>
+              <a:t>Client: </a:t>
+            </a:r>
+            <a:pPr indent="0" marL="0">
+              <a:buNone/>
+            </a:pPr>
+            <a:r>
+              <a:rPr lang="en-US" sz="1150" dirty="0">
+                <a:solidFill>
+                  <a:srgbClr val="1E293B"/>
+                </a:solidFill>
+                <a:latin typeface="Arial" pitchFamily="34" charset="0"/>
+                <a:ea typeface="Arial" pitchFamily="34" charset="-122"/>
+                <a:cs typeface="Arial" pitchFamily="34" charset="-120"/>
+              </a:rPr>
+              <a:t>Filter dashboard totals by client</a:t>
+            </a:r>
+            <a:endParaRPr lang="en-US" sz="1150" dirty="0"/>
+          </a:p>
+        </p:txBody>
+      </p:sp>
+      <p:sp>
+        <p:nvSpPr>
+          <p:cNvPr id="26" name="Shape 23"/>
+          <p:cNvSpPr/>
+          <p:nvPr/>
+        </p:nvSpPr>
+        <p:spPr>
+          <a:xfrm>
+            <a:off x="7315200" y="5705856"/>
+            <a:ext cx="82296" cy="82296"/>
+          </a:xfrm>
+          <a:prstGeom prst="rect">
+            <a:avLst/>
+          </a:prstGeom>
+          <a:solidFill>
+            <a:srgbClr val="003B71"/>
+          </a:solidFill>
+          <a:ln/>
+        </p:spPr>
+      </p:sp>
+      <p:sp>
+        <p:nvSpPr>
+          <p:cNvPr id="27" name="Text 24"/>
+          <p:cNvSpPr/>
+          <p:nvPr/>
+        </p:nvSpPr>
+        <p:spPr>
+          <a:xfrm>
+            <a:off x="7516368" y="5623560"/>
+            <a:ext cx="4297680" cy="365760"/>
+          </a:xfrm>
+          <a:prstGeom prst="rect">
+            <a:avLst/>
+          </a:prstGeom>
+          <a:noFill/>
+          <a:ln/>
+        </p:spPr>
+        <p:txBody>
+          <a:bodyPr wrap="square" rtlCol="0" anchor="t"/>
+          <a:lstStyle/>
+          <a:p>
+            <a:pPr indent="0" marL="0">
+              <a:buNone/>
+            </a:pPr>
+            <a:r>
+              <a:rPr lang="en-US" sz="1150" b="1" dirty="0">
+                <a:solidFill>
+                  <a:srgbClr val="003B71"/>
+                </a:solidFill>
+                <a:latin typeface="Arial" pitchFamily="34" charset="0"/>
+                <a:ea typeface="Arial" pitchFamily="34" charset="-122"/>
+                <a:cs typeface="Arial" pitchFamily="34" charset="-120"/>
+              </a:rPr>
+              <a:t>Store: </a:t>
+            </a:r>
+            <a:pPr indent="0" marL="0">
+              <a:buNone/>
+            </a:pPr>
+            <a:r>
+              <a:rPr lang="en-US" sz="1150" dirty="0">
+                <a:solidFill>
+                  <a:srgbClr val="1E293B"/>
+                </a:solidFill>
+                <a:latin typeface="Arial" pitchFamily="34" charset="0"/>
+                <a:ea typeface="Arial" pitchFamily="34" charset="-122"/>
+                <a:cs typeface="Arial" pitchFamily="34" charset="-120"/>
+              </a:rPr>
+              <a:t>Jump straight into a specific store's summary</a:t>
+            </a:r>
+            <a:endParaRPr lang="en-US" sz="1150" dirty="0"/>
           </a:p>
         </p:txBody>
       </p:sp>
@@ -5896,7 +10754,7 @@
                 <a:ea typeface="Arial" pitchFamily="34" charset="-122"/>
                 <a:cs typeface="Arial" pitchFamily="34" charset="-120"/>
               </a:rPr>
-              <a:t>STEP 5 · STORE VIEW</a:t>
+              <a:t>STEP 4B · QUICK FILTERS</a:t>
             </a:r>
             <a:endParaRPr lang="en-US" sz="1200" dirty="0"/>
           </a:p>
@@ -5935,7 +10793,7 @@
                 <a:ea typeface="Arial" pitchFamily="34" charset="-122"/>
                 <a:cs typeface="Arial" pitchFamily="34" charset="-120"/>
               </a:rPr>
-              <a:t>Store Summary</a:t>
+              <a:t>Dashboard — Region Dropdown Open</a:t>
             </a:r>
             <a:endParaRPr lang="en-US" sz="2600" dirty="0"/>
           </a:p>
@@ -5943,7 +10801,7 @@
       </p:sp>
       <p:pic>
         <p:nvPicPr>
-          <p:cNvPr id="5" name="Image 0" descr="/home/runner/workspace/screenshots/stockfix_guide/05_store_summary.jpg">    </p:cNvPr>
+          <p:cNvPr id="5" name="Image 0" descr="/home/runner/workspace/screenshots/stockfix_guide/13_dashboard_region_dropdown.jpg">    </p:cNvPr>
           <p:cNvPicPr>
             <a:picLocks noChangeAspect="1"/>
           </p:cNvPicPr>
@@ -5995,7 +10853,7 @@
         <p:spPr>
           <a:xfrm>
             <a:off x="7315200" y="1371600"/>
-            <a:ext cx="4480560" cy="1005840"/>
+            <a:ext cx="4480560" cy="822960"/>
           </a:xfrm>
           <a:prstGeom prst="rect">
             <a:avLst/>
@@ -6011,7 +10869,7 @@
               <a:buNone/>
             </a:pPr>
             <a:r>
-              <a:rPr lang="en-US" sz="1400" dirty="0">
+              <a:rPr lang="en-US" sz="1350" dirty="0">
                 <a:solidFill>
                   <a:srgbClr val="1E293B"/>
                 </a:solidFill>
@@ -6019,9 +10877,9 @@
                 <a:ea typeface="Arial" pitchFamily="34" charset="-122"/>
                 <a:cs typeface="Arial" pitchFamily="34" charset="-120"/>
               </a:rPr>
-              <a:t>A store-level rollup showing total/pending/done task counts, SOH and sales stats, SKUs out of stock, and a breakdown of actions needed for that store.</a:t>
-            </a:r>
-            <a:endParaRPr lang="en-US" sz="1400" dirty="0"/>
+              <a:t>The Quick Filters section has three dropdowns side by side. Here the Region dropdown is open, showing the list of available regions plus "All Regions".</a:t>
+            </a:r>
+            <a:endParaRPr lang="en-US" sz="1350" dirty="0"/>
           </a:p>
         </p:txBody>
       </p:sp>
@@ -6033,8 +10891,8 @@
         </p:nvSpPr>
         <p:spPr>
           <a:xfrm>
-            <a:off x="7315200" y="2514600"/>
-            <a:ext cx="4480560" cy="274320"/>
+            <a:off x="7315200" y="2331720"/>
+            <a:ext cx="4480560" cy="256032"/>
           </a:xfrm>
           <a:prstGeom prst="rect">
             <a:avLst/>
@@ -6072,8 +10930,8 @@
         </p:nvSpPr>
         <p:spPr>
           <a:xfrm>
-            <a:off x="7315200" y="2898648"/>
-            <a:ext cx="256032" cy="256032"/>
+            <a:off x="7315200" y="2670048"/>
+            <a:ext cx="237744" cy="237744"/>
           </a:xfrm>
           <a:prstGeom prst="ellipse">
             <a:avLst/>
@@ -6092,8 +10950,8 @@
         </p:nvSpPr>
         <p:spPr>
           <a:xfrm>
-            <a:off x="7315200" y="2898648"/>
-            <a:ext cx="256032" cy="256032"/>
+            <a:off x="7315200" y="2670048"/>
+            <a:ext cx="237744" cy="237744"/>
           </a:xfrm>
           <a:prstGeom prst="rect">
             <a:avLst/>
@@ -6109,7 +10967,7 @@
               <a:buNone/>
             </a:pPr>
             <a:r>
-              <a:rPr lang="en-US" sz="1100" b="1" dirty="0">
+              <a:rPr lang="en-US" sz="1050" b="1" dirty="0">
                 <a:solidFill>
                   <a:srgbClr val="FFFFFF"/>
                 </a:solidFill>
@@ -6119,7 +10977,7 @@
               </a:rPr>
               <a:t>1</a:t>
             </a:r>
-            <a:endParaRPr lang="en-US" sz="1100" dirty="0"/>
+            <a:endParaRPr lang="en-US" sz="1050" dirty="0"/>
           </a:p>
         </p:txBody>
       </p:sp>
@@ -6131,8 +10989,8 @@
         </p:nvSpPr>
         <p:spPr>
           <a:xfrm>
-            <a:off x="7699248" y="2880360"/>
-            <a:ext cx="4114800" cy="457200"/>
+            <a:off x="7680960" y="2633472"/>
+            <a:ext cx="4114800" cy="384048"/>
           </a:xfrm>
           <a:prstGeom prst="rect">
             <a:avLst/>
@@ -6148,7 +11006,7 @@
               <a:buNone/>
             </a:pPr>
             <a:r>
-              <a:rPr lang="en-US" sz="1250" dirty="0">
+              <a:rPr lang="en-US" sz="1200" dirty="0">
                 <a:solidFill>
                   <a:srgbClr val="1E293B"/>
                 </a:solidFill>
@@ -6156,9 +11014,9 @@
                 <a:ea typeface="Arial" pitchFamily="34" charset="-122"/>
                 <a:cs typeface="Arial" pitchFamily="34" charset="-120"/>
               </a:rPr>
-              <a:t>Tap a store name/tile from the Dashboard</a:t>
-            </a:r>
-            <a:endParaRPr lang="en-US" sz="1250" dirty="0"/>
+              <a:t>On the Dashboard, find the "Quick Filters" card</a:t>
+            </a:r>
+            <a:endParaRPr lang="en-US" sz="1200" dirty="0"/>
           </a:p>
         </p:txBody>
       </p:sp>
@@ -6170,8 +11028,8 @@
         </p:nvSpPr>
         <p:spPr>
           <a:xfrm>
-            <a:off x="7315200" y="3465576"/>
-            <a:ext cx="256032" cy="256032"/>
+            <a:off x="7315200" y="3127248"/>
+            <a:ext cx="237744" cy="237744"/>
           </a:xfrm>
           <a:prstGeom prst="ellipse">
             <a:avLst/>
@@ -6190,8 +11048,8 @@
         </p:nvSpPr>
         <p:spPr>
           <a:xfrm>
-            <a:off x="7315200" y="3465576"/>
-            <a:ext cx="256032" cy="256032"/>
+            <a:off x="7315200" y="3127248"/>
+            <a:ext cx="237744" cy="237744"/>
           </a:xfrm>
           <a:prstGeom prst="rect">
             <a:avLst/>
@@ -6207,7 +11065,7 @@
               <a:buNone/>
             </a:pPr>
             <a:r>
-              <a:rPr lang="en-US" sz="1100" b="1" dirty="0">
+              <a:rPr lang="en-US" sz="1050" b="1" dirty="0">
                 <a:solidFill>
                   <a:srgbClr val="FFFFFF"/>
                 </a:solidFill>
@@ -6217,7 +11075,7 @@
               </a:rPr>
               <a:t>2</a:t>
             </a:r>
-            <a:endParaRPr lang="en-US" sz="1100" dirty="0"/>
+            <a:endParaRPr lang="en-US" sz="1050" dirty="0"/>
           </a:p>
         </p:txBody>
       </p:sp>
@@ -6229,8 +11087,8 @@
         </p:nvSpPr>
         <p:spPr>
           <a:xfrm>
-            <a:off x="7699248" y="3447288"/>
-            <a:ext cx="4114800" cy="457200"/>
+            <a:off x="7680960" y="3090672"/>
+            <a:ext cx="4114800" cy="384048"/>
           </a:xfrm>
           <a:prstGeom prst="rect">
             <a:avLst/>
@@ -6246,7 +11104,7 @@
               <a:buNone/>
             </a:pPr>
             <a:r>
-              <a:rPr lang="en-US" sz="1250" dirty="0">
+              <a:rPr lang="en-US" sz="1200" dirty="0">
                 <a:solidFill>
                   <a:srgbClr val="1E293B"/>
                 </a:solidFill>
@@ -6254,9 +11112,9 @@
                 <a:ea typeface="Arial" pitchFamily="34" charset="-122"/>
                 <a:cs typeface="Arial" pitchFamily="34" charset="-120"/>
               </a:rPr>
-              <a:t>Review store-level totals and stock health</a:t>
-            </a:r>
-            <a:endParaRPr lang="en-US" sz="1250" dirty="0"/>
+              <a:t>Tap the "Region" dropdown to filter by area</a:t>
+            </a:r>
+            <a:endParaRPr lang="en-US" sz="1200" dirty="0"/>
           </a:p>
         </p:txBody>
       </p:sp>
@@ -6268,8 +11126,8 @@
         </p:nvSpPr>
         <p:spPr>
           <a:xfrm>
-            <a:off x="7315200" y="4032504"/>
-            <a:ext cx="256032" cy="256032"/>
+            <a:off x="7315200" y="3584448"/>
+            <a:ext cx="237744" cy="237744"/>
           </a:xfrm>
           <a:prstGeom prst="ellipse">
             <a:avLst/>
@@ -6288,8 +11146,8 @@
         </p:nvSpPr>
         <p:spPr>
           <a:xfrm>
-            <a:off x="7315200" y="4032504"/>
-            <a:ext cx="256032" cy="256032"/>
+            <a:off x="7315200" y="3584448"/>
+            <a:ext cx="237744" cy="237744"/>
           </a:xfrm>
           <a:prstGeom prst="rect">
             <a:avLst/>
@@ -6305,7 +11163,7 @@
               <a:buNone/>
             </a:pPr>
             <a:r>
-              <a:rPr lang="en-US" sz="1100" b="1" dirty="0">
+              <a:rPr lang="en-US" sz="1050" b="1" dirty="0">
                 <a:solidFill>
                   <a:srgbClr val="FFFFFF"/>
                 </a:solidFill>
@@ -6315,7 +11173,7 @@
               </a:rPr>
               <a:t>3</a:t>
             </a:r>
-            <a:endParaRPr lang="en-US" sz="1100" dirty="0"/>
+            <a:endParaRPr lang="en-US" sz="1050" dirty="0"/>
           </a:p>
         </p:txBody>
       </p:sp>
@@ -6327,8 +11185,8 @@
         </p:nvSpPr>
         <p:spPr>
           <a:xfrm>
-            <a:off x="7699248" y="4014216"/>
-            <a:ext cx="4114800" cy="457200"/>
+            <a:off x="7680960" y="3547872"/>
+            <a:ext cx="4114800" cy="384048"/>
           </a:xfrm>
           <a:prstGeom prst="rect">
             <a:avLst/>
@@ -6344,7 +11202,7 @@
               <a:buNone/>
             </a:pPr>
             <a:r>
-              <a:rPr lang="en-US" sz="1250" dirty="0">
+              <a:rPr lang="en-US" sz="1200" dirty="0">
                 <a:solidFill>
                   <a:srgbClr val="1E293B"/>
                 </a:solidFill>
@@ -6352,9 +11210,9 @@
                 <a:ea typeface="Arial" pitchFamily="34" charset="-122"/>
                 <a:cs typeface="Arial" pitchFamily="34" charset="-120"/>
               </a:rPr>
-              <a:t>Use "Urgent Only" or "OOS Only" quick filters</a:t>
-            </a:r>
-            <a:endParaRPr lang="en-US" sz="1250" dirty="0"/>
+              <a:t>Tap "Client" to filter by client instead</a:t>
+            </a:r>
+            <a:endParaRPr lang="en-US" sz="1200" dirty="0"/>
           </a:p>
         </p:txBody>
       </p:sp>
@@ -6366,8 +11224,8 @@
         </p:nvSpPr>
         <p:spPr>
           <a:xfrm>
-            <a:off x="7315200" y="4599432"/>
-            <a:ext cx="256032" cy="256032"/>
+            <a:off x="7315200" y="4041648"/>
+            <a:ext cx="237744" cy="237744"/>
           </a:xfrm>
           <a:prstGeom prst="ellipse">
             <a:avLst/>
@@ -6386,8 +11244,86 @@
         </p:nvSpPr>
         <p:spPr>
           <a:xfrm>
+            <a:off x="7315200" y="4041648"/>
+            <a:ext cx="237744" cy="237744"/>
+          </a:xfrm>
+          <a:prstGeom prst="rect">
+            <a:avLst/>
+          </a:prstGeom>
+          <a:noFill/>
+          <a:ln/>
+        </p:spPr>
+        <p:txBody>
+          <a:bodyPr wrap="square" rtlCol="0" anchor="ctr"/>
+          <a:lstStyle/>
+          <a:p>
+            <a:pPr algn="ctr" indent="0" marL="0">
+              <a:buNone/>
+            </a:pPr>
+            <a:r>
+              <a:rPr lang="en-US" sz="1050" b="1" dirty="0">
+                <a:solidFill>
+                  <a:srgbClr val="FFFFFF"/>
+                </a:solidFill>
+                <a:latin typeface="Arial" pitchFamily="34" charset="0"/>
+                <a:ea typeface="Arial" pitchFamily="34" charset="-122"/>
+                <a:cs typeface="Arial" pitchFamily="34" charset="-120"/>
+              </a:rPr>
+              <a:t>4</a:t>
+            </a:r>
+            <a:endParaRPr lang="en-US" sz="1050" dirty="0"/>
+          </a:p>
+        </p:txBody>
+      </p:sp>
+      <p:sp>
+        <p:nvSpPr>
+          <p:cNvPr id="20" name="Text 17"/>
+          <p:cNvSpPr/>
+          <p:nvPr/>
+        </p:nvSpPr>
+        <p:spPr>
+          <a:xfrm>
+            <a:off x="7680960" y="4005072"/>
+            <a:ext cx="4114800" cy="384048"/>
+          </a:xfrm>
+          <a:prstGeom prst="rect">
+            <a:avLst/>
+          </a:prstGeom>
+          <a:noFill/>
+          <a:ln/>
+        </p:spPr>
+        <p:txBody>
+          <a:bodyPr wrap="square" rtlCol="0" anchor="t"/>
+          <a:lstStyle/>
+          <a:p>
+            <a:pPr indent="0" marL="0">
+              <a:buNone/>
+            </a:pPr>
+            <a:r>
+              <a:rPr lang="en-US" sz="1200" dirty="0">
+                <a:solidFill>
+                  <a:srgbClr val="1E293B"/>
+                </a:solidFill>
+                <a:latin typeface="Arial" pitchFamily="34" charset="0"/>
+                <a:ea typeface="Arial" pitchFamily="34" charset="-122"/>
+                <a:cs typeface="Arial" pitchFamily="34" charset="-120"/>
+              </a:rPr>
+              <a:t>Tap "Select Store" to jump directly into one store</a:t>
+            </a:r>
+            <a:endParaRPr lang="en-US" sz="1200" dirty="0"/>
+          </a:p>
+        </p:txBody>
+      </p:sp>
+      <p:sp>
+        <p:nvSpPr>
+          <p:cNvPr id="21" name="Text 18"/>
+          <p:cNvSpPr/>
+          <p:nvPr/>
+        </p:nvSpPr>
+        <p:spPr>
+          <a:xfrm>
             <a:off x="7315200" y="4599432"/>
-            <a:ext cx="256032" cy="256032"/>
+            <a:ext cx="4480560" cy="256032"/>
           </a:xfrm>
           <a:prstGeom prst="rect">
             <a:avLst/>
@@ -6399,19 +11335,19 @@
           <a:bodyPr wrap="square" rtlCol="0" anchor="ctr"/>
           <a:lstStyle/>
           <a:p>
-            <a:pPr algn="ctr" indent="0" marL="0">
-              <a:buNone/>
-            </a:pPr>
-            <a:r>
-              <a:rPr lang="en-US" sz="1100" b="1" dirty="0">
-                <a:solidFill>
-                  <a:srgbClr val="FFFFFF"/>
-                </a:solidFill>
-                <a:latin typeface="Arial" pitchFamily="34" charset="0"/>
-                <a:ea typeface="Arial" pitchFamily="34" charset="-122"/>
-                <a:cs typeface="Arial" pitchFamily="34" charset="-120"/>
-              </a:rPr>
-              <a:t>4</a:t>
+            <a:pPr indent="0" marL="0">
+              <a:buNone/>
+            </a:pPr>
+            <a:r>
+              <a:rPr lang="en-US" sz="1100" b="1" spc="100" kern="0" dirty="0">
+                <a:solidFill>
+                  <a:srgbClr val="64748B"/>
+                </a:solidFill>
+                <a:latin typeface="Arial" pitchFamily="34" charset="0"/>
+                <a:ea typeface="Arial" pitchFamily="34" charset="-122"/>
+                <a:cs typeface="Arial" pitchFamily="34" charset="-120"/>
+              </a:rPr>
+              <a:t>DROPDOWNS / FILTERS ON THIS SCREEN</a:t>
             </a:r>
             <a:endParaRPr lang="en-US" sz="1100" dirty="0"/>
           </a:p>
@@ -6419,14 +11355,34 @@
       </p:sp>
       <p:sp>
         <p:nvSpPr>
-          <p:cNvPr id="20" name="Text 17"/>
-          <p:cNvSpPr/>
-          <p:nvPr/>
-        </p:nvSpPr>
-        <p:spPr>
-          <a:xfrm>
-            <a:off x="7699248" y="4581144"/>
-            <a:ext cx="4114800" cy="457200"/>
+          <p:cNvPr id="22" name="Shape 19"/>
+          <p:cNvSpPr/>
+          <p:nvPr/>
+        </p:nvSpPr>
+        <p:spPr>
+          <a:xfrm>
+            <a:off x="7315200" y="4937760"/>
+            <a:ext cx="82296" cy="82296"/>
+          </a:xfrm>
+          <a:prstGeom prst="rect">
+            <a:avLst/>
+          </a:prstGeom>
+          <a:solidFill>
+            <a:srgbClr val="003B71"/>
+          </a:solidFill>
+          <a:ln/>
+        </p:spPr>
+      </p:sp>
+      <p:sp>
+        <p:nvSpPr>
+          <p:cNvPr id="23" name="Text 20"/>
+          <p:cNvSpPr/>
+          <p:nvPr/>
+        </p:nvSpPr>
+        <p:spPr>
+          <a:xfrm>
+            <a:off x="7516368" y="4855464"/>
+            <a:ext cx="4297680" cy="365760"/>
           </a:xfrm>
           <a:prstGeom prst="rect">
             <a:avLst/>
@@ -6442,7 +11398,21 @@
               <a:buNone/>
             </a:pPr>
             <a:r>
-              <a:rPr lang="en-US" sz="1250" dirty="0">
+              <a:rPr lang="en-US" sz="1150" b="1" dirty="0">
+                <a:solidFill>
+                  <a:srgbClr val="003B71"/>
+                </a:solidFill>
+                <a:latin typeface="Arial" pitchFamily="34" charset="0"/>
+                <a:ea typeface="Arial" pitchFamily="34" charset="-122"/>
+                <a:cs typeface="Arial" pitchFamily="34" charset="-120"/>
+              </a:rPr>
+              <a:t>Region: </a:t>
+            </a:r>
+            <a:pPr indent="0" marL="0">
+              <a:buNone/>
+            </a:pPr>
+            <a:r>
+              <a:rPr lang="en-US" sz="1150" dirty="0">
                 <a:solidFill>
                   <a:srgbClr val="1E293B"/>
                 </a:solidFill>
@@ -6450,9 +11420,155 @@
                 <a:ea typeface="Arial" pitchFamily="34" charset="-122"/>
                 <a:cs typeface="Arial" pitchFamily="34" charset="-120"/>
               </a:rPr>
-              <a:t>Drill into individual tasks from the list below</a:t>
-            </a:r>
-            <a:endParaRPr lang="en-US" sz="1250" dirty="0"/>
+              <a:t>Currently open — shows "All Regions" plus each region</a:t>
+            </a:r>
+            <a:endParaRPr lang="en-US" sz="1150" dirty="0"/>
+          </a:p>
+        </p:txBody>
+      </p:sp>
+      <p:sp>
+        <p:nvSpPr>
+          <p:cNvPr id="24" name="Shape 21"/>
+          <p:cNvSpPr/>
+          <p:nvPr/>
+        </p:nvSpPr>
+        <p:spPr>
+          <a:xfrm>
+            <a:off x="7315200" y="5321808"/>
+            <a:ext cx="82296" cy="82296"/>
+          </a:xfrm>
+          <a:prstGeom prst="rect">
+            <a:avLst/>
+          </a:prstGeom>
+          <a:solidFill>
+            <a:srgbClr val="003B71"/>
+          </a:solidFill>
+          <a:ln/>
+        </p:spPr>
+      </p:sp>
+      <p:sp>
+        <p:nvSpPr>
+          <p:cNvPr id="25" name="Text 22"/>
+          <p:cNvSpPr/>
+          <p:nvPr/>
+        </p:nvSpPr>
+        <p:spPr>
+          <a:xfrm>
+            <a:off x="7516368" y="5239512"/>
+            <a:ext cx="4297680" cy="365760"/>
+          </a:xfrm>
+          <a:prstGeom prst="rect">
+            <a:avLst/>
+          </a:prstGeom>
+          <a:noFill/>
+          <a:ln/>
+        </p:spPr>
+        <p:txBody>
+          <a:bodyPr wrap="square" rtlCol="0" anchor="t"/>
+          <a:lstStyle/>
+          <a:p>
+            <a:pPr indent="0" marL="0">
+              <a:buNone/>
+            </a:pPr>
+            <a:r>
+              <a:rPr lang="en-US" sz="1150" b="1" dirty="0">
+                <a:solidFill>
+                  <a:srgbClr val="003B71"/>
+                </a:solidFill>
+                <a:latin typeface="Arial" pitchFamily="34" charset="0"/>
+                <a:ea typeface="Arial" pitchFamily="34" charset="-122"/>
+                <a:cs typeface="Arial" pitchFamily="34" charset="-120"/>
+              </a:rPr>
+              <a:t>Client: </a:t>
+            </a:r>
+            <a:pPr indent="0" marL="0">
+              <a:buNone/>
+            </a:pPr>
+            <a:r>
+              <a:rPr lang="en-US" sz="1150" dirty="0">
+                <a:solidFill>
+                  <a:srgbClr val="1E293B"/>
+                </a:solidFill>
+                <a:latin typeface="Arial" pitchFamily="34" charset="0"/>
+                <a:ea typeface="Arial" pitchFamily="34" charset="-122"/>
+                <a:cs typeface="Arial" pitchFamily="34" charset="-120"/>
+              </a:rPr>
+              <a:t>Filters KPIs and charts to one client</a:t>
+            </a:r>
+            <a:endParaRPr lang="en-US" sz="1150" dirty="0"/>
+          </a:p>
+        </p:txBody>
+      </p:sp>
+      <p:sp>
+        <p:nvSpPr>
+          <p:cNvPr id="26" name="Shape 23"/>
+          <p:cNvSpPr/>
+          <p:nvPr/>
+        </p:nvSpPr>
+        <p:spPr>
+          <a:xfrm>
+            <a:off x="7315200" y="5705856"/>
+            <a:ext cx="82296" cy="82296"/>
+          </a:xfrm>
+          <a:prstGeom prst="rect">
+            <a:avLst/>
+          </a:prstGeom>
+          <a:solidFill>
+            <a:srgbClr val="003B71"/>
+          </a:solidFill>
+          <a:ln/>
+        </p:spPr>
+      </p:sp>
+      <p:sp>
+        <p:nvSpPr>
+          <p:cNvPr id="27" name="Text 24"/>
+          <p:cNvSpPr/>
+          <p:nvPr/>
+        </p:nvSpPr>
+        <p:spPr>
+          <a:xfrm>
+            <a:off x="7516368" y="5623560"/>
+            <a:ext cx="4297680" cy="365760"/>
+          </a:xfrm>
+          <a:prstGeom prst="rect">
+            <a:avLst/>
+          </a:prstGeom>
+          <a:noFill/>
+          <a:ln/>
+        </p:spPr>
+        <p:txBody>
+          <a:bodyPr wrap="square" rtlCol="0" anchor="t"/>
+          <a:lstStyle/>
+          <a:p>
+            <a:pPr indent="0" marL="0">
+              <a:buNone/>
+            </a:pPr>
+            <a:r>
+              <a:rPr lang="en-US" sz="1150" b="1" dirty="0">
+                <a:solidFill>
+                  <a:srgbClr val="003B71"/>
+                </a:solidFill>
+                <a:latin typeface="Arial" pitchFamily="34" charset="0"/>
+                <a:ea typeface="Arial" pitchFamily="34" charset="-122"/>
+                <a:cs typeface="Arial" pitchFamily="34" charset="-120"/>
+              </a:rPr>
+              <a:t>Store: </a:t>
+            </a:r>
+            <a:pPr indent="0" marL="0">
+              <a:buNone/>
+            </a:pPr>
+            <a:r>
+              <a:rPr lang="en-US" sz="1150" dirty="0">
+                <a:solidFill>
+                  <a:srgbClr val="1E293B"/>
+                </a:solidFill>
+                <a:latin typeface="Arial" pitchFamily="34" charset="0"/>
+                <a:ea typeface="Arial" pitchFamily="34" charset="-122"/>
+                <a:cs typeface="Arial" pitchFamily="34" charset="-120"/>
+              </a:rPr>
+              <a:t>Navigates straight to that store's summary page</a:t>
+            </a:r>
+            <a:endParaRPr lang="en-US" sz="1150" dirty="0"/>
           </a:p>
         </p:txBody>
       </p:sp>
@@ -6541,7 +11657,7 @@
                 <a:ea typeface="Arial" pitchFamily="34" charset="-122"/>
                 <a:cs typeface="Arial" pitchFamily="34" charset="-120"/>
               </a:rPr>
-              <a:t>STEP 6 · MANAGER TOOLS</a:t>
+              <a:t>STEP 5 · TASK LIST — WHERE REPS WORK</a:t>
             </a:r>
             <a:endParaRPr lang="en-US" sz="1200" dirty="0"/>
           </a:p>
@@ -6580,7 +11696,7 @@
                 <a:ea typeface="Arial" pitchFamily="34" charset="-122"/>
                 <a:cs typeface="Arial" pitchFamily="34" charset="-120"/>
               </a:rPr>
-              <a:t>Import Data</a:t>
+              <a:t>Tasks Screen</a:t>
             </a:r>
             <a:endParaRPr lang="en-US" sz="2600" dirty="0"/>
           </a:p>
@@ -6588,7 +11704,7 @@
       </p:sp>
       <p:pic>
         <p:nvPicPr>
-          <p:cNvPr id="5" name="Image 0" descr="/home/runner/workspace/screenshots/stockfix_guide/06_import_data.jpg">    </p:cNvPr>
+          <p:cNvPr id="5" name="Image 0" descr="/home/runner/workspace/screenshots/stockfix_guide/11_tasks_list.jpg">    </p:cNvPr>
           <p:cNvPicPr>
             <a:picLocks noChangeAspect="1"/>
           </p:cNvPicPr>
@@ -6640,7 +11756,7 @@
         <p:spPr>
           <a:xfrm>
             <a:off x="7315200" y="1371600"/>
-            <a:ext cx="4480560" cy="1005840"/>
+            <a:ext cx="4480560" cy="822960"/>
           </a:xfrm>
           <a:prstGeom prst="rect">
             <a:avLst/>
@@ -6656,7 +11772,7 @@
               <a:buNone/>
             </a:pPr>
             <a:r>
-              <a:rPr lang="en-US" sz="1400" dirty="0">
+              <a:rPr lang="en-US" sz="1350" dirty="0">
                 <a:solidFill>
                   <a:srgbClr val="1E293B"/>
                 </a:solidFill>
@@ -6664,9 +11780,9 @@
                 <a:ea typeface="Arial" pitchFamily="34" charset="-122"/>
                 <a:cs typeface="Arial" pitchFamily="34" charset="-120"/>
               </a:rPr>
-              <a:t>Managers bulk-load the day's or week's task list by uploading an Excel or CSV file with the expected column headers.</a:t>
-            </a:r>
-            <a:endParaRPr lang="en-US" sz="1400" dirty="0"/>
+              <a:t>This is where a rep actually sees and works their tasks — grouped by action type (e.g. "Urgent: Place Order"), with search and Pending/Completed tabs.</a:t>
+            </a:r>
+            <a:endParaRPr lang="en-US" sz="1350" dirty="0"/>
           </a:p>
         </p:txBody>
       </p:sp>
@@ -6678,8 +11794,8 @@
         </p:nvSpPr>
         <p:spPr>
           <a:xfrm>
-            <a:off x="7315200" y="2514600"/>
-            <a:ext cx="4480560" cy="274320"/>
+            <a:off x="7315200" y="2331720"/>
+            <a:ext cx="4480560" cy="256032"/>
           </a:xfrm>
           <a:prstGeom prst="rect">
             <a:avLst/>
@@ -6717,8 +11833,8 @@
         </p:nvSpPr>
         <p:spPr>
           <a:xfrm>
-            <a:off x="7315200" y="2898648"/>
-            <a:ext cx="256032" cy="256032"/>
+            <a:off x="7315200" y="2670048"/>
+            <a:ext cx="237744" cy="237744"/>
           </a:xfrm>
           <a:prstGeom prst="ellipse">
             <a:avLst/>
@@ -6737,8 +11853,8 @@
         </p:nvSpPr>
         <p:spPr>
           <a:xfrm>
-            <a:off x="7315200" y="2898648"/>
-            <a:ext cx="256032" cy="256032"/>
+            <a:off x="7315200" y="2670048"/>
+            <a:ext cx="237744" cy="237744"/>
           </a:xfrm>
           <a:prstGeom prst="rect">
             <a:avLst/>
@@ -6754,7 +11870,7 @@
               <a:buNone/>
             </a:pPr>
             <a:r>
-              <a:rPr lang="en-US" sz="1100" b="1" dirty="0">
+              <a:rPr lang="en-US" sz="1050" b="1" dirty="0">
                 <a:solidFill>
                   <a:srgbClr val="FFFFFF"/>
                 </a:solidFill>
@@ -6764,7 +11880,7 @@
               </a:rPr>
               <a:t>1</a:t>
             </a:r>
-            <a:endParaRPr lang="en-US" sz="1100" dirty="0"/>
+            <a:endParaRPr lang="en-US" sz="1050" dirty="0"/>
           </a:p>
         </p:txBody>
       </p:sp>
@@ -6776,8 +11892,8 @@
         </p:nvSpPr>
         <p:spPr>
           <a:xfrm>
-            <a:off x="7699248" y="2880360"/>
-            <a:ext cx="4114800" cy="457200"/>
+            <a:off x="7680960" y="2633472"/>
+            <a:ext cx="4114800" cy="384048"/>
           </a:xfrm>
           <a:prstGeom prst="rect">
             <a:avLst/>
@@ -6793,7 +11909,7 @@
               <a:buNone/>
             </a:pPr>
             <a:r>
-              <a:rPr lang="en-US" sz="1250" dirty="0">
+              <a:rPr lang="en-US" sz="1200" dirty="0">
                 <a:solidFill>
                   <a:srgbClr val="1E293B"/>
                 </a:solidFill>
@@ -6801,9 +11917,9 @@
                 <a:ea typeface="Arial" pitchFamily="34" charset="-122"/>
                 <a:cs typeface="Arial" pitchFamily="34" charset="-120"/>
               </a:rPr>
-              <a:t>From the Dashboard, tap "Import"</a:t>
-            </a:r>
-            <a:endParaRPr lang="en-US" sz="1250" dirty="0"/>
+              <a:t>Reached by tapping any KPI card, or the "Tasks" icon in the bottom nav</a:t>
+            </a:r>
+            <a:endParaRPr lang="en-US" sz="1200" dirty="0"/>
           </a:p>
         </p:txBody>
       </p:sp>
@@ -6815,8 +11931,8 @@
         </p:nvSpPr>
         <p:spPr>
           <a:xfrm>
-            <a:off x="7315200" y="3465576"/>
-            <a:ext cx="256032" cy="256032"/>
+            <a:off x="7315200" y="3127248"/>
+            <a:ext cx="237744" cy="237744"/>
           </a:xfrm>
           <a:prstGeom prst="ellipse">
             <a:avLst/>
@@ -6835,8 +11951,8 @@
         </p:nvSpPr>
         <p:spPr>
           <a:xfrm>
-            <a:off x="7315200" y="3465576"/>
-            <a:ext cx="256032" cy="256032"/>
+            <a:off x="7315200" y="3127248"/>
+            <a:ext cx="237744" cy="237744"/>
           </a:xfrm>
           <a:prstGeom prst="rect">
             <a:avLst/>
@@ -6852,7 +11968,7 @@
               <a:buNone/>
             </a:pPr>
             <a:r>
-              <a:rPr lang="en-US" sz="1100" b="1" dirty="0">
+              <a:rPr lang="en-US" sz="1050" b="1" dirty="0">
                 <a:solidFill>
                   <a:srgbClr val="FFFFFF"/>
                 </a:solidFill>
@@ -6862,7 +11978,7 @@
               </a:rPr>
               <a:t>2</a:t>
             </a:r>
-            <a:endParaRPr lang="en-US" sz="1100" dirty="0"/>
+            <a:endParaRPr lang="en-US" sz="1050" dirty="0"/>
           </a:p>
         </p:txBody>
       </p:sp>
@@ -6874,8 +11990,8 @@
         </p:nvSpPr>
         <p:spPr>
           <a:xfrm>
-            <a:off x="7699248" y="3447288"/>
-            <a:ext cx="4114800" cy="457200"/>
+            <a:off x="7680960" y="3090672"/>
+            <a:ext cx="4114800" cy="384048"/>
           </a:xfrm>
           <a:prstGeom prst="rect">
             <a:avLst/>
@@ -6891,7 +12007,7 @@
               <a:buNone/>
             </a:pPr>
             <a:r>
-              <a:rPr lang="en-US" sz="1250" dirty="0">
+              <a:rPr lang="en-US" sz="1200" dirty="0">
                 <a:solidFill>
                   <a:srgbClr val="1E293B"/>
                 </a:solidFill>
@@ -6899,9 +12015,9 @@
                 <a:ea typeface="Arial" pitchFamily="34" charset="-122"/>
                 <a:cs typeface="Arial" pitchFamily="34" charset="-120"/>
               </a:rPr>
-              <a:t>Choose your spreadsheet file (.xlsx or .csv)</a:t>
-            </a:r>
-            <a:endParaRPr lang="en-US" sz="1250" dirty="0"/>
+              <a:t>Use the search bar to find a task by article, barcode, or client</a:t>
+            </a:r>
+            <a:endParaRPr lang="en-US" sz="1200" dirty="0"/>
           </a:p>
         </p:txBody>
       </p:sp>
@@ -6913,8 +12029,8 @@
         </p:nvSpPr>
         <p:spPr>
           <a:xfrm>
-            <a:off x="7315200" y="4032504"/>
-            <a:ext cx="256032" cy="256032"/>
+            <a:off x="7315200" y="3584448"/>
+            <a:ext cx="237744" cy="237744"/>
           </a:xfrm>
           <a:prstGeom prst="ellipse">
             <a:avLst/>
@@ -6933,8 +12049,8 @@
         </p:nvSpPr>
         <p:spPr>
           <a:xfrm>
-            <a:off x="7315200" y="4032504"/>
-            <a:ext cx="256032" cy="256032"/>
+            <a:off x="7315200" y="3584448"/>
+            <a:ext cx="237744" cy="237744"/>
           </a:xfrm>
           <a:prstGeom prst="rect">
             <a:avLst/>
@@ -6950,7 +12066,7 @@
               <a:buNone/>
             </a:pPr>
             <a:r>
-              <a:rPr lang="en-US" sz="1100" b="1" dirty="0">
+              <a:rPr lang="en-US" sz="1050" b="1" dirty="0">
                 <a:solidFill>
                   <a:srgbClr val="FFFFFF"/>
                 </a:solidFill>
@@ -6960,7 +12076,7 @@
               </a:rPr>
               <a:t>3</a:t>
             </a:r>
-            <a:endParaRPr lang="en-US" sz="1100" dirty="0"/>
+            <a:endParaRPr lang="en-US" sz="1050" dirty="0"/>
           </a:p>
         </p:txBody>
       </p:sp>
@@ -6972,8 +12088,8 @@
         </p:nvSpPr>
         <p:spPr>
           <a:xfrm>
-            <a:off x="7699248" y="4014216"/>
-            <a:ext cx="4114800" cy="457200"/>
+            <a:off x="7680960" y="3547872"/>
+            <a:ext cx="4114800" cy="384048"/>
           </a:xfrm>
           <a:prstGeom prst="rect">
             <a:avLst/>
@@ -6989,7 +12105,7 @@
               <a:buNone/>
             </a:pPr>
             <a:r>
-              <a:rPr lang="en-US" sz="1250" dirty="0">
+              <a:rPr lang="en-US" sz="1200" dirty="0">
                 <a:solidFill>
                   <a:srgbClr val="1E293B"/>
                 </a:solidFill>
@@ -6997,9 +12113,9 @@
                 <a:ea typeface="Arial" pitchFamily="34" charset="-122"/>
                 <a:cs typeface="Arial" pitchFamily="34" charset="-120"/>
               </a:rPr>
-              <a:t>Optionally enable "Full Refresh" to clear old tasks first</a:t>
-            </a:r>
-            <a:endParaRPr lang="en-US" sz="1250" dirty="0"/>
+              <a:t>Switch between "Pending" and "Completed" tabs</a:t>
+            </a:r>
+            <a:endParaRPr lang="en-US" sz="1200" dirty="0"/>
           </a:p>
         </p:txBody>
       </p:sp>
@@ -7011,8 +12127,8 @@
         </p:nvSpPr>
         <p:spPr>
           <a:xfrm>
-            <a:off x="7315200" y="4599432"/>
-            <a:ext cx="256032" cy="256032"/>
+            <a:off x="7315200" y="4041648"/>
+            <a:ext cx="237744" cy="237744"/>
           </a:xfrm>
           <a:prstGeom prst="ellipse">
             <a:avLst/>
@@ -7031,8 +12147,86 @@
         </p:nvSpPr>
         <p:spPr>
           <a:xfrm>
+            <a:off x="7315200" y="4041648"/>
+            <a:ext cx="237744" cy="237744"/>
+          </a:xfrm>
+          <a:prstGeom prst="rect">
+            <a:avLst/>
+          </a:prstGeom>
+          <a:noFill/>
+          <a:ln/>
+        </p:spPr>
+        <p:txBody>
+          <a:bodyPr wrap="square" rtlCol="0" anchor="ctr"/>
+          <a:lstStyle/>
+          <a:p>
+            <a:pPr algn="ctr" indent="0" marL="0">
+              <a:buNone/>
+            </a:pPr>
+            <a:r>
+              <a:rPr lang="en-US" sz="1050" b="1" dirty="0">
+                <a:solidFill>
+                  <a:srgbClr val="FFFFFF"/>
+                </a:solidFill>
+                <a:latin typeface="Arial" pitchFamily="34" charset="0"/>
+                <a:ea typeface="Arial" pitchFamily="34" charset="-122"/>
+                <a:cs typeface="Arial" pitchFamily="34" charset="-120"/>
+              </a:rPr>
+              <a:t>4</a:t>
+            </a:r>
+            <a:endParaRPr lang="en-US" sz="1050" dirty="0"/>
+          </a:p>
+        </p:txBody>
+      </p:sp>
+      <p:sp>
+        <p:nvSpPr>
+          <p:cNvPr id="20" name="Text 17"/>
+          <p:cNvSpPr/>
+          <p:nvPr/>
+        </p:nvSpPr>
+        <p:spPr>
+          <a:xfrm>
+            <a:off x="7680960" y="4005072"/>
+            <a:ext cx="4114800" cy="384048"/>
+          </a:xfrm>
+          <a:prstGeom prst="rect">
+            <a:avLst/>
+          </a:prstGeom>
+          <a:noFill/>
+          <a:ln/>
+        </p:spPr>
+        <p:txBody>
+          <a:bodyPr wrap="square" rtlCol="0" anchor="t"/>
+          <a:lstStyle/>
+          <a:p>
+            <a:pPr indent="0" marL="0">
+              <a:buNone/>
+            </a:pPr>
+            <a:r>
+              <a:rPr lang="en-US" sz="1200" dirty="0">
+                <a:solidFill>
+                  <a:srgbClr val="1E293B"/>
+                </a:solidFill>
+                <a:latin typeface="Arial" pitchFamily="34" charset="0"/>
+                <a:ea typeface="Arial" pitchFamily="34" charset="-122"/>
+                <a:cs typeface="Arial" pitchFamily="34" charset="-120"/>
+              </a:rPr>
+              <a:t>Tap any task card to open it and capture feedback</a:t>
+            </a:r>
+            <a:endParaRPr lang="en-US" sz="1200" dirty="0"/>
+          </a:p>
+        </p:txBody>
+      </p:sp>
+      <p:sp>
+        <p:nvSpPr>
+          <p:cNvPr id="21" name="Text 18"/>
+          <p:cNvSpPr/>
+          <p:nvPr/>
+        </p:nvSpPr>
+        <p:spPr>
+          <a:xfrm>
             <a:off x="7315200" y="4599432"/>
-            <a:ext cx="256032" cy="256032"/>
+            <a:ext cx="4480560" cy="256032"/>
           </a:xfrm>
           <a:prstGeom prst="rect">
             <a:avLst/>
@@ -7044,19 +12238,19 @@
           <a:bodyPr wrap="square" rtlCol="0" anchor="ctr"/>
           <a:lstStyle/>
           <a:p>
-            <a:pPr algn="ctr" indent="0" marL="0">
-              <a:buNone/>
-            </a:pPr>
-            <a:r>
-              <a:rPr lang="en-US" sz="1100" b="1" dirty="0">
-                <a:solidFill>
-                  <a:srgbClr val="FFFFFF"/>
-                </a:solidFill>
-                <a:latin typeface="Arial" pitchFamily="34" charset="0"/>
-                <a:ea typeface="Arial" pitchFamily="34" charset="-122"/>
-                <a:cs typeface="Arial" pitchFamily="34" charset="-120"/>
-              </a:rPr>
-              <a:t>4</a:t>
+            <a:pPr indent="0" marL="0">
+              <a:buNone/>
+            </a:pPr>
+            <a:r>
+              <a:rPr lang="en-US" sz="1100" b="1" spc="100" kern="0" dirty="0">
+                <a:solidFill>
+                  <a:srgbClr val="64748B"/>
+                </a:solidFill>
+                <a:latin typeface="Arial" pitchFamily="34" charset="0"/>
+                <a:ea typeface="Arial" pitchFamily="34" charset="-122"/>
+                <a:cs typeface="Arial" pitchFamily="34" charset="-120"/>
+              </a:rPr>
+              <a:t>DROPDOWNS / FILTERS ON THIS SCREEN</a:t>
             </a:r>
             <a:endParaRPr lang="en-US" sz="1100" dirty="0"/>
           </a:p>
@@ -7064,14 +12258,34 @@
       </p:sp>
       <p:sp>
         <p:nvSpPr>
-          <p:cNvPr id="20" name="Text 17"/>
-          <p:cNvSpPr/>
-          <p:nvPr/>
-        </p:nvSpPr>
-        <p:spPr>
-          <a:xfrm>
-            <a:off x="7699248" y="4581144"/>
-            <a:ext cx="4114800" cy="457200"/>
+          <p:cNvPr id="22" name="Shape 19"/>
+          <p:cNvSpPr/>
+          <p:nvPr/>
+        </p:nvSpPr>
+        <p:spPr>
+          <a:xfrm>
+            <a:off x="7315200" y="4937760"/>
+            <a:ext cx="82296" cy="82296"/>
+          </a:xfrm>
+          <a:prstGeom prst="rect">
+            <a:avLst/>
+          </a:prstGeom>
+          <a:solidFill>
+            <a:srgbClr val="003B71"/>
+          </a:solidFill>
+          <a:ln/>
+        </p:spPr>
+      </p:sp>
+      <p:sp>
+        <p:nvSpPr>
+          <p:cNvPr id="23" name="Text 20"/>
+          <p:cNvSpPr/>
+          <p:nvPr/>
+        </p:nvSpPr>
+        <p:spPr>
+          <a:xfrm>
+            <a:off x="7516368" y="4855464"/>
+            <a:ext cx="4297680" cy="365760"/>
           </a:xfrm>
           <a:prstGeom prst="rect">
             <a:avLst/>
@@ -7087,7 +12301,21 @@
               <a:buNone/>
             </a:pPr>
             <a:r>
-              <a:rPr lang="en-US" sz="1250" dirty="0">
+              <a:rPr lang="en-US" sz="1150" b="1" dirty="0">
+                <a:solidFill>
+                  <a:srgbClr val="003B71"/>
+                </a:solidFill>
+                <a:latin typeface="Arial" pitchFamily="34" charset="0"/>
+                <a:ea typeface="Arial" pitchFamily="34" charset="-122"/>
+                <a:cs typeface="Arial" pitchFamily="34" charset="-120"/>
+              </a:rPr>
+              <a:t>Pending / Completed: </a:t>
+            </a:r>
+            <a:pPr indent="0" marL="0">
+              <a:buNone/>
+            </a:pPr>
+            <a:r>
+              <a:rPr lang="en-US" sz="1150" dirty="0">
                 <a:solidFill>
                   <a:srgbClr val="1E293B"/>
                 </a:solidFill>
@@ -7095,9 +12323,82 @@
                 <a:ea typeface="Arial" pitchFamily="34" charset="-122"/>
                 <a:cs typeface="Arial" pitchFamily="34" charset="-120"/>
               </a:rPr>
-              <a:t>Confirm the column headers match, then upload</a:t>
-            </a:r>
-            <a:endParaRPr lang="en-US" sz="1250" dirty="0"/>
+              <a:t>Tab toggle, not a dropdown — switches which tasks are listed</a:t>
+            </a:r>
+            <a:endParaRPr lang="en-US" sz="1150" dirty="0"/>
+          </a:p>
+        </p:txBody>
+      </p:sp>
+      <p:sp>
+        <p:nvSpPr>
+          <p:cNvPr id="24" name="Shape 21"/>
+          <p:cNvSpPr/>
+          <p:nvPr/>
+        </p:nvSpPr>
+        <p:spPr>
+          <a:xfrm>
+            <a:off x="7315200" y="5321808"/>
+            <a:ext cx="82296" cy="82296"/>
+          </a:xfrm>
+          <a:prstGeom prst="rect">
+            <a:avLst/>
+          </a:prstGeom>
+          <a:solidFill>
+            <a:srgbClr val="003B71"/>
+          </a:solidFill>
+          <a:ln/>
+        </p:spPr>
+      </p:sp>
+      <p:sp>
+        <p:nvSpPr>
+          <p:cNvPr id="25" name="Text 22"/>
+          <p:cNvSpPr/>
+          <p:nvPr/>
+        </p:nvSpPr>
+        <p:spPr>
+          <a:xfrm>
+            <a:off x="7516368" y="5239512"/>
+            <a:ext cx="4297680" cy="365760"/>
+          </a:xfrm>
+          <a:prstGeom prst="rect">
+            <a:avLst/>
+          </a:prstGeom>
+          <a:noFill/>
+          <a:ln/>
+        </p:spPr>
+        <p:txBody>
+          <a:bodyPr wrap="square" rtlCol="0" anchor="t"/>
+          <a:lstStyle/>
+          <a:p>
+            <a:pPr indent="0" marL="0">
+              <a:buNone/>
+            </a:pPr>
+            <a:r>
+              <a:rPr lang="en-US" sz="1150" b="1" dirty="0">
+                <a:solidFill>
+                  <a:srgbClr val="003B71"/>
+                </a:solidFill>
+                <a:latin typeface="Arial" pitchFamily="34" charset="0"/>
+                <a:ea typeface="Arial" pitchFamily="34" charset="-122"/>
+                <a:cs typeface="Arial" pitchFamily="34" charset="-120"/>
+              </a:rPr>
+              <a:t>Search: </a:t>
+            </a:r>
+            <a:pPr indent="0" marL="0">
+              <a:buNone/>
+            </a:pPr>
+            <a:r>
+              <a:rPr lang="en-US" sz="1150" dirty="0">
+                <a:solidFill>
+                  <a:srgbClr val="1E293B"/>
+                </a:solidFill>
+                <a:latin typeface="Arial" pitchFamily="34" charset="0"/>
+                <a:ea typeface="Arial" pitchFamily="34" charset="-122"/>
+                <a:cs typeface="Arial" pitchFamily="34" charset="-120"/>
+              </a:rPr>
+              <a:t>Free-text search across article, barcode and client</a:t>
+            </a:r>
+            <a:endParaRPr lang="en-US" sz="1150" dirty="0"/>
           </a:p>
         </p:txBody>
       </p:sp>
@@ -7186,7 +12487,7 @@
                 <a:ea typeface="Arial" pitchFamily="34" charset="-122"/>
                 <a:cs typeface="Arial" pitchFamily="34" charset="-120"/>
               </a:rPr>
-              <a:t>STEP 7 · CLIENT ACCESS</a:t>
+              <a:t>STEP 6 · TASK DETAIL</a:t>
             </a:r>
             <a:endParaRPr lang="en-US" sz="1200" dirty="0"/>
           </a:p>
@@ -7225,7 +12526,7 @@
                 <a:ea typeface="Arial" pitchFamily="34" charset="-122"/>
                 <a:cs typeface="Arial" pitchFamily="34" charset="-120"/>
               </a:rPr>
-              <a:t>Client Visit Setup</a:t>
+              <a:t>Task Feedback</a:t>
             </a:r>
             <a:endParaRPr lang="en-US" sz="2600" dirty="0"/>
           </a:p>
@@ -7233,7 +12534,7 @@
       </p:sp>
       <p:pic>
         <p:nvPicPr>
-          <p:cNvPr id="5" name="Image 0" descr="/home/runner/workspace/screenshots/stockfix_guide/07_select_client.jpg">    </p:cNvPr>
+          <p:cNvPr id="5" name="Image 0" descr="/home/runner/workspace/screenshots/stockfix_guide/04_task_detail.jpg">    </p:cNvPr>
           <p:cNvPicPr>
             <a:picLocks noChangeAspect="1"/>
           </p:cNvPicPr>
@@ -7285,7 +12586,7 @@
         <p:spPr>
           <a:xfrm>
             <a:off x="7315200" y="1371600"/>
-            <a:ext cx="4480560" cy="1005840"/>
+            <a:ext cx="4480560" cy="822960"/>
           </a:xfrm>
           <a:prstGeom prst="rect">
             <a:avLst/>
@@ -7301,7 +12602,7 @@
               <a:buNone/>
             </a:pPr>
             <a:r>
-              <a:rPr lang="en-US" sz="1400" dirty="0">
+              <a:rPr lang="en-US" sz="1350" dirty="0">
                 <a:solidFill>
                   <a:srgbClr val="1E293B"/>
                 </a:solidFill>
@@ -7309,9 +12610,9 @@
                 <a:ea typeface="Arial" pitchFamily="34" charset="-122"/>
                 <a:cs typeface="Arial" pitchFamily="34" charset="-120"/>
               </a:rPr>
-              <a:t>External clients select their company and store to start a locked-down visit view scoped to just their own data.</a:t>
-            </a:r>
-            <a:endParaRPr lang="en-US" sz="1400" dirty="0"/>
+              <a:t>Opening a task shows stock metrics (SOH, DC stock, sell-out, WFC) with trend charts, plus the action capture form the rep fills in.</a:t>
+            </a:r>
+            <a:endParaRPr lang="en-US" sz="1350" dirty="0"/>
           </a:p>
         </p:txBody>
       </p:sp>
@@ -7323,8 +12624,8 @@
         </p:nvSpPr>
         <p:spPr>
           <a:xfrm>
-            <a:off x="7315200" y="2514600"/>
-            <a:ext cx="4480560" cy="274320"/>
+            <a:off x="7315200" y="2331720"/>
+            <a:ext cx="4480560" cy="256032"/>
           </a:xfrm>
           <a:prstGeom prst="rect">
             <a:avLst/>
@@ -7362,8 +12663,8 @@
         </p:nvSpPr>
         <p:spPr>
           <a:xfrm>
-            <a:off x="7315200" y="2898648"/>
-            <a:ext cx="256032" cy="256032"/>
+            <a:off x="7315200" y="2670048"/>
+            <a:ext cx="237744" cy="237744"/>
           </a:xfrm>
           <a:prstGeom prst="ellipse">
             <a:avLst/>
@@ -7382,8 +12683,8 @@
         </p:nvSpPr>
         <p:spPr>
           <a:xfrm>
-            <a:off x="7315200" y="2898648"/>
-            <a:ext cx="256032" cy="256032"/>
+            <a:off x="7315200" y="2670048"/>
+            <a:ext cx="237744" cy="237744"/>
           </a:xfrm>
           <a:prstGeom prst="rect">
             <a:avLst/>
@@ -7399,7 +12700,7 @@
               <a:buNone/>
             </a:pPr>
             <a:r>
-              <a:rPr lang="en-US" sz="1100" b="1" dirty="0">
+              <a:rPr lang="en-US" sz="1050" b="1" dirty="0">
                 <a:solidFill>
                   <a:srgbClr val="FFFFFF"/>
                 </a:solidFill>
@@ -7409,7 +12710,7 @@
               </a:rPr>
               <a:t>1</a:t>
             </a:r>
-            <a:endParaRPr lang="en-US" sz="1100" dirty="0"/>
+            <a:endParaRPr lang="en-US" sz="1050" dirty="0"/>
           </a:p>
         </p:txBody>
       </p:sp>
@@ -7421,8 +12722,8 @@
         </p:nvSpPr>
         <p:spPr>
           <a:xfrm>
-            <a:off x="7699248" y="2880360"/>
-            <a:ext cx="4114800" cy="457200"/>
+            <a:off x="7680960" y="2633472"/>
+            <a:ext cx="4114800" cy="384048"/>
           </a:xfrm>
           <a:prstGeom prst="rect">
             <a:avLst/>
@@ -7438,7 +12739,7 @@
               <a:buNone/>
             </a:pPr>
             <a:r>
-              <a:rPr lang="en-US" sz="1250" dirty="0">
+              <a:rPr lang="en-US" sz="1200" dirty="0">
                 <a:solidFill>
                   <a:srgbClr val="1E293B"/>
                 </a:solidFill>
@@ -7446,9 +12747,9 @@
                 <a:ea typeface="Arial" pitchFamily="34" charset="-122"/>
                 <a:cs typeface="Arial" pitchFamily="34" charset="-120"/>
               </a:rPr>
-              <a:t>From Choose Access, tap "I'm a Client"</a:t>
-            </a:r>
-            <a:endParaRPr lang="en-US" sz="1250" dirty="0"/>
+              <a:t>From the Tasks screen, tap any task card</a:t>
+            </a:r>
+            <a:endParaRPr lang="en-US" sz="1200" dirty="0"/>
           </a:p>
         </p:txBody>
       </p:sp>
@@ -7460,8 +12761,8 @@
         </p:nvSpPr>
         <p:spPr>
           <a:xfrm>
-            <a:off x="7315200" y="3465576"/>
-            <a:ext cx="256032" cy="256032"/>
+            <a:off x="7315200" y="3127248"/>
+            <a:ext cx="237744" cy="237744"/>
           </a:xfrm>
           <a:prstGeom prst="ellipse">
             <a:avLst/>
@@ -7480,8 +12781,8 @@
         </p:nvSpPr>
         <p:spPr>
           <a:xfrm>
-            <a:off x="7315200" y="3465576"/>
-            <a:ext cx="256032" cy="256032"/>
+            <a:off x="7315200" y="3127248"/>
+            <a:ext cx="237744" cy="237744"/>
           </a:xfrm>
           <a:prstGeom prst="rect">
             <a:avLst/>
@@ -7497,7 +12798,7 @@
               <a:buNone/>
             </a:pPr>
             <a:r>
-              <a:rPr lang="en-US" sz="1100" b="1" dirty="0">
+              <a:rPr lang="en-US" sz="1050" b="1" dirty="0">
                 <a:solidFill>
                   <a:srgbClr val="FFFFFF"/>
                 </a:solidFill>
@@ -7507,7 +12808,7 @@
               </a:rPr>
               <a:t>2</a:t>
             </a:r>
-            <a:endParaRPr lang="en-US" sz="1100" dirty="0"/>
+            <a:endParaRPr lang="en-US" sz="1050" dirty="0"/>
           </a:p>
         </p:txBody>
       </p:sp>
@@ -7519,8 +12820,8 @@
         </p:nvSpPr>
         <p:spPr>
           <a:xfrm>
-            <a:off x="7699248" y="3447288"/>
-            <a:ext cx="4114800" cy="457200"/>
+            <a:off x="7680960" y="3090672"/>
+            <a:ext cx="4114800" cy="384048"/>
           </a:xfrm>
           <a:prstGeom prst="rect">
             <a:avLst/>
@@ -7536,7 +12837,7 @@
               <a:buNone/>
             </a:pPr>
             <a:r>
-              <a:rPr lang="en-US" sz="1250" dirty="0">
+              <a:rPr lang="en-US" sz="1200" dirty="0">
                 <a:solidFill>
                   <a:srgbClr val="1E293B"/>
                 </a:solidFill>
@@ -7544,9 +12845,9 @@
                 <a:ea typeface="Arial" pitchFamily="34" charset="-122"/>
                 <a:cs typeface="Arial" pitchFamily="34" charset="-120"/>
               </a:rPr>
-              <a:t>Select your company from the Client dropdown</a:t>
-            </a:r>
-            <a:endParaRPr lang="en-US" sz="1250" dirty="0"/>
+              <a:t>Review SOH, DC SOH, Sell Out and WFC figures and trends</a:t>
+            </a:r>
+            <a:endParaRPr lang="en-US" sz="1200" dirty="0"/>
           </a:p>
         </p:txBody>
       </p:sp>
@@ -7558,8 +12859,8 @@
         </p:nvSpPr>
         <p:spPr>
           <a:xfrm>
-            <a:off x="7315200" y="4032504"/>
-            <a:ext cx="256032" cy="256032"/>
+            <a:off x="7315200" y="3584448"/>
+            <a:ext cx="237744" cy="237744"/>
           </a:xfrm>
           <a:prstGeom prst="ellipse">
             <a:avLst/>
@@ -7578,8 +12879,8 @@
         </p:nvSpPr>
         <p:spPr>
           <a:xfrm>
-            <a:off x="7315200" y="4032504"/>
-            <a:ext cx="256032" cy="256032"/>
+            <a:off x="7315200" y="3584448"/>
+            <a:ext cx="237744" cy="237744"/>
           </a:xfrm>
           <a:prstGeom prst="rect">
             <a:avLst/>
@@ -7595,7 +12896,7 @@
               <a:buNone/>
             </a:pPr>
             <a:r>
-              <a:rPr lang="en-US" sz="1100" b="1" dirty="0">
+              <a:rPr lang="en-US" sz="1050" b="1" dirty="0">
                 <a:solidFill>
                   <a:srgbClr val="FFFFFF"/>
                 </a:solidFill>
@@ -7605,7 +12906,7 @@
               </a:rPr>
               <a:t>3</a:t>
             </a:r>
-            <a:endParaRPr lang="en-US" sz="1100" dirty="0"/>
+            <a:endParaRPr lang="en-US" sz="1050" dirty="0"/>
           </a:p>
         </p:txBody>
       </p:sp>
@@ -7617,8 +12918,8 @@
         </p:nvSpPr>
         <p:spPr>
           <a:xfrm>
-            <a:off x="7699248" y="4014216"/>
-            <a:ext cx="4114800" cy="457200"/>
+            <a:off x="7680960" y="3547872"/>
+            <a:ext cx="4114800" cy="384048"/>
           </a:xfrm>
           <a:prstGeom prst="rect">
             <a:avLst/>
@@ -7634,7 +12935,7 @@
               <a:buNone/>
             </a:pPr>
             <a:r>
-              <a:rPr lang="en-US" sz="1250" dirty="0">
+              <a:rPr lang="en-US" sz="1200" dirty="0">
                 <a:solidFill>
                   <a:srgbClr val="1E293B"/>
                 </a:solidFill>
@@ -7642,9 +12943,9 @@
                 <a:ea typeface="Arial" pitchFamily="34" charset="-122"/>
                 <a:cs typeface="Arial" pitchFamily="34" charset="-120"/>
               </a:rPr>
-              <a:t>Select your store from the Store dropdown</a:t>
-            </a:r>
-            <a:endParaRPr lang="en-US" sz="1250" dirty="0"/>
+              <a:t>Enter the Physical Count and confirm if stock was adjusted</a:t>
+            </a:r>
+            <a:endParaRPr lang="en-US" sz="1200" dirty="0"/>
           </a:p>
         </p:txBody>
       </p:sp>
@@ -7656,8 +12957,8 @@
         </p:nvSpPr>
         <p:spPr>
           <a:xfrm>
-            <a:off x="7315200" y="4599432"/>
-            <a:ext cx="256032" cy="256032"/>
+            <a:off x="7315200" y="4041648"/>
+            <a:ext cx="237744" cy="237744"/>
           </a:xfrm>
           <a:prstGeom prst="ellipse">
             <a:avLst/>
@@ -7676,8 +12977,8 @@
         </p:nvSpPr>
         <p:spPr>
           <a:xfrm>
-            <a:off x="7315200" y="4599432"/>
-            <a:ext cx="256032" cy="256032"/>
+            <a:off x="7315200" y="4041648"/>
+            <a:ext cx="237744" cy="237744"/>
           </a:xfrm>
           <a:prstGeom prst="rect">
             <a:avLst/>
@@ -7693,7 +12994,7 @@
               <a:buNone/>
             </a:pPr>
             <a:r>
-              <a:rPr lang="en-US" sz="1100" b="1" dirty="0">
+              <a:rPr lang="en-US" sz="1050" b="1" dirty="0">
                 <a:solidFill>
                   <a:srgbClr val="FFFFFF"/>
                 </a:solidFill>
@@ -7703,7 +13004,7 @@
               </a:rPr>
               <a:t>4</a:t>
             </a:r>
-            <a:endParaRPr lang="en-US" sz="1100" dirty="0"/>
+            <a:endParaRPr lang="en-US" sz="1050" dirty="0"/>
           </a:p>
         </p:txBody>
       </p:sp>
@@ -7715,8 +13016,8 @@
         </p:nvSpPr>
         <p:spPr>
           <a:xfrm>
-            <a:off x="7699248" y="4581144"/>
-            <a:ext cx="4114800" cy="457200"/>
+            <a:off x="7680960" y="4005072"/>
+            <a:ext cx="4114800" cy="384048"/>
           </a:xfrm>
           <a:prstGeom prst="rect">
             <a:avLst/>
@@ -7732,7 +13033,7 @@
               <a:buNone/>
             </a:pPr>
             <a:r>
-              <a:rPr lang="en-US" sz="1250" dirty="0">
+              <a:rPr lang="en-US" sz="1200" dirty="0">
                 <a:solidFill>
                   <a:srgbClr val="1E293B"/>
                 </a:solidFill>
@@ -7740,9 +13041,9 @@
                 <a:ea typeface="Arial" pitchFamily="34" charset="-122"/>
                 <a:cs typeface="Arial" pitchFamily="34" charset="-120"/>
               </a:rPr>
-              <a:t>Tap "Start Visit" to view your store's task data</a:t>
-            </a:r>
-            <a:endParaRPr lang="en-US" sz="1250" dirty="0"/>
+              <a:t>Open the Reason Code and Action Taken dropdowns (next slides)</a:t>
+            </a:r>
+            <a:endParaRPr lang="en-US" sz="1200" dirty="0"/>
           </a:p>
         </p:txBody>
       </p:sp>
@@ -7831,7 +13132,7 @@
                 <a:ea typeface="Arial" pitchFamily="34" charset="-122"/>
                 <a:cs typeface="Arial" pitchFamily="34" charset="-120"/>
               </a:rPr>
-              <a:t>STEP 8 · REP SELF-TRACKING</a:t>
+              <a:t>STEP 6B · TASK FEEDBACK</a:t>
             </a:r>
             <a:endParaRPr lang="en-US" sz="1200" dirty="0"/>
           </a:p>
@@ -7870,7 +13171,7 @@
                 <a:ea typeface="Arial" pitchFamily="34" charset="-122"/>
                 <a:cs typeface="Arial" pitchFamily="34" charset="-120"/>
               </a:rPr>
-              <a:t>My Task Progress</a:t>
+              <a:t>Reason Code Dropdown Open</a:t>
             </a:r>
             <a:endParaRPr lang="en-US" sz="2600" dirty="0"/>
           </a:p>
@@ -7878,7 +13179,7 @@
       </p:sp>
       <p:pic>
         <p:nvPicPr>
-          <p:cNvPr id="5" name="Image 0" descr="/home/runner/workspace/screenshots/stockfix_guide/08_rep_progress.jpg">    </p:cNvPr>
+          <p:cNvPr id="5" name="Image 0" descr="/home/runner/workspace/screenshots/stockfix_guide/14_task_reason_code_dropdown.jpg">    </p:cNvPr>
           <p:cNvPicPr>
             <a:picLocks noChangeAspect="1"/>
           </p:cNvPicPr>
@@ -7930,7 +13231,7 @@
         <p:spPr>
           <a:xfrm>
             <a:off x="7315200" y="1371600"/>
-            <a:ext cx="4480560" cy="1005840"/>
+            <a:ext cx="4480560" cy="822960"/>
           </a:xfrm>
           <a:prstGeom prst="rect">
             <a:avLst/>
@@ -7946,7 +13247,7 @@
               <a:buNone/>
             </a:pPr>
             <a:r>
-              <a:rPr lang="en-US" sz="1400" dirty="0">
+              <a:rPr lang="en-US" sz="1350" dirty="0">
                 <a:solidFill>
                   <a:srgbClr val="1E293B"/>
                 </a:solidFill>
@@ -7954,9 +13255,9 @@
                 <a:ea typeface="Arial" pitchFamily="34" charset="-122"/>
                 <a:cs typeface="Arial" pitchFamily="34" charset="-120"/>
               </a:rPr>
-              <a:t>Reps can check their own completion stats — priority tasks open vs done, and a searchable list of open/completed tasks.</a:t>
-            </a:r>
-            <a:endParaRPr lang="en-US" sz="1400" dirty="0"/>
+              <a:t>Every task requires a Reason Code before it can be submitted. This dropdown lists the standard reasons for the stock issue.</a:t>
+            </a:r>
+            <a:endParaRPr lang="en-US" sz="1350" dirty="0"/>
           </a:p>
         </p:txBody>
       </p:sp>
@@ -7968,8 +13269,8 @@
         </p:nvSpPr>
         <p:spPr>
           <a:xfrm>
-            <a:off x="7315200" y="2514600"/>
-            <a:ext cx="4480560" cy="274320"/>
+            <a:off x="7315200" y="2331720"/>
+            <a:ext cx="4480560" cy="256032"/>
           </a:xfrm>
           <a:prstGeom prst="rect">
             <a:avLst/>
@@ -8007,8 +13308,8 @@
         </p:nvSpPr>
         <p:spPr>
           <a:xfrm>
-            <a:off x="7315200" y="2898648"/>
-            <a:ext cx="256032" cy="256032"/>
+            <a:off x="7315200" y="2670048"/>
+            <a:ext cx="237744" cy="237744"/>
           </a:xfrm>
           <a:prstGeom prst="ellipse">
             <a:avLst/>
@@ -8027,8 +13328,8 @@
         </p:nvSpPr>
         <p:spPr>
           <a:xfrm>
-            <a:off x="7315200" y="2898648"/>
-            <a:ext cx="256032" cy="256032"/>
+            <a:off x="7315200" y="2670048"/>
+            <a:ext cx="237744" cy="237744"/>
           </a:xfrm>
           <a:prstGeom prst="rect">
             <a:avLst/>
@@ -8044,7 +13345,7 @@
               <a:buNone/>
             </a:pPr>
             <a:r>
-              <a:rPr lang="en-US" sz="1100" b="1" dirty="0">
+              <a:rPr lang="en-US" sz="1050" b="1" dirty="0">
                 <a:solidFill>
                   <a:srgbClr val="FFFFFF"/>
                 </a:solidFill>
@@ -8054,7 +13355,7 @@
               </a:rPr>
               <a:t>1</a:t>
             </a:r>
-            <a:endParaRPr lang="en-US" sz="1100" dirty="0"/>
+            <a:endParaRPr lang="en-US" sz="1050" dirty="0"/>
           </a:p>
         </p:txBody>
       </p:sp>
@@ -8066,8 +13367,8 @@
         </p:nvSpPr>
         <p:spPr>
           <a:xfrm>
-            <a:off x="7699248" y="2880360"/>
-            <a:ext cx="4114800" cy="457200"/>
+            <a:off x="7680960" y="2633472"/>
+            <a:ext cx="4114800" cy="384048"/>
           </a:xfrm>
           <a:prstGeom prst="rect">
             <a:avLst/>
@@ -8083,7 +13384,7 @@
               <a:buNone/>
             </a:pPr>
             <a:r>
-              <a:rPr lang="en-US" sz="1250" dirty="0">
+              <a:rPr lang="en-US" sz="1200" dirty="0">
                 <a:solidFill>
                   <a:srgbClr val="1E293B"/>
                 </a:solidFill>
@@ -8091,9 +13392,9 @@
                 <a:ea typeface="Arial" pitchFamily="34" charset="-122"/>
                 <a:cs typeface="Arial" pitchFamily="34" charset="-120"/>
               </a:rPr>
-              <a:t>From the bottom nav, tap "Overview" then "My Progress"</a:t>
-            </a:r>
-            <a:endParaRPr lang="en-US" sz="1250" dirty="0"/>
+              <a:t>On the Task Feedback screen, tap "Reason Code"</a:t>
+            </a:r>
+            <a:endParaRPr lang="en-US" sz="1200" dirty="0"/>
           </a:p>
         </p:txBody>
       </p:sp>
@@ -8105,8 +13406,8 @@
         </p:nvSpPr>
         <p:spPr>
           <a:xfrm>
-            <a:off x="7315200" y="3465576"/>
-            <a:ext cx="256032" cy="256032"/>
+            <a:off x="7315200" y="3127248"/>
+            <a:ext cx="237744" cy="237744"/>
           </a:xfrm>
           <a:prstGeom prst="ellipse">
             <a:avLst/>
@@ -8125,8 +13426,8 @@
         </p:nvSpPr>
         <p:spPr>
           <a:xfrm>
-            <a:off x="7315200" y="3465576"/>
-            <a:ext cx="256032" cy="256032"/>
+            <a:off x="7315200" y="3127248"/>
+            <a:ext cx="237744" cy="237744"/>
           </a:xfrm>
           <a:prstGeom prst="rect">
             <a:avLst/>
@@ -8142,7 +13443,7 @@
               <a:buNone/>
             </a:pPr>
             <a:r>
-              <a:rPr lang="en-US" sz="1100" b="1" dirty="0">
+              <a:rPr lang="en-US" sz="1050" b="1" dirty="0">
                 <a:solidFill>
                   <a:srgbClr val="FFFFFF"/>
                 </a:solidFill>
@@ -8152,20 +13453,118 @@
               </a:rPr>
               <a:t>2</a:t>
             </a:r>
+            <a:endParaRPr lang="en-US" sz="1050" dirty="0"/>
+          </a:p>
+        </p:txBody>
+      </p:sp>
+      <p:sp>
+        <p:nvSpPr>
+          <p:cNvPr id="14" name="Text 11"/>
+          <p:cNvSpPr/>
+          <p:nvPr/>
+        </p:nvSpPr>
+        <p:spPr>
+          <a:xfrm>
+            <a:off x="7680960" y="3090672"/>
+            <a:ext cx="4114800" cy="384048"/>
+          </a:xfrm>
+          <a:prstGeom prst="rect">
+            <a:avLst/>
+          </a:prstGeom>
+          <a:noFill/>
+          <a:ln/>
+        </p:spPr>
+        <p:txBody>
+          <a:bodyPr wrap="square" rtlCol="0" anchor="t"/>
+          <a:lstStyle/>
+          <a:p>
+            <a:pPr indent="0" marL="0">
+              <a:buNone/>
+            </a:pPr>
+            <a:r>
+              <a:rPr lang="en-US" sz="1200" dirty="0">
+                <a:solidFill>
+                  <a:srgbClr val="1E293B"/>
+                </a:solidFill>
+                <a:latin typeface="Arial" pitchFamily="34" charset="0"/>
+                <a:ea typeface="Arial" pitchFamily="34" charset="-122"/>
+                <a:cs typeface="Arial" pitchFamily="34" charset="-120"/>
+              </a:rPr>
+              <a:t>Scroll or tap to pick the reason that matches the issue</a:t>
+            </a:r>
+            <a:endParaRPr lang="en-US" sz="1200" dirty="0"/>
+          </a:p>
+        </p:txBody>
+      </p:sp>
+      <p:sp>
+        <p:nvSpPr>
+          <p:cNvPr id="15" name="Text 12"/>
+          <p:cNvSpPr/>
+          <p:nvPr/>
+        </p:nvSpPr>
+        <p:spPr>
+          <a:xfrm>
+            <a:off x="7315200" y="3685032"/>
+            <a:ext cx="4480560" cy="256032"/>
+          </a:xfrm>
+          <a:prstGeom prst="rect">
+            <a:avLst/>
+          </a:prstGeom>
+          <a:noFill/>
+          <a:ln/>
+        </p:spPr>
+        <p:txBody>
+          <a:bodyPr wrap="square" rtlCol="0" anchor="ctr"/>
+          <a:lstStyle/>
+          <a:p>
+            <a:pPr indent="0" marL="0">
+              <a:buNone/>
+            </a:pPr>
+            <a:r>
+              <a:rPr lang="en-US" sz="1100" b="1" spc="100" kern="0" dirty="0">
+                <a:solidFill>
+                  <a:srgbClr val="64748B"/>
+                </a:solidFill>
+                <a:latin typeface="Arial" pitchFamily="34" charset="0"/>
+                <a:ea typeface="Arial" pitchFamily="34" charset="-122"/>
+                <a:cs typeface="Arial" pitchFamily="34" charset="-120"/>
+              </a:rPr>
+              <a:t>DROPDOWNS / FILTERS ON THIS SCREEN</a:t>
+            </a:r>
             <a:endParaRPr lang="en-US" sz="1100" dirty="0"/>
           </a:p>
         </p:txBody>
       </p:sp>
       <p:sp>
         <p:nvSpPr>
-          <p:cNvPr id="14" name="Text 11"/>
-          <p:cNvSpPr/>
-          <p:nvPr/>
-        </p:nvSpPr>
-        <p:spPr>
-          <a:xfrm>
-            <a:off x="7699248" y="3447288"/>
-            <a:ext cx="4114800" cy="457200"/>
+          <p:cNvPr id="16" name="Shape 13"/>
+          <p:cNvSpPr/>
+          <p:nvPr/>
+        </p:nvSpPr>
+        <p:spPr>
+          <a:xfrm>
+            <a:off x="7315200" y="4023360"/>
+            <a:ext cx="82296" cy="82296"/>
+          </a:xfrm>
+          <a:prstGeom prst="rect">
+            <a:avLst/>
+          </a:prstGeom>
+          <a:solidFill>
+            <a:srgbClr val="003B71"/>
+          </a:solidFill>
+          <a:ln/>
+        </p:spPr>
+      </p:sp>
+      <p:sp>
+        <p:nvSpPr>
+          <p:cNvPr id="17" name="Text 14"/>
+          <p:cNvSpPr/>
+          <p:nvPr/>
+        </p:nvSpPr>
+        <p:spPr>
+          <a:xfrm>
+            <a:off x="7516368" y="3941064"/>
+            <a:ext cx="4297680" cy="365760"/>
           </a:xfrm>
           <a:prstGeom prst="rect">
             <a:avLst/>
@@ -8181,7 +13580,21 @@
               <a:buNone/>
             </a:pPr>
             <a:r>
-              <a:rPr lang="en-US" sz="1250" dirty="0">
+              <a:rPr lang="en-US" sz="1150" b="1" dirty="0">
+                <a:solidFill>
+                  <a:srgbClr val="003B71"/>
+                </a:solidFill>
+                <a:latin typeface="Arial" pitchFamily="34" charset="0"/>
+                <a:ea typeface="Arial" pitchFamily="34" charset="-122"/>
+                <a:cs typeface="Arial" pitchFamily="34" charset="-120"/>
+              </a:rPr>
+              <a:t>Reason Code: </a:t>
+            </a:r>
+            <a:pPr indent="0" marL="0">
+              <a:buNone/>
+            </a:pPr>
+            <a:r>
+              <a:rPr lang="en-US" sz="1150" dirty="0">
                 <a:solidFill>
                   <a:srgbClr val="1E293B"/>
                 </a:solidFill>
@@ -8189,205 +13602,9 @@
                 <a:ea typeface="Arial" pitchFamily="34" charset="-122"/>
                 <a:cs typeface="Arial" pitchFamily="34" charset="-120"/>
               </a:rPr>
-              <a:t>Review Priority Open / Done / Rate cards</a:t>
-            </a:r>
-            <a:endParaRPr lang="en-US" sz="1250" dirty="0"/>
-          </a:p>
-        </p:txBody>
-      </p:sp>
-      <p:sp>
-        <p:nvSpPr>
-          <p:cNvPr id="15" name="Shape 12"/>
-          <p:cNvSpPr/>
-          <p:nvPr/>
-        </p:nvSpPr>
-        <p:spPr>
-          <a:xfrm>
-            <a:off x="7315200" y="4032504"/>
-            <a:ext cx="256032" cy="256032"/>
-          </a:xfrm>
-          <a:prstGeom prst="ellipse">
-            <a:avLst/>
-          </a:prstGeom>
-          <a:solidFill>
-            <a:srgbClr val="F97316"/>
-          </a:solidFill>
-          <a:ln/>
-        </p:spPr>
-      </p:sp>
-      <p:sp>
-        <p:nvSpPr>
-          <p:cNvPr id="16" name="Text 13"/>
-          <p:cNvSpPr/>
-          <p:nvPr/>
-        </p:nvSpPr>
-        <p:spPr>
-          <a:xfrm>
-            <a:off x="7315200" y="4032504"/>
-            <a:ext cx="256032" cy="256032"/>
-          </a:xfrm>
-          <a:prstGeom prst="rect">
-            <a:avLst/>
-          </a:prstGeom>
-          <a:noFill/>
-          <a:ln/>
-        </p:spPr>
-        <p:txBody>
-          <a:bodyPr wrap="square" rtlCol="0" anchor="ctr"/>
-          <a:lstStyle/>
-          <a:p>
-            <a:pPr algn="ctr" indent="0" marL="0">
-              <a:buNone/>
-            </a:pPr>
-            <a:r>
-              <a:rPr lang="en-US" sz="1100" b="1" dirty="0">
-                <a:solidFill>
-                  <a:srgbClr val="FFFFFF"/>
-                </a:solidFill>
-                <a:latin typeface="Arial" pitchFamily="34" charset="0"/>
-                <a:ea typeface="Arial" pitchFamily="34" charset="-122"/>
-                <a:cs typeface="Arial" pitchFamily="34" charset="-120"/>
-              </a:rPr>
-              <a:t>3</a:t>
-            </a:r>
-            <a:endParaRPr lang="en-US" sz="1100" dirty="0"/>
-          </a:p>
-        </p:txBody>
-      </p:sp>
-      <p:sp>
-        <p:nvSpPr>
-          <p:cNvPr id="17" name="Text 14"/>
-          <p:cNvSpPr/>
-          <p:nvPr/>
-        </p:nvSpPr>
-        <p:spPr>
-          <a:xfrm>
-            <a:off x="7699248" y="4014216"/>
-            <a:ext cx="4114800" cy="457200"/>
-          </a:xfrm>
-          <a:prstGeom prst="rect">
-            <a:avLst/>
-          </a:prstGeom>
-          <a:noFill/>
-          <a:ln/>
-        </p:spPr>
-        <p:txBody>
-          <a:bodyPr wrap="square" rtlCol="0" anchor="t"/>
-          <a:lstStyle/>
-          <a:p>
-            <a:pPr indent="0" marL="0">
-              <a:buNone/>
-            </a:pPr>
-            <a:r>
-              <a:rPr lang="en-US" sz="1250" dirty="0">
-                <a:solidFill>
-                  <a:srgbClr val="1E293B"/>
-                </a:solidFill>
-                <a:latin typeface="Arial" pitchFamily="34" charset="0"/>
-                <a:ea typeface="Arial" pitchFamily="34" charset="-122"/>
-                <a:cs typeface="Arial" pitchFamily="34" charset="-120"/>
-              </a:rPr>
-              <a:t>Switch between "Open" and "Completed" tabs</a:t>
-            </a:r>
-            <a:endParaRPr lang="en-US" sz="1250" dirty="0"/>
-          </a:p>
-        </p:txBody>
-      </p:sp>
-      <p:sp>
-        <p:nvSpPr>
-          <p:cNvPr id="18" name="Shape 15"/>
-          <p:cNvSpPr/>
-          <p:nvPr/>
-        </p:nvSpPr>
-        <p:spPr>
-          <a:xfrm>
-            <a:off x="7315200" y="4599432"/>
-            <a:ext cx="256032" cy="256032"/>
-          </a:xfrm>
-          <a:prstGeom prst="ellipse">
-            <a:avLst/>
-          </a:prstGeom>
-          <a:solidFill>
-            <a:srgbClr val="F97316"/>
-          </a:solidFill>
-          <a:ln/>
-        </p:spPr>
-      </p:sp>
-      <p:sp>
-        <p:nvSpPr>
-          <p:cNvPr id="19" name="Text 16"/>
-          <p:cNvSpPr/>
-          <p:nvPr/>
-        </p:nvSpPr>
-        <p:spPr>
-          <a:xfrm>
-            <a:off x="7315200" y="4599432"/>
-            <a:ext cx="256032" cy="256032"/>
-          </a:xfrm>
-          <a:prstGeom prst="rect">
-            <a:avLst/>
-          </a:prstGeom>
-          <a:noFill/>
-          <a:ln/>
-        </p:spPr>
-        <p:txBody>
-          <a:bodyPr wrap="square" rtlCol="0" anchor="ctr"/>
-          <a:lstStyle/>
-          <a:p>
-            <a:pPr algn="ctr" indent="0" marL="0">
-              <a:buNone/>
-            </a:pPr>
-            <a:r>
-              <a:rPr lang="en-US" sz="1100" b="1" dirty="0">
-                <a:solidFill>
-                  <a:srgbClr val="FFFFFF"/>
-                </a:solidFill>
-                <a:latin typeface="Arial" pitchFamily="34" charset="0"/>
-                <a:ea typeface="Arial" pitchFamily="34" charset="-122"/>
-                <a:cs typeface="Arial" pitchFamily="34" charset="-120"/>
-              </a:rPr>
-              <a:t>4</a:t>
-            </a:r>
-            <a:endParaRPr lang="en-US" sz="1100" dirty="0"/>
-          </a:p>
-        </p:txBody>
-      </p:sp>
-      <p:sp>
-        <p:nvSpPr>
-          <p:cNvPr id="20" name="Text 17"/>
-          <p:cNvSpPr/>
-          <p:nvPr/>
-        </p:nvSpPr>
-        <p:spPr>
-          <a:xfrm>
-            <a:off x="7699248" y="4581144"/>
-            <a:ext cx="4114800" cy="457200"/>
-          </a:xfrm>
-          <a:prstGeom prst="rect">
-            <a:avLst/>
-          </a:prstGeom>
-          <a:noFill/>
-          <a:ln/>
-        </p:spPr>
-        <p:txBody>
-          <a:bodyPr wrap="square" rtlCol="0" anchor="t"/>
-          <a:lstStyle/>
-          <a:p>
-            <a:pPr indent="0" marL="0">
-              <a:buNone/>
-            </a:pPr>
-            <a:r>
-              <a:rPr lang="en-US" sz="1250" dirty="0">
-                <a:solidFill>
-                  <a:srgbClr val="1E293B"/>
-                </a:solidFill>
-                <a:latin typeface="Arial" pitchFamily="34" charset="0"/>
-                <a:ea typeface="Arial" pitchFamily="34" charset="-122"/>
-                <a:cs typeface="Arial" pitchFamily="34" charset="-120"/>
-              </a:rPr>
-              <a:t>Search tasks by name to find a specific one quickly</a:t>
-            </a:r>
-            <a:endParaRPr lang="en-US" sz="1250" dirty="0"/>
+              <a:t>Awaiting delivery, No stock available, Store out of stock, Stock in backroom, Shelf space issue, Slow-moving, Damaged/expired, Not ranged, Store operational issue, System/data issue, Promo not set up, Other</a:t>
+            </a:r>
+            <a:endParaRPr lang="en-US" sz="1150" dirty="0"/>
           </a:p>
         </p:txBody>
       </p:sp>
